--- a/folletos/2026-04/pptx/FIP_VANTRUST_LIQUIDEZ_ALTO_APORTE.pptx
+++ b/folletos/2026-04/pptx/FIP_VANTRUST_LIQUIDEZ_ALTO_APORTE.pptx
@@ -2927,7 +2927,7 @@
                 <a:ea typeface="Calibri" pitchFamily="34" charset="-122"/>
                 <a:cs typeface="Calibri" pitchFamily="34" charset="-120"/>
               </a:rPr>
-              <a:t>prueba CLP</a:t>
+              <a:t>prueba 2 CLP</a:t>
             </a:r>
             <a:endParaRPr lang="en-US" sz="800" dirty="0"/>
           </a:p>

--- a/folletos/2026-04/pptx/FIP_VANTRUST_LIQUIDEZ_ALTO_APORTE.pptx
+++ b/folletos/2026-04/pptx/FIP_VANTRUST_LIQUIDEZ_ALTO_APORTE.pptx
@@ -5363,7 +5363,7 @@
                 <a:ea typeface="Calibri" pitchFamily="34" charset="-122"/>
                 <a:cs typeface="Calibri" pitchFamily="34" charset="-120"/>
               </a:rPr>
-              <a:t>prueba CLP</a:t>
+              <a:t>prueba 3 CLP</a:t>
             </a:r>
             <a:endParaRPr lang="en-US" sz="800" dirty="0"/>
           </a:p>

--- a/folletos/2026-04/pptx/FIP_VANTRUST_LIQUIDEZ_ALTO_APORTE.pptx
+++ b/folletos/2026-04/pptx/FIP_VANTRUST_LIQUIDEZ_ALTO_APORTE.pptx
@@ -6323,7 +6323,7 @@
                 <a:ea typeface="Calibri" pitchFamily="34" charset="-122"/>
                 <a:cs typeface="Calibri" pitchFamily="34" charset="-120"/>
               </a:rPr>
-              <a:t>prueba CLP</a:t>
+              <a:t>prueba 4 CLP</a:t>
             </a:r>
             <a:endParaRPr lang="en-US" sz="800" dirty="0"/>
           </a:p>

--- a/folletos/2026-04/pptx/FIP_VANTRUST_LIQUIDEZ_ALTO_APORTE.pptx
+++ b/folletos/2026-04/pptx/FIP_VANTRUST_LIQUIDEZ_ALTO_APORTE.pptx
@@ -6373,7 +6373,7 @@
                 <a:ea typeface="Calibri" pitchFamily="34" charset="-122"/>
                 <a:cs typeface="Calibri" pitchFamily="34" charset="-120"/>
               </a:rPr>
-              <a:t>prueba CLP</a:t>
+              <a:t>prueba 6 CLP</a:t>
             </a:r>
             <a:endParaRPr lang="en-US" sz="800" dirty="0"/>
           </a:p>

--- a/folletos/2026-04/pptx/FIP_VANTRUST_LIQUIDEZ_ALTO_APORTE.pptx
+++ b/folletos/2026-04/pptx/FIP_VANTRUST_LIQUIDEZ_ALTO_APORTE.pptx
@@ -6373,7 +6373,7 @@
                 <a:ea typeface="Calibri" pitchFamily="34" charset="-122"/>
                 <a:cs typeface="Calibri" pitchFamily="34" charset="-120"/>
               </a:rPr>
-              <a:t>prueba 6 CLP</a:t>
+              <a:t>prueba CLP</a:t>
             </a:r>
             <a:endParaRPr lang="en-US" sz="800" dirty="0"/>
           </a:p>
@@ -33352,13 +33352,91 @@
       </p:sp>
       <p:sp>
         <p:nvSpPr>
-          <p:cNvPr id="8" name="Shape 6"/>
+          <p:cNvPr id="8" name="Text 6"/>
           <p:cNvSpPr/>
           <p:nvPr/>
         </p:nvSpPr>
         <p:spPr>
           <a:xfrm>
-            <a:off x="118872" y="1810512"/>
+            <a:off x="118872" y="1719072"/>
+            <a:ext cx="1188720" cy="173736"/>
+          </a:xfrm>
+          <a:prstGeom prst="rect">
+            <a:avLst/>
+          </a:prstGeom>
+          <a:noFill/>
+          <a:ln/>
+        </p:spPr>
+        <p:txBody>
+          <a:bodyPr wrap="square" lIns="0" tIns="0" rIns="0" bIns="0" rtlCol="0" anchor="ctr"/>
+          <a:lstStyle/>
+          <a:p>
+            <a:pPr indent="0" marL="0">
+              <a:buNone/>
+            </a:pPr>
+            <a:r>
+              <a:rPr lang="en-US" sz="750" dirty="0">
+                <a:solidFill>
+                  <a:srgbClr val="000000"/>
+                </a:solidFill>
+                <a:latin typeface="Calibri" pitchFamily="34" charset="0"/>
+                <a:ea typeface="Calibri" pitchFamily="34" charset="-122"/>
+                <a:cs typeface="Calibri" pitchFamily="34" charset="-120"/>
+              </a:rPr>
+              <a:t>CLP</a:t>
+            </a:r>
+            <a:endParaRPr lang="en-US" sz="750" dirty="0"/>
+          </a:p>
+        </p:txBody>
+      </p:sp>
+      <p:sp>
+        <p:nvSpPr>
+          <p:cNvPr id="9" name="Text 7"/>
+          <p:cNvSpPr/>
+          <p:nvPr/>
+        </p:nvSpPr>
+        <p:spPr>
+          <a:xfrm>
+            <a:off x="1307592" y="1719072"/>
+            <a:ext cx="1024128" cy="173736"/>
+          </a:xfrm>
+          <a:prstGeom prst="rect">
+            <a:avLst/>
+          </a:prstGeom>
+          <a:noFill/>
+          <a:ln/>
+        </p:spPr>
+        <p:txBody>
+          <a:bodyPr wrap="square" lIns="0" tIns="0" rIns="0" bIns="0" rtlCol="0" anchor="ctr"/>
+          <a:lstStyle/>
+          <a:p>
+            <a:pPr algn="r" indent="0" marL="0">
+              <a:buNone/>
+            </a:pPr>
+            <a:r>
+              <a:rPr lang="en-US" sz="750" b="1" dirty="0">
+                <a:solidFill>
+                  <a:srgbClr val="000000"/>
+                </a:solidFill>
+                <a:latin typeface="Calibri" pitchFamily="34" charset="0"/>
+                <a:ea typeface="Calibri" pitchFamily="34" charset="-122"/>
+                <a:cs typeface="Calibri" pitchFamily="34" charset="-120"/>
+              </a:rPr>
+              <a:t>100,00%</a:t>
+            </a:r>
+            <a:endParaRPr lang="en-US" sz="750" dirty="0"/>
+          </a:p>
+        </p:txBody>
+      </p:sp>
+      <p:sp>
+        <p:nvSpPr>
+          <p:cNvPr id="10" name="Shape 8"/>
+          <p:cNvSpPr/>
+          <p:nvPr/>
+        </p:nvSpPr>
+        <p:spPr>
+          <a:xfrm>
+            <a:off x="118872" y="2002536"/>
             <a:ext cx="2212848" cy="0"/>
           </a:xfrm>
           <a:prstGeom prst="line">
@@ -33375,13 +33453,13 @@
       </p:sp>
       <p:sp>
         <p:nvSpPr>
-          <p:cNvPr id="9" name="Text 7"/>
+          <p:cNvPr id="11" name="Text 9"/>
           <p:cNvSpPr/>
           <p:nvPr/>
         </p:nvSpPr>
         <p:spPr>
           <a:xfrm>
-            <a:off x="118872" y="1901952"/>
+            <a:off x="118872" y="2093976"/>
             <a:ext cx="2212848" cy="164592"/>
           </a:xfrm>
           <a:prstGeom prst="rect">
@@ -33414,13 +33492,13 @@
       </p:sp>
       <p:sp>
         <p:nvSpPr>
-          <p:cNvPr id="10" name="Shape 8"/>
+          <p:cNvPr id="12" name="Shape 10"/>
           <p:cNvSpPr/>
           <p:nvPr/>
         </p:nvSpPr>
         <p:spPr>
           <a:xfrm>
-            <a:off x="118872" y="2084832"/>
+            <a:off x="118872" y="2276856"/>
             <a:ext cx="2212848" cy="0"/>
           </a:xfrm>
           <a:prstGeom prst="line">
@@ -33437,13 +33515,13 @@
       </p:sp>
       <p:sp>
         <p:nvSpPr>
-          <p:cNvPr id="11" name="Text 9"/>
+          <p:cNvPr id="13" name="Text 11"/>
           <p:cNvSpPr/>
           <p:nvPr/>
         </p:nvSpPr>
         <p:spPr>
           <a:xfrm>
-            <a:off x="118872" y="2157984"/>
+            <a:off x="118872" y="2350008"/>
             <a:ext cx="1371600" cy="164592"/>
           </a:xfrm>
           <a:prstGeom prst="rect">
@@ -33476,13 +33554,13 @@
       </p:sp>
       <p:sp>
         <p:nvSpPr>
-          <p:cNvPr id="12" name="Text 10"/>
+          <p:cNvPr id="14" name="Text 12"/>
           <p:cNvSpPr/>
           <p:nvPr/>
         </p:nvSpPr>
         <p:spPr>
           <a:xfrm>
-            <a:off x="1490472" y="2157984"/>
+            <a:off x="1490472" y="2350008"/>
             <a:ext cx="841248" cy="164592"/>
           </a:xfrm>
           <a:prstGeom prst="rect">
@@ -33507,7 +33585,7 @@
                 <a:ea typeface="Calibri" pitchFamily="34" charset="-122"/>
                 <a:cs typeface="Calibri" pitchFamily="34" charset="-120"/>
               </a:rPr>
-              <a:t>100,00%</a:t>
+              <a:t>74,77%</a:t>
             </a:r>
             <a:endParaRPr lang="en-US" sz="700" dirty="0"/>
           </a:p>
@@ -33515,13 +33593,247 @@
       </p:sp>
       <p:sp>
         <p:nvSpPr>
-          <p:cNvPr id="13" name="Shape 11"/>
+          <p:cNvPr id="15" name="Text 13"/>
           <p:cNvSpPr/>
           <p:nvPr/>
         </p:nvSpPr>
         <p:spPr>
           <a:xfrm>
-            <a:off x="118872" y="2423160"/>
+            <a:off x="118872" y="2523744"/>
+            <a:ext cx="1371600" cy="164592"/>
+          </a:xfrm>
+          <a:prstGeom prst="rect">
+            <a:avLst/>
+          </a:prstGeom>
+          <a:noFill/>
+          <a:ln/>
+        </p:spPr>
+        <p:txBody>
+          <a:bodyPr wrap="square" lIns="0" tIns="0" rIns="0" bIns="0" rtlCol="0" anchor="ctr"/>
+          <a:lstStyle/>
+          <a:p>
+            <a:pPr indent="0" marL="0">
+              <a:buNone/>
+            </a:pPr>
+            <a:r>
+              <a:rPr lang="en-US" sz="700" dirty="0">
+                <a:solidFill>
+                  <a:srgbClr val="000000"/>
+                </a:solidFill>
+                <a:latin typeface="Calibri" pitchFamily="34" charset="0"/>
+                <a:ea typeface="Calibri" pitchFamily="34" charset="-122"/>
+                <a:cs typeface="Calibri" pitchFamily="34" charset="-120"/>
+              </a:rPr>
+              <a:t>Inmob</a:t>
+            </a:r>
+            <a:endParaRPr lang="en-US" sz="700" dirty="0"/>
+          </a:p>
+        </p:txBody>
+      </p:sp>
+      <p:sp>
+        <p:nvSpPr>
+          <p:cNvPr id="16" name="Text 14"/>
+          <p:cNvSpPr/>
+          <p:nvPr/>
+        </p:nvSpPr>
+        <p:spPr>
+          <a:xfrm>
+            <a:off x="1490472" y="2523744"/>
+            <a:ext cx="841248" cy="164592"/>
+          </a:xfrm>
+          <a:prstGeom prst="rect">
+            <a:avLst/>
+          </a:prstGeom>
+          <a:noFill/>
+          <a:ln/>
+        </p:spPr>
+        <p:txBody>
+          <a:bodyPr wrap="square" lIns="0" tIns="0" rIns="0" bIns="0" rtlCol="0" anchor="ctr"/>
+          <a:lstStyle/>
+          <a:p>
+            <a:pPr algn="r" indent="0" marL="0">
+              <a:buNone/>
+            </a:pPr>
+            <a:r>
+              <a:rPr lang="en-US" sz="700" b="1" dirty="0">
+                <a:solidFill>
+                  <a:srgbClr val="000000"/>
+                </a:solidFill>
+                <a:latin typeface="Calibri" pitchFamily="34" charset="0"/>
+                <a:ea typeface="Calibri" pitchFamily="34" charset="-122"/>
+                <a:cs typeface="Calibri" pitchFamily="34" charset="-120"/>
+              </a:rPr>
+              <a:t>13,75%</a:t>
+            </a:r>
+            <a:endParaRPr lang="en-US" sz="700" dirty="0"/>
+          </a:p>
+        </p:txBody>
+      </p:sp>
+      <p:sp>
+        <p:nvSpPr>
+          <p:cNvPr id="17" name="Text 15"/>
+          <p:cNvSpPr/>
+          <p:nvPr/>
+        </p:nvSpPr>
+        <p:spPr>
+          <a:xfrm>
+            <a:off x="118872" y="2697480"/>
+            <a:ext cx="1371600" cy="164592"/>
+          </a:xfrm>
+          <a:prstGeom prst="rect">
+            <a:avLst/>
+          </a:prstGeom>
+          <a:noFill/>
+          <a:ln/>
+        </p:spPr>
+        <p:txBody>
+          <a:bodyPr wrap="square" lIns="0" tIns="0" rIns="0" bIns="0" rtlCol="0" anchor="ctr"/>
+          <a:lstStyle/>
+          <a:p>
+            <a:pPr indent="0" marL="0">
+              <a:buNone/>
+            </a:pPr>
+            <a:r>
+              <a:rPr lang="en-US" sz="700" dirty="0">
+                <a:solidFill>
+                  <a:srgbClr val="000000"/>
+                </a:solidFill>
+                <a:latin typeface="Calibri" pitchFamily="34" charset="0"/>
+                <a:ea typeface="Calibri" pitchFamily="34" charset="-122"/>
+                <a:cs typeface="Calibri" pitchFamily="34" charset="-120"/>
+              </a:rPr>
+              <a:t>Revisar</a:t>
+            </a:r>
+            <a:endParaRPr lang="en-US" sz="700" dirty="0"/>
+          </a:p>
+        </p:txBody>
+      </p:sp>
+      <p:sp>
+        <p:nvSpPr>
+          <p:cNvPr id="18" name="Text 16"/>
+          <p:cNvSpPr/>
+          <p:nvPr/>
+        </p:nvSpPr>
+        <p:spPr>
+          <a:xfrm>
+            <a:off x="1490472" y="2697480"/>
+            <a:ext cx="841248" cy="164592"/>
+          </a:xfrm>
+          <a:prstGeom prst="rect">
+            <a:avLst/>
+          </a:prstGeom>
+          <a:noFill/>
+          <a:ln/>
+        </p:spPr>
+        <p:txBody>
+          <a:bodyPr wrap="square" lIns="0" tIns="0" rIns="0" bIns="0" rtlCol="0" anchor="ctr"/>
+          <a:lstStyle/>
+          <a:p>
+            <a:pPr algn="r" indent="0" marL="0">
+              <a:buNone/>
+            </a:pPr>
+            <a:r>
+              <a:rPr lang="en-US" sz="700" b="1" dirty="0">
+                <a:solidFill>
+                  <a:srgbClr val="000000"/>
+                </a:solidFill>
+                <a:latin typeface="Calibri" pitchFamily="34" charset="0"/>
+                <a:ea typeface="Calibri" pitchFamily="34" charset="-122"/>
+                <a:cs typeface="Calibri" pitchFamily="34" charset="-120"/>
+              </a:rPr>
+              <a:t>7,70%</a:t>
+            </a:r>
+            <a:endParaRPr lang="en-US" sz="700" dirty="0"/>
+          </a:p>
+        </p:txBody>
+      </p:sp>
+      <p:sp>
+        <p:nvSpPr>
+          <p:cNvPr id="19" name="Text 17"/>
+          <p:cNvSpPr/>
+          <p:nvPr/>
+        </p:nvSpPr>
+        <p:spPr>
+          <a:xfrm>
+            <a:off x="118872" y="2871216"/>
+            <a:ext cx="1371600" cy="164592"/>
+          </a:xfrm>
+          <a:prstGeom prst="rect">
+            <a:avLst/>
+          </a:prstGeom>
+          <a:noFill/>
+          <a:ln/>
+        </p:spPr>
+        <p:txBody>
+          <a:bodyPr wrap="square" lIns="0" tIns="0" rIns="0" bIns="0" rtlCol="0" anchor="ctr"/>
+          <a:lstStyle/>
+          <a:p>
+            <a:pPr indent="0" marL="0">
+              <a:buNone/>
+            </a:pPr>
+            <a:r>
+              <a:rPr lang="en-US" sz="700" dirty="0">
+                <a:solidFill>
+                  <a:srgbClr val="000000"/>
+                </a:solidFill>
+                <a:latin typeface="Calibri" pitchFamily="34" charset="0"/>
+                <a:ea typeface="Calibri" pitchFamily="34" charset="-122"/>
+                <a:cs typeface="Calibri" pitchFamily="34" charset="-120"/>
+              </a:rPr>
+              <a:t>Nota estructurada</a:t>
+            </a:r>
+            <a:endParaRPr lang="en-US" sz="700" dirty="0"/>
+          </a:p>
+        </p:txBody>
+      </p:sp>
+      <p:sp>
+        <p:nvSpPr>
+          <p:cNvPr id="20" name="Text 18"/>
+          <p:cNvSpPr/>
+          <p:nvPr/>
+        </p:nvSpPr>
+        <p:spPr>
+          <a:xfrm>
+            <a:off x="1490472" y="2871216"/>
+            <a:ext cx="841248" cy="164592"/>
+          </a:xfrm>
+          <a:prstGeom prst="rect">
+            <a:avLst/>
+          </a:prstGeom>
+          <a:noFill/>
+          <a:ln/>
+        </p:spPr>
+        <p:txBody>
+          <a:bodyPr wrap="square" lIns="0" tIns="0" rIns="0" bIns="0" rtlCol="0" anchor="ctr"/>
+          <a:lstStyle/>
+          <a:p>
+            <a:pPr algn="r" indent="0" marL="0">
+              <a:buNone/>
+            </a:pPr>
+            <a:r>
+              <a:rPr lang="en-US" sz="700" b="1" dirty="0">
+                <a:solidFill>
+                  <a:srgbClr val="000000"/>
+                </a:solidFill>
+                <a:latin typeface="Calibri" pitchFamily="34" charset="0"/>
+                <a:ea typeface="Calibri" pitchFamily="34" charset="-122"/>
+                <a:cs typeface="Calibri" pitchFamily="34" charset="-120"/>
+              </a:rPr>
+              <a:t>3,78%</a:t>
+            </a:r>
+            <a:endParaRPr lang="en-US" sz="700" dirty="0"/>
+          </a:p>
+        </p:txBody>
+      </p:sp>
+      <p:sp>
+        <p:nvSpPr>
+          <p:cNvPr id="21" name="Shape 19"/>
+          <p:cNvSpPr/>
+          <p:nvPr/>
+        </p:nvSpPr>
+        <p:spPr>
+          <a:xfrm>
+            <a:off x="118872" y="3136392"/>
             <a:ext cx="2212848" cy="0"/>
           </a:xfrm>
           <a:prstGeom prst="line">
@@ -33538,13 +33850,13 @@
       </p:sp>
       <p:sp>
         <p:nvSpPr>
-          <p:cNvPr id="14" name="Text 12"/>
+          <p:cNvPr id="22" name="Text 20"/>
           <p:cNvSpPr/>
           <p:nvPr/>
         </p:nvSpPr>
         <p:spPr>
           <a:xfrm>
-            <a:off x="118872" y="2514600"/>
+            <a:off x="118872" y="3227832"/>
             <a:ext cx="2212848" cy="164592"/>
           </a:xfrm>
           <a:prstGeom prst="rect">
@@ -33577,13 +33889,13 @@
       </p:sp>
       <p:sp>
         <p:nvSpPr>
-          <p:cNvPr id="15" name="Shape 13"/>
+          <p:cNvPr id="23" name="Shape 21"/>
           <p:cNvSpPr/>
           <p:nvPr/>
         </p:nvSpPr>
         <p:spPr>
           <a:xfrm>
-            <a:off x="118872" y="2697480"/>
+            <a:off x="118872" y="3410712"/>
             <a:ext cx="2212848" cy="0"/>
           </a:xfrm>
           <a:prstGeom prst="line">
@@ -33600,13 +33912,13 @@
       </p:sp>
       <p:sp>
         <p:nvSpPr>
-          <p:cNvPr id="16" name="Text 14"/>
+          <p:cNvPr id="24" name="Text 22"/>
           <p:cNvSpPr/>
           <p:nvPr/>
         </p:nvSpPr>
         <p:spPr>
           <a:xfrm>
-            <a:off x="118872" y="2770632"/>
+            <a:off x="118872" y="3483864"/>
             <a:ext cx="1371600" cy="182880"/>
           </a:xfrm>
           <a:prstGeom prst="rect">
@@ -33639,13 +33951,13 @@
       </p:sp>
       <p:sp>
         <p:nvSpPr>
-          <p:cNvPr id="17" name="Text 15"/>
+          <p:cNvPr id="25" name="Text 23"/>
           <p:cNvSpPr/>
           <p:nvPr/>
         </p:nvSpPr>
         <p:spPr>
           <a:xfrm>
-            <a:off x="1490472" y="2770632"/>
+            <a:off x="1490472" y="3483864"/>
             <a:ext cx="841248" cy="182880"/>
           </a:xfrm>
           <a:prstGeom prst="rect">
@@ -33670,7 +33982,7 @@
                 <a:ea typeface="Calibri" pitchFamily="34" charset="-122"/>
                 <a:cs typeface="Calibri" pitchFamily="34" charset="-120"/>
               </a:rPr>
-              <a:t>63,16%</a:t>
+              <a:t>29,59%</a:t>
             </a:r>
             <a:endParaRPr lang="en-US" sz="750" dirty="0"/>
           </a:p>
@@ -33678,13 +33990,13 @@
       </p:sp>
       <p:sp>
         <p:nvSpPr>
-          <p:cNvPr id="18" name="Text 16"/>
+          <p:cNvPr id="26" name="Text 24"/>
           <p:cNvSpPr/>
           <p:nvPr/>
         </p:nvSpPr>
         <p:spPr>
           <a:xfrm>
-            <a:off x="118872" y="2971800"/>
+            <a:off x="118872" y="3685032"/>
             <a:ext cx="1371600" cy="182880"/>
           </a:xfrm>
           <a:prstGeom prst="rect">
@@ -33717,13 +34029,13 @@
       </p:sp>
       <p:sp>
         <p:nvSpPr>
-          <p:cNvPr id="19" name="Text 17"/>
+          <p:cNvPr id="27" name="Text 25"/>
           <p:cNvSpPr/>
           <p:nvPr/>
         </p:nvSpPr>
         <p:spPr>
           <a:xfrm>
-            <a:off x="1490472" y="2971800"/>
+            <a:off x="1490472" y="3685032"/>
             <a:ext cx="841248" cy="182880"/>
           </a:xfrm>
           <a:prstGeom prst="rect">
@@ -33748,7 +34060,7 @@
                 <a:ea typeface="Calibri" pitchFamily="34" charset="-122"/>
                 <a:cs typeface="Calibri" pitchFamily="34" charset="-120"/>
               </a:rPr>
-              <a:t>28,00%</a:t>
+              <a:t>53,11%</a:t>
             </a:r>
             <a:endParaRPr lang="en-US" sz="750" dirty="0"/>
           </a:p>
@@ -33756,13 +34068,13 @@
       </p:sp>
       <p:sp>
         <p:nvSpPr>
-          <p:cNvPr id="20" name="Text 18"/>
+          <p:cNvPr id="28" name="Text 26"/>
           <p:cNvSpPr/>
           <p:nvPr/>
         </p:nvSpPr>
         <p:spPr>
           <a:xfrm>
-            <a:off x="118872" y="3172968"/>
+            <a:off x="118872" y="3886200"/>
             <a:ext cx="1371600" cy="182880"/>
           </a:xfrm>
           <a:prstGeom prst="rect">
@@ -33795,13 +34107,13 @@
       </p:sp>
       <p:sp>
         <p:nvSpPr>
-          <p:cNvPr id="21" name="Text 19"/>
+          <p:cNvPr id="29" name="Text 27"/>
           <p:cNvSpPr/>
           <p:nvPr/>
         </p:nvSpPr>
         <p:spPr>
           <a:xfrm>
-            <a:off x="1490472" y="3172968"/>
+            <a:off x="1490472" y="3886200"/>
             <a:ext cx="841248" cy="182880"/>
           </a:xfrm>
           <a:prstGeom prst="rect">
@@ -33826,7 +34138,7 @@
                 <a:ea typeface="Calibri" pitchFamily="34" charset="-122"/>
                 <a:cs typeface="Calibri" pitchFamily="34" charset="-120"/>
               </a:rPr>
-              <a:t>8,84%</a:t>
+              <a:t>17,30%</a:t>
             </a:r>
             <a:endParaRPr lang="en-US" sz="750" dirty="0"/>
           </a:p>
@@ -33834,13 +34146,13 @@
       </p:sp>
       <p:sp>
         <p:nvSpPr>
-          <p:cNvPr id="22" name="Text 20"/>
+          <p:cNvPr id="30" name="Text 28"/>
           <p:cNvSpPr/>
           <p:nvPr/>
         </p:nvSpPr>
         <p:spPr>
           <a:xfrm>
-            <a:off x="118872" y="3374136"/>
+            <a:off x="118872" y="4087368"/>
             <a:ext cx="1371600" cy="182880"/>
           </a:xfrm>
           <a:prstGeom prst="rect">
@@ -33873,13 +34185,13 @@
       </p:sp>
       <p:sp>
         <p:nvSpPr>
-          <p:cNvPr id="23" name="Text 21"/>
+          <p:cNvPr id="31" name="Text 29"/>
           <p:cNvSpPr/>
           <p:nvPr/>
         </p:nvSpPr>
         <p:spPr>
           <a:xfrm>
-            <a:off x="1490472" y="3374136"/>
+            <a:off x="1490472" y="4087368"/>
             <a:ext cx="841248" cy="182880"/>
           </a:xfrm>
           <a:prstGeom prst="rect">
@@ -33912,7 +34224,7 @@
       </p:sp>
       <p:sp>
         <p:nvSpPr>
-          <p:cNvPr id="24" name="Text 22"/>
+          <p:cNvPr id="32" name="Text 30"/>
           <p:cNvSpPr/>
           <p:nvPr/>
         </p:nvSpPr>
@@ -33951,7 +34263,7 @@
       </p:sp>
       <p:sp>
         <p:nvSpPr>
-          <p:cNvPr id="25" name="Shape 23"/>
+          <p:cNvPr id="33" name="Shape 31"/>
           <p:cNvSpPr/>
           <p:nvPr/>
         </p:nvSpPr>
@@ -33974,7 +34286,7 @@
       </p:sp>
       <p:sp>
         <p:nvSpPr>
-          <p:cNvPr id="26" name="Text 24"/>
+          <p:cNvPr id="34" name="Text 32"/>
           <p:cNvSpPr/>
           <p:nvPr/>
         </p:nvSpPr>
@@ -34030,7 +34342,7 @@
       </p:sp>
       <p:sp>
         <p:nvSpPr>
-          <p:cNvPr id="27" name="Text 25"/>
+          <p:cNvPr id="35" name="Text 33"/>
           <p:cNvSpPr/>
           <p:nvPr/>
         </p:nvSpPr>
@@ -34086,7 +34398,7 @@
       </p:sp>
       <p:sp>
         <p:nvSpPr>
-          <p:cNvPr id="28" name="Text 26"/>
+          <p:cNvPr id="36" name="Text 34"/>
           <p:cNvSpPr/>
           <p:nvPr/>
         </p:nvSpPr>
@@ -34142,7 +34454,7 @@
       </p:sp>
       <p:sp>
         <p:nvSpPr>
-          <p:cNvPr id="29" name="Text 27"/>
+          <p:cNvPr id="37" name="Text 35"/>
           <p:cNvSpPr/>
           <p:nvPr/>
         </p:nvSpPr>
@@ -34198,7 +34510,7 @@
       </p:sp>
       <p:sp>
         <p:nvSpPr>
-          <p:cNvPr id="30" name="Text 28"/>
+          <p:cNvPr id="38" name="Text 36"/>
           <p:cNvSpPr/>
           <p:nvPr/>
         </p:nvSpPr>
@@ -34254,7 +34566,7 @@
       </p:sp>
       <p:sp>
         <p:nvSpPr>
-          <p:cNvPr id="31" name="Text 29"/>
+          <p:cNvPr id="39" name="Text 37"/>
           <p:cNvSpPr/>
           <p:nvPr/>
         </p:nvSpPr>
@@ -34310,7 +34622,7 @@
       </p:sp>
       <p:sp>
         <p:nvSpPr>
-          <p:cNvPr id="32" name="Text 30"/>
+          <p:cNvPr id="40" name="Text 38"/>
           <p:cNvSpPr/>
           <p:nvPr/>
         </p:nvSpPr>
@@ -34366,7 +34678,7 @@
       </p:sp>
       <p:sp>
         <p:nvSpPr>
-          <p:cNvPr id="33" name="Text 31"/>
+          <p:cNvPr id="41" name="Text 39"/>
           <p:cNvSpPr/>
           <p:nvPr/>
         </p:nvSpPr>
@@ -34422,7 +34734,7 @@
       </p:sp>
       <p:sp>
         <p:nvSpPr>
-          <p:cNvPr id="34" name="Text 32"/>
+          <p:cNvPr id="42" name="Text 40"/>
           <p:cNvSpPr/>
           <p:nvPr/>
         </p:nvSpPr>
@@ -34478,7 +34790,7 @@
       </p:sp>
       <p:sp>
         <p:nvSpPr>
-          <p:cNvPr id="35" name="Shape 33"/>
+          <p:cNvPr id="43" name="Shape 41"/>
           <p:cNvSpPr/>
           <p:nvPr/>
         </p:nvSpPr>
@@ -34501,7 +34813,7 @@
       </p:sp>
       <p:sp>
         <p:nvSpPr>
-          <p:cNvPr id="36" name="Text 34"/>
+          <p:cNvPr id="44" name="Text 42"/>
           <p:cNvSpPr/>
           <p:nvPr/>
         </p:nvSpPr>
@@ -34540,7 +34852,7 @@
       </p:sp>
       <p:sp>
         <p:nvSpPr>
-          <p:cNvPr id="37" name="Shape 35"/>
+          <p:cNvPr id="45" name="Shape 43"/>
           <p:cNvSpPr/>
           <p:nvPr/>
         </p:nvSpPr>
@@ -34563,7 +34875,7 @@
       </p:sp>
       <p:sp>
         <p:nvSpPr>
-          <p:cNvPr id="38" name="Text 36"/>
+          <p:cNvPr id="46" name="Text 44"/>
           <p:cNvSpPr/>
           <p:nvPr/>
         </p:nvSpPr>

--- a/folletos/2026-04/pptx/FIP_VANTRUST_LIQUIDEZ_ALTO_APORTE.pptx
+++ b/folletos/2026-04/pptx/FIP_VANTRUST_LIQUIDEZ_ALTO_APORTE.pptx
@@ -6373,7 +6373,7 @@
                 <a:ea typeface="Calibri" pitchFamily="34" charset="-122"/>
                 <a:cs typeface="Calibri" pitchFamily="34" charset="-120"/>
               </a:rPr>
-              <a:t>prueba CLP</a:t>
+              <a:t>prueba 8 CLP</a:t>
             </a:r>
             <a:endParaRPr lang="en-US" sz="800" dirty="0"/>
           </a:p>

--- a/folletos/2026-04/pptx/FIP_VANTRUST_LIQUIDEZ_ALTO_APORTE.pptx
+++ b/folletos/2026-04/pptx/FIP_VANTRUST_LIQUIDEZ_ALTO_APORTE.pptx
@@ -3131,7 +3131,7 @@
                 <a:ea typeface="Calibri" pitchFamily="34" charset="-122"/>
                 <a:cs typeface="Calibri" pitchFamily="34" charset="-120"/>
               </a:rPr>
-              <a:t>prueba CLP</a:t>
+              <a:t>prueba 10 CLP</a:t>
             </a:r>
             <a:endParaRPr lang="en-US" sz="800" dirty="0"/>
           </a:p>

--- a/folletos/2026-04/pptx/FIP_VANTRUST_LIQUIDEZ_ALTO_APORTE.pptx
+++ b/folletos/2026-04/pptx/FIP_VANTRUST_LIQUIDEZ_ALTO_APORTE.pptx
@@ -3131,7 +3131,7 @@
                 <a:ea typeface="Calibri" pitchFamily="34" charset="-122"/>
                 <a:cs typeface="Calibri" pitchFamily="34" charset="-120"/>
               </a:rPr>
-              <a:t>prueba 10 CLP</a:t>
+              <a:t>prueba 11 CLP</a:t>
             </a:r>
             <a:endParaRPr lang="en-US" sz="800" dirty="0"/>
           </a:p>

--- a/folletos/2026-04/pptx/FIP_VANTRUST_LIQUIDEZ_ALTO_APORTE.pptx
+++ b/folletos/2026-04/pptx/FIP_VANTRUST_LIQUIDEZ_ALTO_APORTE.pptx
@@ -3131,7 +3131,7 @@
                 <a:ea typeface="Calibri" pitchFamily="34" charset="-122"/>
                 <a:cs typeface="Calibri" pitchFamily="34" charset="-120"/>
               </a:rPr>
-              <a:t>prueba CLP</a:t>
+              <a:t>prueba 11 CLP</a:t>
             </a:r>
             <a:endParaRPr lang="en-US" sz="800" dirty="0"/>
           </a:p>

--- a/folletos/2026-04/pptx/FIP_VANTRUST_LIQUIDEZ_ALTO_APORTE.pptx
+++ b/folletos/2026-04/pptx/FIP_VANTRUST_LIQUIDEZ_ALTO_APORTE.pptx
@@ -3131,7 +3131,7 @@
                 <a:ea typeface="Calibri" pitchFamily="34" charset="-122"/>
                 <a:cs typeface="Calibri" pitchFamily="34" charset="-120"/>
               </a:rPr>
-              <a:t>prueba 11 CLP</a:t>
+              <a:t>prueba 12 CLP</a:t>
             </a:r>
             <a:endParaRPr lang="en-US" sz="800" dirty="0"/>
           </a:p>

--- a/folletos/2026-04/pptx/FIP_VANTRUST_LIQUIDEZ_ALTO_APORTE.pptx
+++ b/folletos/2026-04/pptx/FIP_VANTRUST_LIQUIDEZ_ALTO_APORTE.pptx
@@ -3113,7 +3113,7 @@
                 <a:ea typeface="Calibri" pitchFamily="34" charset="-122"/>
                 <a:cs typeface="Calibri" pitchFamily="34" charset="-120"/>
               </a:rPr>
-              <a:t>prueba CLP</a:t>
+              <a:t>prueba 12 CLP</a:t>
             </a:r>
             <a:endParaRPr lang="en-US" sz="800" dirty="0"/>
           </a:p>

--- a/folletos/2026-04/pptx/FIP_VANTRUST_LIQUIDEZ_ALTO_APORTE.pptx
+++ b/folletos/2026-04/pptx/FIP_VANTRUST_LIQUIDEZ_ALTO_APORTE.pptx
@@ -3113,7 +3113,7 @@
                 <a:ea typeface="Calibri" pitchFamily="34" charset="-122"/>
                 <a:cs typeface="Calibri" pitchFamily="34" charset="-120"/>
               </a:rPr>
-              <a:t>prueba 12 CLP</a:t>
+              <a:t>prueba CLP</a:t>
             </a:r>
             <a:endParaRPr lang="en-US" sz="800" dirty="0"/>
           </a:p>
@@ -7209,7 +7209,7 @@
                           <a:ea typeface="Calibri" pitchFamily="34" charset="-122"/>
                           <a:cs typeface="Calibri" pitchFamily="34" charset="-120"/>
                         </a:rPr>
-                        <a:t>0.00%</a:t>
+                        <a:t>0.16%</a:t>
                       </a:r>
                       <a:endParaRPr lang="en-US" sz="500" dirty="0">
                         <a:latin typeface="Calibri" charset="0"/>
@@ -7274,7 +7274,7 @@
                           <a:ea typeface="Calibri" pitchFamily="34" charset="-122"/>
                           <a:cs typeface="Calibri" pitchFamily="34" charset="-120"/>
                         </a:rPr>
-                        <a:t>0.00%</a:t>
+                        <a:t>0.17%</a:t>
                       </a:r>
                       <a:endParaRPr lang="en-US" sz="500" dirty="0">
                         <a:latin typeface="Calibri" charset="0"/>
@@ -7339,7 +7339,7 @@
                           <a:ea typeface="Calibri" pitchFamily="34" charset="-122"/>
                           <a:cs typeface="Calibri" pitchFamily="34" charset="-120"/>
                         </a:rPr>
-                        <a:t>0.00%</a:t>
+                        <a:t>0.22%</a:t>
                       </a:r>
                       <a:endParaRPr lang="en-US" sz="500" dirty="0">
                         <a:latin typeface="Calibri" charset="0"/>
@@ -7404,7 +7404,7 @@
                           <a:ea typeface="Calibri" pitchFamily="34" charset="-122"/>
                           <a:cs typeface="Calibri" pitchFamily="34" charset="-120"/>
                         </a:rPr>
-                        <a:t>0.00%</a:t>
+                        <a:t>0.05%</a:t>
                       </a:r>
                       <a:endParaRPr lang="en-US" sz="500" dirty="0">
                         <a:latin typeface="Calibri" charset="0"/>
@@ -7469,7 +7469,7 @@
                           <a:ea typeface="Calibri" pitchFamily="34" charset="-122"/>
                           <a:cs typeface="Calibri" pitchFamily="34" charset="-120"/>
                         </a:rPr>
-                        <a:t>0.00%</a:t>
+                        <a:t>0.03%</a:t>
                       </a:r>
                       <a:endParaRPr lang="en-US" sz="500" dirty="0">
                         <a:latin typeface="Calibri" charset="0"/>
@@ -7534,7 +7534,7 @@
                           <a:ea typeface="Calibri" pitchFamily="34" charset="-122"/>
                           <a:cs typeface="Calibri" pitchFamily="34" charset="-120"/>
                         </a:rPr>
-                        <a:t>0.00%</a:t>
+                        <a:t>0.03%</a:t>
                       </a:r>
                       <a:endParaRPr lang="en-US" sz="500" dirty="0">
                         <a:latin typeface="Calibri" charset="0"/>
@@ -7599,7 +7599,7 @@
                           <a:ea typeface="Calibri" pitchFamily="34" charset="-122"/>
                           <a:cs typeface="Calibri" pitchFamily="34" charset="-120"/>
                         </a:rPr>
-                        <a:t>0.00%</a:t>
+                        <a:t>0.03%</a:t>
                       </a:r>
                       <a:endParaRPr lang="en-US" sz="500" dirty="0">
                         <a:latin typeface="Calibri" charset="0"/>
@@ -7664,7 +7664,7 @@
                           <a:ea typeface="Calibri" pitchFamily="34" charset="-122"/>
                           <a:cs typeface="Calibri" pitchFamily="34" charset="-120"/>
                         </a:rPr>
-                        <a:t>0.00%</a:t>
+                        <a:t>0.02%</a:t>
                       </a:r>
                       <a:endParaRPr lang="en-US" sz="500" dirty="0">
                         <a:latin typeface="Calibri" charset="0"/>
@@ -7729,7 +7729,7 @@
                           <a:ea typeface="Calibri" pitchFamily="34" charset="-122"/>
                           <a:cs typeface="Calibri" pitchFamily="34" charset="-120"/>
                         </a:rPr>
-                        <a:t>0.00%</a:t>
+                        <a:t>0.02%</a:t>
                       </a:r>
                       <a:endParaRPr lang="en-US" sz="500" dirty="0">
                         <a:latin typeface="Calibri" charset="0"/>
@@ -7794,7 +7794,7 @@
                           <a:ea typeface="Calibri" pitchFamily="34" charset="-122"/>
                           <a:cs typeface="Calibri" pitchFamily="34" charset="-120"/>
                         </a:rPr>
-                        <a:t>0.00%</a:t>
+                        <a:t>0.02%</a:t>
                       </a:r>
                       <a:endParaRPr lang="en-US" sz="500" dirty="0">
                         <a:latin typeface="Calibri" charset="0"/>
@@ -7924,7 +7924,7 @@
                           <a:ea typeface="Calibri" pitchFamily="34" charset="-122"/>
                           <a:cs typeface="Calibri" pitchFamily="34" charset="-120"/>
                         </a:rPr>
-                        <a:t>0.89%</a:t>
+                        <a:t>1.64%</a:t>
                       </a:r>
                       <a:endParaRPr lang="en-US" sz="500" dirty="0">
                         <a:latin typeface="Calibri" charset="0"/>
@@ -8488,7 +8488,7 @@
                           <a:ea typeface="Calibri" pitchFamily="34" charset="-122"/>
                           <a:cs typeface="Calibri" pitchFamily="34" charset="-120"/>
                         </a:rPr>
-                        <a:t>0.00%</a:t>
+                        <a:t>0.19%</a:t>
                       </a:r>
                       <a:endParaRPr lang="en-US" sz="500" dirty="0">
                         <a:latin typeface="Calibri" charset="0"/>
@@ -8553,7 +8553,7 @@
                           <a:ea typeface="Calibri" pitchFamily="34" charset="-122"/>
                           <a:cs typeface="Calibri" pitchFamily="34" charset="-120"/>
                         </a:rPr>
-                        <a:t>0.00%</a:t>
+                        <a:t>0.19%</a:t>
                       </a:r>
                       <a:endParaRPr lang="en-US" sz="500" dirty="0">
                         <a:latin typeface="Calibri" charset="0"/>
@@ -8618,7 +8618,7 @@
                           <a:ea typeface="Calibri" pitchFamily="34" charset="-122"/>
                           <a:cs typeface="Calibri" pitchFamily="34" charset="-120"/>
                         </a:rPr>
-                        <a:t>0.00%</a:t>
+                        <a:t>0.19%</a:t>
                       </a:r>
                       <a:endParaRPr lang="en-US" sz="500" dirty="0">
                         <a:latin typeface="Calibri" charset="0"/>
@@ -8683,7 +8683,7 @@
                           <a:ea typeface="Calibri" pitchFamily="34" charset="-122"/>
                           <a:cs typeface="Calibri" pitchFamily="34" charset="-120"/>
                         </a:rPr>
-                        <a:t>0.00%</a:t>
+                        <a:t>0.19%</a:t>
                       </a:r>
                       <a:endParaRPr lang="en-US" sz="500" dirty="0">
                         <a:latin typeface="Calibri" charset="0"/>
@@ -8748,7 +8748,7 @@
                           <a:ea typeface="Calibri" pitchFamily="34" charset="-122"/>
                           <a:cs typeface="Calibri" pitchFamily="34" charset="-120"/>
                         </a:rPr>
-                        <a:t>0.00%</a:t>
+                        <a:t>0.06%</a:t>
                       </a:r>
                       <a:endParaRPr lang="en-US" sz="500" dirty="0">
                         <a:latin typeface="Calibri" charset="0"/>
@@ -8813,7 +8813,7 @@
                           <a:ea typeface="Calibri" pitchFamily="34" charset="-122"/>
                           <a:cs typeface="Calibri" pitchFamily="34" charset="-120"/>
                         </a:rPr>
-                        <a:t>0.01%</a:t>
+                        <a:t>0.83%</a:t>
                       </a:r>
                       <a:endParaRPr lang="en-US" sz="500" dirty="0">
                         <a:latin typeface="Calibri" charset="0"/>
@@ -10041,7 +10041,7 @@
                           <a:ea typeface="Calibri" pitchFamily="34" charset="-122"/>
                           <a:cs typeface="Calibri" pitchFamily="34" charset="-120"/>
                         </a:rPr>
-                        <a:t>0.00%</a:t>
+                        <a:t>0.02%</a:t>
                       </a:r>
                       <a:endParaRPr lang="en-US" sz="500" dirty="0">
                         <a:latin typeface="Calibri" charset="0"/>
@@ -10106,7 +10106,7 @@
                           <a:ea typeface="Calibri" pitchFamily="34" charset="-122"/>
                           <a:cs typeface="Calibri" pitchFamily="34" charset="-120"/>
                         </a:rPr>
-                        <a:t>0.00%</a:t>
+                        <a:t>0.01%</a:t>
                       </a:r>
                       <a:endParaRPr lang="en-US" sz="500" dirty="0">
                         <a:latin typeface="Calibri" charset="0"/>
@@ -10171,7 +10171,7 @@
                           <a:ea typeface="Calibri" pitchFamily="34" charset="-122"/>
                           <a:cs typeface="Calibri" pitchFamily="34" charset="-120"/>
                         </a:rPr>
-                        <a:t>0.00%</a:t>
+                        <a:t>0.01%</a:t>
                       </a:r>
                       <a:endParaRPr lang="en-US" sz="500" dirty="0">
                         <a:latin typeface="Calibri" charset="0"/>
@@ -10236,7 +10236,7 @@
                           <a:ea typeface="Calibri" pitchFamily="34" charset="-122"/>
                           <a:cs typeface="Calibri" pitchFamily="34" charset="-120"/>
                         </a:rPr>
-                        <a:t>0.00%</a:t>
+                        <a:t>0.01%</a:t>
                       </a:r>
                       <a:endParaRPr lang="en-US" sz="500" dirty="0">
                         <a:latin typeface="Calibri" charset="0"/>
@@ -10301,7 +10301,7 @@
                           <a:ea typeface="Calibri" pitchFamily="34" charset="-122"/>
                           <a:cs typeface="Calibri" pitchFamily="34" charset="-120"/>
                         </a:rPr>
-                        <a:t>0.00%</a:t>
+                        <a:t>0.01%</a:t>
                       </a:r>
                       <a:endParaRPr lang="en-US" sz="500" dirty="0">
                         <a:latin typeface="Calibri" charset="0"/>
@@ -10366,7 +10366,7 @@
                           <a:ea typeface="Calibri" pitchFamily="34" charset="-122"/>
                           <a:cs typeface="Calibri" pitchFamily="34" charset="-120"/>
                         </a:rPr>
-                        <a:t>0.00%</a:t>
+                        <a:t>0.01%</a:t>
                       </a:r>
                       <a:endParaRPr lang="en-US" sz="500" dirty="0">
                         <a:latin typeface="Calibri" charset="0"/>
@@ -10431,7 +10431,7 @@
                           <a:ea typeface="Calibri" pitchFamily="34" charset="-122"/>
                           <a:cs typeface="Calibri" pitchFamily="34" charset="-120"/>
                         </a:rPr>
-                        <a:t>0.00%</a:t>
+                        <a:t>0.01%</a:t>
                       </a:r>
                       <a:endParaRPr lang="en-US" sz="500" dirty="0">
                         <a:latin typeface="Calibri" charset="0"/>
@@ -10496,7 +10496,7 @@
                           <a:ea typeface="Calibri" pitchFamily="34" charset="-122"/>
                           <a:cs typeface="Calibri" pitchFamily="34" charset="-120"/>
                         </a:rPr>
-                        <a:t>-0.00%</a:t>
+                        <a:t>-0.01%</a:t>
                       </a:r>
                       <a:endParaRPr lang="en-US" sz="500" dirty="0">
                         <a:latin typeface="Calibri" charset="0"/>
@@ -10561,7 +10561,7 @@
                           <a:ea typeface="Calibri" pitchFamily="34" charset="-122"/>
                           <a:cs typeface="Calibri" pitchFamily="34" charset="-120"/>
                         </a:rPr>
-                        <a:t>0.00%</a:t>
+                        <a:t>0.10%</a:t>
                       </a:r>
                       <a:endParaRPr lang="en-US" sz="500" dirty="0">
                         <a:latin typeface="Calibri" charset="0"/>
@@ -10626,7 +10626,7 @@
                           <a:ea typeface="Calibri" pitchFamily="34" charset="-122"/>
                           <a:cs typeface="Calibri" pitchFamily="34" charset="-120"/>
                         </a:rPr>
-                        <a:t>0.00%</a:t>
+                        <a:t>0.13%</a:t>
                       </a:r>
                       <a:endParaRPr lang="en-US" sz="500" dirty="0">
                         <a:latin typeface="Calibri" charset="0"/>
@@ -10756,7 +10756,7 @@
                           <a:ea typeface="Calibri" pitchFamily="34" charset="-122"/>
                           <a:cs typeface="Calibri" pitchFamily="34" charset="-120"/>
                         </a:rPr>
-                        <a:t>0.60%</a:t>
+                        <a:t>0.88%</a:t>
                       </a:r>
                       <a:endParaRPr lang="en-US" sz="500" dirty="0">
                         <a:latin typeface="Calibri" charset="0"/>
@@ -10942,7 +10942,7 @@
                           <a:ea typeface="Calibri" pitchFamily="34" charset="-122"/>
                           <a:cs typeface="Calibri" pitchFamily="34" charset="-120"/>
                         </a:rPr>
-                        <a:t>0.00%</a:t>
+                        <a:t>0.18%</a:t>
                       </a:r>
                       <a:endParaRPr lang="en-US" sz="500" dirty="0">
                         <a:latin typeface="Calibri" charset="0"/>
@@ -11007,7 +11007,7 @@
                           <a:ea typeface="Calibri" pitchFamily="34" charset="-122"/>
                           <a:cs typeface="Calibri" pitchFamily="34" charset="-120"/>
                         </a:rPr>
-                        <a:t>0.00%</a:t>
+                        <a:t>0.19%</a:t>
                       </a:r>
                       <a:endParaRPr lang="en-US" sz="500" dirty="0">
                         <a:latin typeface="Calibri" charset="0"/>
@@ -11072,7 +11072,7 @@
                           <a:ea typeface="Calibri" pitchFamily="34" charset="-122"/>
                           <a:cs typeface="Calibri" pitchFamily="34" charset="-120"/>
                         </a:rPr>
-                        <a:t>0.00%</a:t>
+                        <a:t>0.14%</a:t>
                       </a:r>
                       <a:endParaRPr lang="en-US" sz="500" dirty="0">
                         <a:latin typeface="Calibri" charset="0"/>
@@ -11137,7 +11137,7 @@
                           <a:ea typeface="Calibri" pitchFamily="34" charset="-122"/>
                           <a:cs typeface="Calibri" pitchFamily="34" charset="-120"/>
                         </a:rPr>
-                        <a:t>0.00%</a:t>
+                        <a:t>0.16%</a:t>
                       </a:r>
                       <a:endParaRPr lang="en-US" sz="500" dirty="0">
                         <a:latin typeface="Calibri" charset="0"/>
@@ -11202,7 +11202,7 @@
                           <a:ea typeface="Calibri" pitchFamily="34" charset="-122"/>
                           <a:cs typeface="Calibri" pitchFamily="34" charset="-120"/>
                         </a:rPr>
-                        <a:t>0.00%</a:t>
+                        <a:t>0.21%</a:t>
                       </a:r>
                       <a:endParaRPr lang="en-US" sz="500" dirty="0">
                         <a:latin typeface="Calibri" charset="0"/>
@@ -11267,7 +11267,7 @@
                           <a:ea typeface="Calibri" pitchFamily="34" charset="-122"/>
                           <a:cs typeface="Calibri" pitchFamily="34" charset="-120"/>
                         </a:rPr>
-                        <a:t>0.00%</a:t>
+                        <a:t>0.17%</a:t>
                       </a:r>
                       <a:endParaRPr lang="en-US" sz="500" dirty="0">
                         <a:latin typeface="Calibri" charset="0"/>
@@ -11332,7 +11332,7 @@
                           <a:ea typeface="Calibri" pitchFamily="34" charset="-122"/>
                           <a:cs typeface="Calibri" pitchFamily="34" charset="-120"/>
                         </a:rPr>
-                        <a:t>0.00%</a:t>
+                        <a:t>0.13%</a:t>
                       </a:r>
                       <a:endParaRPr lang="en-US" sz="500" dirty="0">
                         <a:latin typeface="Calibri" charset="0"/>
@@ -11397,7 +11397,7 @@
                           <a:ea typeface="Calibri" pitchFamily="34" charset="-122"/>
                           <a:cs typeface="Calibri" pitchFamily="34" charset="-120"/>
                         </a:rPr>
-                        <a:t>0.00%</a:t>
+                        <a:t>0.13%</a:t>
                       </a:r>
                       <a:endParaRPr lang="en-US" sz="500" dirty="0">
                         <a:latin typeface="Calibri" charset="0"/>
@@ -11462,7 +11462,7 @@
                           <a:ea typeface="Calibri" pitchFamily="34" charset="-122"/>
                           <a:cs typeface="Calibri" pitchFamily="34" charset="-120"/>
                         </a:rPr>
-                        <a:t>0.00%</a:t>
+                        <a:t>0.17%</a:t>
                       </a:r>
                       <a:endParaRPr lang="en-US" sz="500" dirty="0">
                         <a:latin typeface="Calibri" charset="0"/>
@@ -11527,7 +11527,7 @@
                           <a:ea typeface="Calibri" pitchFamily="34" charset="-122"/>
                           <a:cs typeface="Calibri" pitchFamily="34" charset="-120"/>
                         </a:rPr>
-                        <a:t>0.00%</a:t>
+                        <a:t>0.19%</a:t>
                       </a:r>
                       <a:endParaRPr lang="en-US" sz="500" dirty="0">
                         <a:latin typeface="Calibri" charset="0"/>
@@ -11592,7 +11592,7 @@
                           <a:ea typeface="Calibri" pitchFamily="34" charset="-122"/>
                           <a:cs typeface="Calibri" pitchFamily="34" charset="-120"/>
                         </a:rPr>
-                        <a:t>0.00%</a:t>
+                        <a:t>0.22%</a:t>
                       </a:r>
                       <a:endParaRPr lang="en-US" sz="500" dirty="0">
                         <a:latin typeface="Calibri" charset="0"/>
@@ -11657,7 +11657,7 @@
                           <a:ea typeface="Calibri" pitchFamily="34" charset="-122"/>
                           <a:cs typeface="Calibri" pitchFamily="34" charset="-120"/>
                         </a:rPr>
-                        <a:t>0.00%</a:t>
+                        <a:t>0.29%</a:t>
                       </a:r>
                       <a:endParaRPr lang="en-US" sz="500" dirty="0">
                         <a:latin typeface="Calibri" charset="0"/>
@@ -11722,7 +11722,7 @@
                           <a:ea typeface="Calibri" pitchFamily="34" charset="-122"/>
                           <a:cs typeface="Calibri" pitchFamily="34" charset="-120"/>
                         </a:rPr>
-                        <a:t>0.02%</a:t>
+                        <a:t>2.19%</a:t>
                       </a:r>
                       <a:endParaRPr lang="en-US" sz="500" dirty="0">
                         <a:latin typeface="Calibri" charset="0"/>
@@ -12950,7 +12950,7 @@
                           <a:ea typeface="Calibri" pitchFamily="34" charset="-122"/>
                           <a:cs typeface="Calibri" pitchFamily="34" charset="-120"/>
                         </a:rPr>
-                        <a:t>0.00%</a:t>
+                        <a:t>0.33%</a:t>
                       </a:r>
                       <a:endParaRPr lang="en-US" sz="500" dirty="0">
                         <a:latin typeface="Calibri" charset="0"/>
@@ -13015,7 +13015,7 @@
                           <a:ea typeface="Calibri" pitchFamily="34" charset="-122"/>
                           <a:cs typeface="Calibri" pitchFamily="34" charset="-120"/>
                         </a:rPr>
-                        <a:t>0.00%</a:t>
+                        <a:t>0.38%</a:t>
                       </a:r>
                       <a:endParaRPr lang="en-US" sz="500" dirty="0">
                         <a:latin typeface="Calibri" charset="0"/>
@@ -13080,7 +13080,7 @@
                           <a:ea typeface="Calibri" pitchFamily="34" charset="-122"/>
                           <a:cs typeface="Calibri" pitchFamily="34" charset="-120"/>
                         </a:rPr>
-                        <a:t>0.00%</a:t>
+                        <a:t>0.46%</a:t>
                       </a:r>
                       <a:endParaRPr lang="en-US" sz="500" dirty="0">
                         <a:latin typeface="Calibri" charset="0"/>
@@ -13145,7 +13145,7 @@
                           <a:ea typeface="Calibri" pitchFamily="34" charset="-122"/>
                           <a:cs typeface="Calibri" pitchFamily="34" charset="-120"/>
                         </a:rPr>
-                        <a:t>0.01%</a:t>
+                        <a:t>0.55%</a:t>
                       </a:r>
                       <a:endParaRPr lang="en-US" sz="500" dirty="0">
                         <a:latin typeface="Calibri" charset="0"/>
@@ -13210,7 +13210,7 @@
                           <a:ea typeface="Calibri" pitchFamily="34" charset="-122"/>
                           <a:cs typeface="Calibri" pitchFamily="34" charset="-120"/>
                         </a:rPr>
-                        <a:t>0.01%</a:t>
+                        <a:t>0.59%</a:t>
                       </a:r>
                       <a:endParaRPr lang="en-US" sz="500" dirty="0">
                         <a:latin typeface="Calibri" charset="0"/>
@@ -13275,7 +13275,7 @@
                           <a:ea typeface="Calibri" pitchFamily="34" charset="-122"/>
                           <a:cs typeface="Calibri" pitchFamily="34" charset="-120"/>
                         </a:rPr>
-                        <a:t>0.01%</a:t>
+                        <a:t>0.65%</a:t>
                       </a:r>
                       <a:endParaRPr lang="en-US" sz="500" dirty="0">
                         <a:latin typeface="Calibri" charset="0"/>
@@ -13340,7 +13340,7 @@
                           <a:ea typeface="Calibri" pitchFamily="34" charset="-122"/>
                           <a:cs typeface="Calibri" pitchFamily="34" charset="-120"/>
                         </a:rPr>
-                        <a:t>0.01%</a:t>
+                        <a:t>0.70%</a:t>
                       </a:r>
                       <a:endParaRPr lang="en-US" sz="500" dirty="0">
                         <a:latin typeface="Calibri" charset="0"/>
@@ -13405,7 +13405,7 @@
                           <a:ea typeface="Calibri" pitchFamily="34" charset="-122"/>
                           <a:cs typeface="Calibri" pitchFamily="34" charset="-120"/>
                         </a:rPr>
-                        <a:t>0.01%</a:t>
+                        <a:t>0.73%</a:t>
                       </a:r>
                       <a:endParaRPr lang="en-US" sz="500" dirty="0">
                         <a:latin typeface="Calibri" charset="0"/>
@@ -13470,7 +13470,7 @@
                           <a:ea typeface="Calibri" pitchFamily="34" charset="-122"/>
                           <a:cs typeface="Calibri" pitchFamily="34" charset="-120"/>
                         </a:rPr>
-                        <a:t>0.01%</a:t>
+                        <a:t>0.72%</a:t>
                       </a:r>
                       <a:endParaRPr lang="en-US" sz="500" dirty="0">
                         <a:latin typeface="Calibri" charset="0"/>
@@ -13535,7 +13535,7 @@
                           <a:ea typeface="Calibri" pitchFamily="34" charset="-122"/>
                           <a:cs typeface="Calibri" pitchFamily="34" charset="-120"/>
                         </a:rPr>
-                        <a:t>0.01%</a:t>
+                        <a:t>0.87%</a:t>
                       </a:r>
                       <a:endParaRPr lang="en-US" sz="500" dirty="0">
                         <a:latin typeface="Calibri" charset="0"/>
@@ -13665,7 +13665,7 @@
                           <a:ea typeface="Calibri" pitchFamily="34" charset="-122"/>
                           <a:cs typeface="Calibri" pitchFamily="34" charset="-120"/>
                         </a:rPr>
-                        <a:t>8.50%</a:t>
+                        <a:t>15.11%</a:t>
                       </a:r>
                       <a:endParaRPr lang="en-US" sz="500" dirty="0">
                         <a:latin typeface="Calibri" charset="0"/>
@@ -13851,7 +13851,7 @@
                           <a:ea typeface="Calibri" pitchFamily="34" charset="-122"/>
                           <a:cs typeface="Calibri" pitchFamily="34" charset="-120"/>
                         </a:rPr>
-                        <a:t>0.00%</a:t>
+                        <a:t>0.18%</a:t>
                       </a:r>
                       <a:endParaRPr lang="en-US" sz="500" dirty="0">
                         <a:latin typeface="Calibri" charset="0"/>
@@ -13916,7 +13916,7 @@
                           <a:ea typeface="Calibri" pitchFamily="34" charset="-122"/>
                           <a:cs typeface="Calibri" pitchFamily="34" charset="-120"/>
                         </a:rPr>
-                        <a:t>0.00%</a:t>
+                        <a:t>0.19%</a:t>
                       </a:r>
                       <a:endParaRPr lang="en-US" sz="500" dirty="0">
                         <a:latin typeface="Calibri" charset="0"/>
@@ -13981,7 +13981,7 @@
                           <a:ea typeface="Calibri" pitchFamily="34" charset="-122"/>
                           <a:cs typeface="Calibri" pitchFamily="34" charset="-120"/>
                         </a:rPr>
-                        <a:t>0.00%</a:t>
+                        <a:t>0.14%</a:t>
                       </a:r>
                       <a:endParaRPr lang="en-US" sz="500" dirty="0">
                         <a:latin typeface="Calibri" charset="0"/>
@@ -14046,7 +14046,7 @@
                           <a:ea typeface="Calibri" pitchFamily="34" charset="-122"/>
                           <a:cs typeface="Calibri" pitchFamily="34" charset="-120"/>
                         </a:rPr>
-                        <a:t>0.00%</a:t>
+                        <a:t>0.16%</a:t>
                       </a:r>
                       <a:endParaRPr lang="en-US" sz="500" dirty="0">
                         <a:latin typeface="Calibri" charset="0"/>
@@ -14111,7 +14111,7 @@
                           <a:ea typeface="Calibri" pitchFamily="34" charset="-122"/>
                           <a:cs typeface="Calibri" pitchFamily="34" charset="-120"/>
                         </a:rPr>
-                        <a:t>0.00%</a:t>
+                        <a:t>0.21%</a:t>
                       </a:r>
                       <a:endParaRPr lang="en-US" sz="500" dirty="0">
                         <a:latin typeface="Calibri" charset="0"/>
@@ -14176,7 +14176,7 @@
                           <a:ea typeface="Calibri" pitchFamily="34" charset="-122"/>
                           <a:cs typeface="Calibri" pitchFamily="34" charset="-120"/>
                         </a:rPr>
-                        <a:t>0.00%</a:t>
+                        <a:t>0.17%</a:t>
                       </a:r>
                       <a:endParaRPr lang="en-US" sz="500" dirty="0">
                         <a:latin typeface="Calibri" charset="0"/>
@@ -14241,7 +14241,7 @@
                           <a:ea typeface="Calibri" pitchFamily="34" charset="-122"/>
                           <a:cs typeface="Calibri" pitchFamily="34" charset="-120"/>
                         </a:rPr>
-                        <a:t>0.00%</a:t>
+                        <a:t>0.13%</a:t>
                       </a:r>
                       <a:endParaRPr lang="en-US" sz="500" dirty="0">
                         <a:latin typeface="Calibri" charset="0"/>
@@ -14306,7 +14306,7 @@
                           <a:ea typeface="Calibri" pitchFamily="34" charset="-122"/>
                           <a:cs typeface="Calibri" pitchFamily="34" charset="-120"/>
                         </a:rPr>
-                        <a:t>0.00%</a:t>
+                        <a:t>0.13%</a:t>
                       </a:r>
                       <a:endParaRPr lang="en-US" sz="500" dirty="0">
                         <a:latin typeface="Calibri" charset="0"/>
@@ -14371,7 +14371,7 @@
                           <a:ea typeface="Calibri" pitchFamily="34" charset="-122"/>
                           <a:cs typeface="Calibri" pitchFamily="34" charset="-120"/>
                         </a:rPr>
-                        <a:t>0.00%</a:t>
+                        <a:t>0.17%</a:t>
                       </a:r>
                       <a:endParaRPr lang="en-US" sz="500" dirty="0">
                         <a:latin typeface="Calibri" charset="0"/>
@@ -14436,7 +14436,7 @@
                           <a:ea typeface="Calibri" pitchFamily="34" charset="-122"/>
                           <a:cs typeface="Calibri" pitchFamily="34" charset="-120"/>
                         </a:rPr>
-                        <a:t>0.00%</a:t>
+                        <a:t>0.19%</a:t>
                       </a:r>
                       <a:endParaRPr lang="en-US" sz="500" dirty="0">
                         <a:latin typeface="Calibri" charset="0"/>
@@ -14501,7 +14501,7 @@
                           <a:ea typeface="Calibri" pitchFamily="34" charset="-122"/>
                           <a:cs typeface="Calibri" pitchFamily="34" charset="-120"/>
                         </a:rPr>
-                        <a:t>0.00%</a:t>
+                        <a:t>0.22%</a:t>
                       </a:r>
                       <a:endParaRPr lang="en-US" sz="500" dirty="0">
                         <a:latin typeface="Calibri" charset="0"/>
@@ -14566,7 +14566,7 @@
                           <a:ea typeface="Calibri" pitchFamily="34" charset="-122"/>
                           <a:cs typeface="Calibri" pitchFamily="34" charset="-120"/>
                         </a:rPr>
-                        <a:t>0.00%</a:t>
+                        <a:t>0.29%</a:t>
                       </a:r>
                       <a:endParaRPr lang="en-US" sz="500" dirty="0">
                         <a:latin typeface="Calibri" charset="0"/>
@@ -14631,7 +14631,7 @@
                           <a:ea typeface="Calibri" pitchFamily="34" charset="-122"/>
                           <a:cs typeface="Calibri" pitchFamily="34" charset="-120"/>
                         </a:rPr>
-                        <a:t>0.02%</a:t>
+                        <a:t>2.19%</a:t>
                       </a:r>
                       <a:endParaRPr lang="en-US" sz="500" dirty="0">
                         <a:latin typeface="Calibri" charset="0"/>
@@ -15859,7 +15859,7 @@
                           <a:ea typeface="Calibri" pitchFamily="34" charset="-122"/>
                           <a:cs typeface="Calibri" pitchFamily="34" charset="-120"/>
                         </a:rPr>
-                        <a:t>0.01%</a:t>
+                        <a:t>0.74%</a:t>
                       </a:r>
                       <a:endParaRPr lang="en-US" sz="500" dirty="0">
                         <a:latin typeface="Calibri" charset="0"/>
@@ -15924,7 +15924,7 @@
                           <a:ea typeface="Calibri" pitchFamily="34" charset="-122"/>
                           <a:cs typeface="Calibri" pitchFamily="34" charset="-120"/>
                         </a:rPr>
-                        <a:t>0.01%</a:t>
+                        <a:t>0.82%</a:t>
                       </a:r>
                       <a:endParaRPr lang="en-US" sz="500" dirty="0">
                         <a:latin typeface="Calibri" charset="0"/>
@@ -15989,7 +15989,7 @@
                           <a:ea typeface="Calibri" pitchFamily="34" charset="-122"/>
                           <a:cs typeface="Calibri" pitchFamily="34" charset="-120"/>
                         </a:rPr>
-                        <a:t>0.01%</a:t>
+                        <a:t>0.75%</a:t>
                       </a:r>
                       <a:endParaRPr lang="en-US" sz="500" dirty="0">
                         <a:latin typeface="Calibri" charset="0"/>
@@ -16054,7 +16054,7 @@
                           <a:ea typeface="Calibri" pitchFamily="34" charset="-122"/>
                           <a:cs typeface="Calibri" pitchFamily="34" charset="-120"/>
                         </a:rPr>
-                        <a:t>0.01%</a:t>
+                        <a:t>0.88%</a:t>
                       </a:r>
                       <a:endParaRPr lang="en-US" sz="500" dirty="0">
                         <a:latin typeface="Calibri" charset="0"/>
@@ -16119,7 +16119,7 @@
                           <a:ea typeface="Calibri" pitchFamily="34" charset="-122"/>
                           <a:cs typeface="Calibri" pitchFamily="34" charset="-120"/>
                         </a:rPr>
-                        <a:t>0.01%</a:t>
+                        <a:t>0.80%</a:t>
                       </a:r>
                       <a:endParaRPr lang="en-US" sz="500" dirty="0">
                         <a:latin typeface="Calibri" charset="0"/>
@@ -16184,7 +16184,7 @@
                           <a:ea typeface="Calibri" pitchFamily="34" charset="-122"/>
                           <a:cs typeface="Calibri" pitchFamily="34" charset="-120"/>
                         </a:rPr>
-                        <a:t>0.01%</a:t>
+                        <a:t>0.82%</a:t>
                       </a:r>
                       <a:endParaRPr lang="en-US" sz="500" dirty="0">
                         <a:latin typeface="Calibri" charset="0"/>
@@ -16249,7 +16249,7 @@
                           <a:ea typeface="Calibri" pitchFamily="34" charset="-122"/>
                           <a:cs typeface="Calibri" pitchFamily="34" charset="-120"/>
                         </a:rPr>
-                        <a:t>0.01%</a:t>
+                        <a:t>0.76%</a:t>
                       </a:r>
                       <a:endParaRPr lang="en-US" sz="500" dirty="0">
                         <a:latin typeface="Calibri" charset="0"/>
@@ -16314,7 +16314,7 @@
                           <a:ea typeface="Calibri" pitchFamily="34" charset="-122"/>
                           <a:cs typeface="Calibri" pitchFamily="34" charset="-120"/>
                         </a:rPr>
-                        <a:t>0.01%</a:t>
+                        <a:t>0.68%</a:t>
                       </a:r>
                       <a:endParaRPr lang="en-US" sz="500" dirty="0">
                         <a:latin typeface="Calibri" charset="0"/>
@@ -16379,7 +16379,7 @@
                           <a:ea typeface="Calibri" pitchFamily="34" charset="-122"/>
                           <a:cs typeface="Calibri" pitchFamily="34" charset="-120"/>
                         </a:rPr>
-                        <a:t>0.01%</a:t>
+                        <a:t>0.67%</a:t>
                       </a:r>
                       <a:endParaRPr lang="en-US" sz="500" dirty="0">
                         <a:latin typeface="Calibri" charset="0"/>
@@ -16444,7 +16444,7 @@
                           <a:ea typeface="Calibri" pitchFamily="34" charset="-122"/>
                           <a:cs typeface="Calibri" pitchFamily="34" charset="-120"/>
                         </a:rPr>
-                        <a:t>0.01%</a:t>
+                        <a:t>0.62%</a:t>
                       </a:r>
                       <a:endParaRPr lang="en-US" sz="500" dirty="0">
                         <a:latin typeface="Calibri" charset="0"/>
@@ -16574,7 +16574,7 @@
                           <a:ea typeface="Calibri" pitchFamily="34" charset="-122"/>
                           <a:cs typeface="Calibri" pitchFamily="34" charset="-120"/>
                         </a:rPr>
-                        <a:t>7.57%</a:t>
+                        <a:t>15.86%</a:t>
                       </a:r>
                       <a:endParaRPr lang="en-US" sz="500" dirty="0">
                         <a:latin typeface="Calibri" charset="0"/>
@@ -16760,7 +16760,7 @@
                           <a:ea typeface="Calibri" pitchFamily="34" charset="-122"/>
                           <a:cs typeface="Calibri" pitchFamily="34" charset="-120"/>
                         </a:rPr>
-                        <a:t>0.01%</a:t>
+                        <a:t>1.00%</a:t>
                       </a:r>
                       <a:endParaRPr lang="en-US" sz="500" dirty="0">
                         <a:latin typeface="Calibri" charset="0"/>
@@ -16825,7 +16825,7 @@
                           <a:ea typeface="Calibri" pitchFamily="34" charset="-122"/>
                           <a:cs typeface="Calibri" pitchFamily="34" charset="-120"/>
                         </a:rPr>
-                        <a:t>0.01%</a:t>
+                        <a:t>0.99%</a:t>
                       </a:r>
                       <a:endParaRPr lang="en-US" sz="500" dirty="0">
                         <a:latin typeface="Calibri" charset="0"/>
@@ -16890,7 +16890,7 @@
                           <a:ea typeface="Calibri" pitchFamily="34" charset="-122"/>
                           <a:cs typeface="Calibri" pitchFamily="34" charset="-120"/>
                         </a:rPr>
-                        <a:t>0.01%</a:t>
+                        <a:t>1.18%</a:t>
                       </a:r>
                       <a:endParaRPr lang="en-US" sz="500" dirty="0">
                         <a:latin typeface="Calibri" charset="0"/>
@@ -16955,7 +16955,7 @@
                           <a:ea typeface="Calibri" pitchFamily="34" charset="-122"/>
                           <a:cs typeface="Calibri" pitchFamily="34" charset="-120"/>
                         </a:rPr>
-                        <a:t>0.01%</a:t>
+                        <a:t>0.98%</a:t>
                       </a:r>
                       <a:endParaRPr lang="en-US" sz="500" dirty="0">
                         <a:latin typeface="Calibri" charset="0"/>
@@ -17020,7 +17020,7 @@
                           <a:ea typeface="Calibri" pitchFamily="34" charset="-122"/>
                           <a:cs typeface="Calibri" pitchFamily="34" charset="-120"/>
                         </a:rPr>
-                        <a:t>0.01%</a:t>
+                        <a:t>1.14%</a:t>
                       </a:r>
                       <a:endParaRPr lang="en-US" sz="500" dirty="0">
                         <a:latin typeface="Calibri" charset="0"/>
@@ -17085,7 +17085,7 @@
                           <a:ea typeface="Calibri" pitchFamily="34" charset="-122"/>
                           <a:cs typeface="Calibri" pitchFamily="34" charset="-120"/>
                         </a:rPr>
-                        <a:t>0.01%</a:t>
+                        <a:t>1.04%</a:t>
                       </a:r>
                       <a:endParaRPr lang="en-US" sz="500" dirty="0">
                         <a:latin typeface="Calibri" charset="0"/>
@@ -17150,7 +17150,7 @@
                           <a:ea typeface="Calibri" pitchFamily="34" charset="-122"/>
                           <a:cs typeface="Calibri" pitchFamily="34" charset="-120"/>
                         </a:rPr>
-                        <a:t>0.01%</a:t>
+                        <a:t>1.10%</a:t>
                       </a:r>
                       <a:endParaRPr lang="en-US" sz="500" dirty="0">
                         <a:latin typeface="Calibri" charset="0"/>
@@ -17215,7 +17215,7 @@
                           <a:ea typeface="Calibri" pitchFamily="34" charset="-122"/>
                           <a:cs typeface="Calibri" pitchFamily="34" charset="-120"/>
                         </a:rPr>
-                        <a:t>0.01%</a:t>
+                        <a:t>1.02%</a:t>
                       </a:r>
                       <a:endParaRPr lang="en-US" sz="500" dirty="0">
                         <a:latin typeface="Calibri" charset="0"/>
@@ -17280,7 +17280,7 @@
                           <a:ea typeface="Calibri" pitchFamily="34" charset="-122"/>
                           <a:cs typeface="Calibri" pitchFamily="34" charset="-120"/>
                         </a:rPr>
-                        <a:t>0.01%</a:t>
+                        <a:t>0.96%</a:t>
                       </a:r>
                       <a:endParaRPr lang="en-US" sz="500" dirty="0">
                         <a:latin typeface="Calibri" charset="0"/>
@@ -17345,7 +17345,7 @@
                           <a:ea typeface="Calibri" pitchFamily="34" charset="-122"/>
                           <a:cs typeface="Calibri" pitchFamily="34" charset="-120"/>
                         </a:rPr>
-                        <a:t>0.01%</a:t>
+                        <a:t>0.96%</a:t>
                       </a:r>
                       <a:endParaRPr lang="en-US" sz="500" dirty="0">
                         <a:latin typeface="Calibri" charset="0"/>
@@ -17410,7 +17410,7 @@
                           <a:ea typeface="Calibri" pitchFamily="34" charset="-122"/>
                           <a:cs typeface="Calibri" pitchFamily="34" charset="-120"/>
                         </a:rPr>
-                        <a:t>0.01%</a:t>
+                        <a:t>0.89%</a:t>
                       </a:r>
                       <a:endParaRPr lang="en-US" sz="500" dirty="0">
                         <a:latin typeface="Calibri" charset="0"/>
@@ -17475,7 +17475,7 @@
                           <a:ea typeface="Calibri" pitchFamily="34" charset="-122"/>
                           <a:cs typeface="Calibri" pitchFamily="34" charset="-120"/>
                         </a:rPr>
-                        <a:t>0.01%</a:t>
+                        <a:t>0.88%</a:t>
                       </a:r>
                       <a:endParaRPr lang="en-US" sz="500" dirty="0">
                         <a:latin typeface="Calibri" charset="0"/>
@@ -17540,7 +17540,7 @@
                           <a:ea typeface="Calibri" pitchFamily="34" charset="-122"/>
                           <a:cs typeface="Calibri" pitchFamily="34" charset="-120"/>
                         </a:rPr>
-                        <a:t>0.12%</a:t>
+                        <a:t>12.83%</a:t>
                       </a:r>
                       <a:endParaRPr lang="en-US" sz="500" dirty="0">
                         <a:latin typeface="Calibri" charset="0"/>
@@ -18768,7 +18768,7 @@
                           <a:ea typeface="Calibri" pitchFamily="34" charset="-122"/>
                           <a:cs typeface="Calibri" pitchFamily="34" charset="-120"/>
                         </a:rPr>
-                        <a:t>0.01%</a:t>
+                        <a:t>0.51%</a:t>
                       </a:r>
                       <a:endParaRPr lang="en-US" sz="500" dirty="0">
                         <a:latin typeface="Calibri" charset="0"/>
@@ -18833,7 +18833,7 @@
                           <a:ea typeface="Calibri" pitchFamily="34" charset="-122"/>
                           <a:cs typeface="Calibri" pitchFamily="34" charset="-120"/>
                         </a:rPr>
-                        <a:t>0.00%</a:t>
+                        <a:t>0.45%</a:t>
                       </a:r>
                       <a:endParaRPr lang="en-US" sz="500" dirty="0">
                         <a:latin typeface="Calibri" charset="0"/>
@@ -18898,7 +18898,7 @@
                           <a:ea typeface="Calibri" pitchFamily="34" charset="-122"/>
                           <a:cs typeface="Calibri" pitchFamily="34" charset="-120"/>
                         </a:rPr>
-                        <a:t>0.00%</a:t>
+                        <a:t>0.47%</a:t>
                       </a:r>
                       <a:endParaRPr lang="en-US" sz="500" dirty="0">
                         <a:latin typeface="Calibri" charset="0"/>
@@ -18963,7 +18963,7 @@
                           <a:ea typeface="Calibri" pitchFamily="34" charset="-122"/>
                           <a:cs typeface="Calibri" pitchFamily="34" charset="-120"/>
                         </a:rPr>
-                        <a:t>0.00%</a:t>
+                        <a:t>0.42%</a:t>
                       </a:r>
                       <a:endParaRPr lang="en-US" sz="500" dirty="0">
                         <a:latin typeface="Calibri" charset="0"/>
@@ -19028,7 +19028,7 @@
                           <a:ea typeface="Calibri" pitchFamily="34" charset="-122"/>
                           <a:cs typeface="Calibri" pitchFamily="34" charset="-120"/>
                         </a:rPr>
-                        <a:t>0.00%</a:t>
+                        <a:t>0.37%</a:t>
                       </a:r>
                       <a:endParaRPr lang="en-US" sz="500" dirty="0">
                         <a:latin typeface="Calibri" charset="0"/>
@@ -19093,7 +19093,7 @@
                           <a:ea typeface="Calibri" pitchFamily="34" charset="-122"/>
                           <a:cs typeface="Calibri" pitchFamily="34" charset="-120"/>
                         </a:rPr>
-                        <a:t>0.00%</a:t>
+                        <a:t>0.36%</a:t>
                       </a:r>
                       <a:endParaRPr lang="en-US" sz="500" dirty="0">
                         <a:latin typeface="Calibri" charset="0"/>
@@ -19158,7 +19158,7 @@
                           <a:ea typeface="Calibri" pitchFamily="34" charset="-122"/>
                           <a:cs typeface="Calibri" pitchFamily="34" charset="-120"/>
                         </a:rPr>
-                        <a:t>0.00%</a:t>
+                        <a:t>0.36%</a:t>
                       </a:r>
                       <a:endParaRPr lang="en-US" sz="500" dirty="0">
                         <a:latin typeface="Calibri" charset="0"/>
@@ -19223,7 +19223,7 @@
                           <a:ea typeface="Calibri" pitchFamily="34" charset="-122"/>
                           <a:cs typeface="Calibri" pitchFamily="34" charset="-120"/>
                         </a:rPr>
-                        <a:t>0.00%</a:t>
+                        <a:t>0.34%</a:t>
                       </a:r>
                       <a:endParaRPr lang="en-US" sz="500" dirty="0">
                         <a:latin typeface="Calibri" charset="0"/>
@@ -19288,7 +19288,7 @@
                           <a:ea typeface="Calibri" pitchFamily="34" charset="-122"/>
                           <a:cs typeface="Calibri" pitchFamily="34" charset="-120"/>
                         </a:rPr>
-                        <a:t>0.00%</a:t>
+                        <a:t>0.34%</a:t>
                       </a:r>
                       <a:endParaRPr lang="en-US" sz="500" dirty="0">
                         <a:latin typeface="Calibri" charset="0"/>
@@ -19353,7 +19353,7 @@
                           <a:ea typeface="Calibri" pitchFamily="34" charset="-122"/>
                           <a:cs typeface="Calibri" pitchFamily="34" charset="-120"/>
                         </a:rPr>
-                        <a:t>0.00%</a:t>
+                        <a:t>0.32%</a:t>
                       </a:r>
                       <a:endParaRPr lang="en-US" sz="500" dirty="0">
                         <a:latin typeface="Calibri" charset="0"/>
@@ -19483,7 +19483,7 @@
                           <a:ea typeface="Calibri" pitchFamily="34" charset="-122"/>
                           <a:cs typeface="Calibri" pitchFamily="34" charset="-120"/>
                         </a:rPr>
-                        <a:t>-2.95%</a:t>
+                        <a:t>0.90%</a:t>
                       </a:r>
                       <a:endParaRPr lang="en-US" sz="500" dirty="0">
                         <a:latin typeface="Calibri" charset="0"/>
@@ -19669,7 +19669,7 @@
                           <a:ea typeface="Calibri" pitchFamily="34" charset="-122"/>
                           <a:cs typeface="Calibri" pitchFamily="34" charset="-120"/>
                         </a:rPr>
-                        <a:t>0.01%</a:t>
+                        <a:t>0.89%</a:t>
                       </a:r>
                       <a:endParaRPr lang="en-US" sz="500" dirty="0">
                         <a:latin typeface="Calibri" charset="0"/>
@@ -19734,7 +19734,7 @@
                           <a:ea typeface="Calibri" pitchFamily="34" charset="-122"/>
                           <a:cs typeface="Calibri" pitchFamily="34" charset="-120"/>
                         </a:rPr>
-                        <a:t>0.01%</a:t>
+                        <a:t>0.67%</a:t>
                       </a:r>
                       <a:endParaRPr lang="en-US" sz="500" dirty="0">
                         <a:latin typeface="Calibri" charset="0"/>
@@ -19799,7 +19799,7 @@
                           <a:ea typeface="Calibri" pitchFamily="34" charset="-122"/>
                           <a:cs typeface="Calibri" pitchFamily="34" charset="-120"/>
                         </a:rPr>
-                        <a:t>0.01%</a:t>
+                        <a:t>0.70%</a:t>
                       </a:r>
                       <a:endParaRPr lang="en-US" sz="500" dirty="0">
                         <a:latin typeface="Calibri" charset="0"/>
@@ -19864,7 +19864,7 @@
                           <a:ea typeface="Calibri" pitchFamily="34" charset="-122"/>
                           <a:cs typeface="Calibri" pitchFamily="34" charset="-120"/>
                         </a:rPr>
-                        <a:t>0.01%</a:t>
+                        <a:t>0.66%</a:t>
                       </a:r>
                       <a:endParaRPr lang="en-US" sz="500" dirty="0">
                         <a:latin typeface="Calibri" charset="0"/>
@@ -19929,7 +19929,7 @@
                           <a:ea typeface="Calibri" pitchFamily="34" charset="-122"/>
                           <a:cs typeface="Calibri" pitchFamily="34" charset="-120"/>
                         </a:rPr>
-                        <a:t>0.01%</a:t>
+                        <a:t>0.65%</a:t>
                       </a:r>
                       <a:endParaRPr lang="en-US" sz="500" dirty="0">
                         <a:latin typeface="Calibri" charset="0"/>
@@ -19994,7 +19994,7 @@
                           <a:ea typeface="Calibri" pitchFamily="34" charset="-122"/>
                           <a:cs typeface="Calibri" pitchFamily="34" charset="-120"/>
                         </a:rPr>
-                        <a:t>0.01%</a:t>
+                        <a:t>0.58%</a:t>
                       </a:r>
                       <a:endParaRPr lang="en-US" sz="500" dirty="0">
                         <a:latin typeface="Calibri" charset="0"/>
@@ -20059,7 +20059,7 @@
                           <a:ea typeface="Calibri" pitchFamily="34" charset="-122"/>
                           <a:cs typeface="Calibri" pitchFamily="34" charset="-120"/>
                         </a:rPr>
-                        <a:t>0.01%</a:t>
+                        <a:t>0.54%</a:t>
                       </a:r>
                       <a:endParaRPr lang="en-US" sz="500" dirty="0">
                         <a:latin typeface="Calibri" charset="0"/>
@@ -20124,7 +20124,7 @@
                           <a:ea typeface="Calibri" pitchFamily="34" charset="-122"/>
                           <a:cs typeface="Calibri" pitchFamily="34" charset="-120"/>
                         </a:rPr>
-                        <a:t>0.01%</a:t>
+                        <a:t>0.54%</a:t>
                       </a:r>
                       <a:endParaRPr lang="en-US" sz="500" dirty="0">
                         <a:latin typeface="Calibri" charset="0"/>
@@ -20189,7 +20189,7 @@
                           <a:ea typeface="Calibri" pitchFamily="34" charset="-122"/>
                           <a:cs typeface="Calibri" pitchFamily="34" charset="-120"/>
                         </a:rPr>
-                        <a:t>0.01%</a:t>
+                        <a:t>0.51%</a:t>
                       </a:r>
                       <a:endParaRPr lang="en-US" sz="500" dirty="0">
                         <a:latin typeface="Calibri" charset="0"/>
@@ -20254,7 +20254,7 @@
                           <a:ea typeface="Calibri" pitchFamily="34" charset="-122"/>
                           <a:cs typeface="Calibri" pitchFamily="34" charset="-120"/>
                         </a:rPr>
-                        <a:t>0.01%</a:t>
+                        <a:t>0.50%</a:t>
                       </a:r>
                       <a:endParaRPr lang="en-US" sz="500" dirty="0">
                         <a:latin typeface="Calibri" charset="0"/>
@@ -20319,7 +20319,7 @@
                           <a:ea typeface="Calibri" pitchFamily="34" charset="-122"/>
                           <a:cs typeface="Calibri" pitchFamily="34" charset="-120"/>
                         </a:rPr>
-                        <a:t>0.00%</a:t>
+                        <a:t>0.48%</a:t>
                       </a:r>
                       <a:endParaRPr lang="en-US" sz="500" dirty="0">
                         <a:latin typeface="Calibri" charset="0"/>
@@ -20384,7 +20384,7 @@
                           <a:ea typeface="Calibri" pitchFamily="34" charset="-122"/>
                           <a:cs typeface="Calibri" pitchFamily="34" charset="-120"/>
                         </a:rPr>
-                        <a:t>0.00%</a:t>
+                        <a:t>0.48%</a:t>
                       </a:r>
                       <a:endParaRPr lang="en-US" sz="500" dirty="0">
                         <a:latin typeface="Calibri" charset="0"/>
@@ -20449,7 +20449,7 @@
                           <a:ea typeface="Calibri" pitchFamily="34" charset="-122"/>
                           <a:cs typeface="Calibri" pitchFamily="34" charset="-120"/>
                         </a:rPr>
-                        <a:t>0.07%</a:t>
+                        <a:t>7.45%</a:t>
                       </a:r>
                       <a:endParaRPr lang="en-US" sz="500" dirty="0">
                         <a:latin typeface="Calibri" charset="0"/>
@@ -22578,7 +22578,7 @@
                           <a:ea typeface="Calibri" pitchFamily="34" charset="-122"/>
                           <a:cs typeface="Calibri" pitchFamily="34" charset="-120"/>
                         </a:rPr>
-                        <a:t>0.00%</a:t>
+                        <a:t>0.46%</a:t>
                       </a:r>
                       <a:endParaRPr lang="en-US" sz="500" dirty="0">
                         <a:latin typeface="Calibri" charset="0"/>
@@ -22643,7 +22643,7 @@
                           <a:ea typeface="Calibri" pitchFamily="34" charset="-122"/>
                           <a:cs typeface="Calibri" pitchFamily="34" charset="-120"/>
                         </a:rPr>
-                        <a:t>0.00%</a:t>
+                        <a:t>0.47%</a:t>
                       </a:r>
                       <a:endParaRPr lang="en-US" sz="500" dirty="0">
                         <a:latin typeface="Calibri" charset="0"/>
@@ -22708,7 +22708,7 @@
                           <a:ea typeface="Calibri" pitchFamily="34" charset="-122"/>
                           <a:cs typeface="Calibri" pitchFamily="34" charset="-120"/>
                         </a:rPr>
-                        <a:t>0.01%</a:t>
+                        <a:t>0.57%</a:t>
                       </a:r>
                       <a:endParaRPr lang="en-US" sz="500" dirty="0">
                         <a:latin typeface="Calibri" charset="0"/>
@@ -22773,7 +22773,7 @@
                           <a:ea typeface="Calibri" pitchFamily="34" charset="-122"/>
                           <a:cs typeface="Calibri" pitchFamily="34" charset="-120"/>
                         </a:rPr>
-                        <a:t>0.01%</a:t>
+                        <a:t>0.56%</a:t>
                       </a:r>
                       <a:endParaRPr lang="en-US" sz="500" dirty="0">
                         <a:latin typeface="Calibri" charset="0"/>
@@ -22838,7 +22838,7 @@
                           <a:ea typeface="Calibri" pitchFamily="34" charset="-122"/>
                           <a:cs typeface="Calibri" pitchFamily="34" charset="-120"/>
                         </a:rPr>
-                        <a:t>0.01%</a:t>
+                        <a:t>0.59%</a:t>
                       </a:r>
                       <a:endParaRPr lang="en-US" sz="500" dirty="0">
                         <a:latin typeface="Calibri" charset="0"/>
@@ -22903,7 +22903,7 @@
                           <a:ea typeface="Calibri" pitchFamily="34" charset="-122"/>
                           <a:cs typeface="Calibri" pitchFamily="34" charset="-120"/>
                         </a:rPr>
-                        <a:t>0.01%</a:t>
+                        <a:t>0.57%</a:t>
                       </a:r>
                       <a:endParaRPr lang="en-US" sz="500" dirty="0">
                         <a:latin typeface="Calibri" charset="0"/>
@@ -22968,7 +22968,7 @@
                           <a:ea typeface="Calibri" pitchFamily="34" charset="-122"/>
                           <a:cs typeface="Calibri" pitchFamily="34" charset="-120"/>
                         </a:rPr>
-                        <a:t>0.01%</a:t>
+                        <a:t>0.54%</a:t>
                       </a:r>
                       <a:endParaRPr lang="en-US" sz="500" dirty="0">
                         <a:latin typeface="Calibri" charset="0"/>
@@ -23358,7 +23358,7 @@
                           <a:ea typeface="Calibri" pitchFamily="34" charset="-122"/>
                           <a:cs typeface="Calibri" pitchFamily="34" charset="-120"/>
                         </a:rPr>
-                        <a:t>3.01%</a:t>
+                        <a:t>6.90%</a:t>
                       </a:r>
                       <a:endParaRPr lang="en-US" sz="500" dirty="0">
                         <a:latin typeface="Calibri" charset="0"/>

--- a/folletos/2026-04/pptx/FIP_VANTRUST_LIQUIDEZ_ALTO_APORTE.pptx
+++ b/folletos/2026-04/pptx/FIP_VANTRUST_LIQUIDEZ_ALTO_APORTE.pptx
@@ -3113,7 +3113,7 @@
                 <a:ea typeface="Calibri" pitchFamily="34" charset="-122"/>
                 <a:cs typeface="Calibri" pitchFamily="34" charset="-120"/>
               </a:rPr>
-              <a:t>prueba CLP</a:t>
+              <a:t>prueba 13 CLP</a:t>
             </a:r>
             <a:endParaRPr lang="en-US" sz="800" dirty="0"/>
           </a:p>

--- a/folletos/2026-04/pptx/FIP_VANTRUST_LIQUIDEZ_ALTO_APORTE.pptx
+++ b/folletos/2026-04/pptx/FIP_VANTRUST_LIQUIDEZ_ALTO_APORTE.pptx
@@ -189,38 +189,218 @@
           </c:marker>
           <c:cat>
             <c:multiLvlStrRef>
-              <c:f>Sheet1!$A$2:$A$11</c:f>
+              <c:f>Sheet1!$A$2:$A$71</c:f>
               <c:multiLvlStrCache>
-                <c:ptCount val="10"/>
+                <c:ptCount val="70"/>
                 <c:lvl>
                   <c:pt idx="0">
+                    <c:v>Jul 2020</c:v>
+                  </c:pt>
+                  <c:pt idx="1">
+                    <c:v>Aug 2020</c:v>
+                  </c:pt>
+                  <c:pt idx="2">
+                    <c:v>Sep 2020</c:v>
+                  </c:pt>
+                  <c:pt idx="3">
+                    <c:v>Oct 2020</c:v>
+                  </c:pt>
+                  <c:pt idx="4">
+                    <c:v>Nov 2020</c:v>
+                  </c:pt>
+                  <c:pt idx="5">
+                    <c:v>Dec 2020</c:v>
+                  </c:pt>
+                  <c:pt idx="6">
+                    <c:v>Jan 2021</c:v>
+                  </c:pt>
+                  <c:pt idx="7">
+                    <c:v>Feb 2021</c:v>
+                  </c:pt>
+                  <c:pt idx="8">
+                    <c:v>Mar 2021</c:v>
+                  </c:pt>
+                  <c:pt idx="9">
+                    <c:v>Apr 2021</c:v>
+                  </c:pt>
+                  <c:pt idx="10">
+                    <c:v>May 2021</c:v>
+                  </c:pt>
+                  <c:pt idx="11">
+                    <c:v>Jun 2021</c:v>
+                  </c:pt>
+                  <c:pt idx="12">
+                    <c:v>Jul 2021</c:v>
+                  </c:pt>
+                  <c:pt idx="13">
+                    <c:v>Aug 2021</c:v>
+                  </c:pt>
+                  <c:pt idx="14">
+                    <c:v>Sep 2021</c:v>
+                  </c:pt>
+                  <c:pt idx="15">
+                    <c:v>Oct 2021</c:v>
+                  </c:pt>
+                  <c:pt idx="16">
+                    <c:v>Nov 2021</c:v>
+                  </c:pt>
+                  <c:pt idx="17">
+                    <c:v>Dec 2021</c:v>
+                  </c:pt>
+                  <c:pt idx="18">
+                    <c:v>Jan 2022</c:v>
+                  </c:pt>
+                  <c:pt idx="19">
+                    <c:v>Feb 2022</c:v>
+                  </c:pt>
+                  <c:pt idx="20">
+                    <c:v>Mar 2022</c:v>
+                  </c:pt>
+                  <c:pt idx="21">
+                    <c:v>Apr 2022</c:v>
+                  </c:pt>
+                  <c:pt idx="22">
+                    <c:v>May 2022</c:v>
+                  </c:pt>
+                  <c:pt idx="23">
+                    <c:v>Jun 2022</c:v>
+                  </c:pt>
+                  <c:pt idx="24">
+                    <c:v>Jul 2022</c:v>
+                  </c:pt>
+                  <c:pt idx="25">
+                    <c:v>Aug 2022</c:v>
+                  </c:pt>
+                  <c:pt idx="26">
+                    <c:v>Sep 2022</c:v>
+                  </c:pt>
+                  <c:pt idx="27">
+                    <c:v>Oct 2022</c:v>
+                  </c:pt>
+                  <c:pt idx="28">
+                    <c:v>Nov 2022</c:v>
+                  </c:pt>
+                  <c:pt idx="29">
+                    <c:v>Dec 2022</c:v>
+                  </c:pt>
+                  <c:pt idx="30">
+                    <c:v>Jan 2023</c:v>
+                  </c:pt>
+                  <c:pt idx="31">
+                    <c:v>Feb 2023</c:v>
+                  </c:pt>
+                  <c:pt idx="32">
+                    <c:v>Mar 2023</c:v>
+                  </c:pt>
+                  <c:pt idx="33">
+                    <c:v>Apr 2023</c:v>
+                  </c:pt>
+                  <c:pt idx="34">
+                    <c:v>May 2023</c:v>
+                  </c:pt>
+                  <c:pt idx="35">
+                    <c:v>Jun 2023</c:v>
+                  </c:pt>
+                  <c:pt idx="36">
+                    <c:v>Jul 2023</c:v>
+                  </c:pt>
+                  <c:pt idx="37">
+                    <c:v>Aug 2023</c:v>
+                  </c:pt>
+                  <c:pt idx="38">
+                    <c:v>Sep 2023</c:v>
+                  </c:pt>
+                  <c:pt idx="39">
+                    <c:v>Oct 2023</c:v>
+                  </c:pt>
+                  <c:pt idx="40">
+                    <c:v>Nov 2023</c:v>
+                  </c:pt>
+                  <c:pt idx="41">
+                    <c:v>Dec 2023</c:v>
+                  </c:pt>
+                  <c:pt idx="42">
+                    <c:v>Jan 2024</c:v>
+                  </c:pt>
+                  <c:pt idx="43">
+                    <c:v>Feb 2024</c:v>
+                  </c:pt>
+                  <c:pt idx="44">
+                    <c:v>Mar 2024</c:v>
+                  </c:pt>
+                  <c:pt idx="45">
+                    <c:v>Apr 2024</c:v>
+                  </c:pt>
+                  <c:pt idx="46">
+                    <c:v>May 2024</c:v>
+                  </c:pt>
+                  <c:pt idx="47">
+                    <c:v>Jun 2024</c:v>
+                  </c:pt>
+                  <c:pt idx="48">
+                    <c:v>Jul 2024</c:v>
+                  </c:pt>
+                  <c:pt idx="49">
+                    <c:v>Aug 2024</c:v>
+                  </c:pt>
+                  <c:pt idx="50">
+                    <c:v>Sep 2024</c:v>
+                  </c:pt>
+                  <c:pt idx="51">
+                    <c:v>Oct 2024</c:v>
+                  </c:pt>
+                  <c:pt idx="52">
+                    <c:v>Nov 2024</c:v>
+                  </c:pt>
+                  <c:pt idx="53">
+                    <c:v>Dec 2024</c:v>
+                  </c:pt>
+                  <c:pt idx="54">
+                    <c:v>Jan 2025</c:v>
+                  </c:pt>
+                  <c:pt idx="55">
+                    <c:v>Feb 2025</c:v>
+                  </c:pt>
+                  <c:pt idx="56">
+                    <c:v>Mar 2025</c:v>
+                  </c:pt>
+                  <c:pt idx="57">
+                    <c:v>Apr 2025</c:v>
+                  </c:pt>
+                  <c:pt idx="58">
+                    <c:v>May 2025</c:v>
+                  </c:pt>
+                  <c:pt idx="59">
+                    <c:v>Jun 2025</c:v>
+                  </c:pt>
+                  <c:pt idx="60">
                     <c:v>Jul 2025</c:v>
                   </c:pt>
-                  <c:pt idx="1">
+                  <c:pt idx="61">
                     <c:v>Aug 2025</c:v>
                   </c:pt>
-                  <c:pt idx="2">
+                  <c:pt idx="62">
                     <c:v>Sep 2025</c:v>
                   </c:pt>
-                  <c:pt idx="3">
+                  <c:pt idx="63">
                     <c:v>Oct 2025</c:v>
                   </c:pt>
-                  <c:pt idx="4">
+                  <c:pt idx="64">
                     <c:v>Nov 2025</c:v>
                   </c:pt>
-                  <c:pt idx="5">
+                  <c:pt idx="65">
                     <c:v>Dec 2025</c:v>
                   </c:pt>
-                  <c:pt idx="6">
+                  <c:pt idx="66">
                     <c:v>Jan 2026</c:v>
                   </c:pt>
-                  <c:pt idx="7">
+                  <c:pt idx="67">
                     <c:v>Feb 2026</c:v>
                   </c:pt>
-                  <c:pt idx="8">
+                  <c:pt idx="68">
                     <c:v>Mar 2026</c:v>
                   </c:pt>
-                  <c:pt idx="9">
+                  <c:pt idx="69">
                     <c:v>Apr 2026</c:v>
                   </c:pt>
                 </c:lvl>
@@ -229,39 +409,219 @@
           </c:cat>
           <c:val>
             <c:numRef>
-              <c:f>Sheet1!$B$2:$B$11</c:f>
+              <c:f>Sheet1!$B$2:$B$71</c:f>
               <c:numCache>
                 <c:formatCode>General</c:formatCode>
-                <c:ptCount val="10"/>
+                <c:ptCount val="70"/>
                 <c:pt idx="0">
                   <c:v>100</c:v>
                 </c:pt>
                 <c:pt idx="1">
+                  <c:v>100.04</c:v>
+                </c:pt>
+                <c:pt idx="2">
+                  <c:v>100.08</c:v>
+                </c:pt>
+                <c:pt idx="3">
+                  <c:v>100.12</c:v>
+                </c:pt>
+                <c:pt idx="4">
+                  <c:v>100.15</c:v>
+                </c:pt>
+                <c:pt idx="5">
+                  <c:v>100.19</c:v>
+                </c:pt>
+                <c:pt idx="6">
+                  <c:v>100.22</c:v>
+                </c:pt>
+                <c:pt idx="7">
+                  <c:v>100.24</c:v>
+                </c:pt>
+                <c:pt idx="8">
+                  <c:v>100.27</c:v>
+                </c:pt>
+                <c:pt idx="9">
+                  <c:v>100.3</c:v>
+                </c:pt>
+                <c:pt idx="10">
+                  <c:v>100.32</c:v>
+                </c:pt>
+                <c:pt idx="11">
+                  <c:v>100.35</c:v>
+                </c:pt>
+                <c:pt idx="12">
                   <c:v>100.4</c:v>
                 </c:pt>
-                <c:pt idx="2">
-                  <c:v>100.79</c:v>
+                <c:pt idx="13">
+                  <c:v>100.46</c:v>
                 </c:pt>
-                <c:pt idx="3">
-                  <c:v>101.19</c:v>
+                <c:pt idx="14">
+                  <c:v>100.59</c:v>
                 </c:pt>
-                <c:pt idx="4">
-                  <c:v>101.59</c:v>
+                <c:pt idx="15">
+                  <c:v>100.8</c:v>
                 </c:pt>
-                <c:pt idx="5">
-                  <c:v>101.98</c:v>
+                <c:pt idx="16">
+                  <c:v>101.01</c:v>
                 </c:pt>
-                <c:pt idx="6">
-                  <c:v>102.37</c:v>
+                <c:pt idx="17">
+                  <c:v>101.33</c:v>
                 </c:pt>
-                <c:pt idx="7">
-                  <c:v>102.75</c:v>
+                <c:pt idx="18">
+                  <c:v>101.68</c:v>
                 </c:pt>
-                <c:pt idx="8">
-                  <c:v>103.14</c:v>
+                <c:pt idx="19">
+                  <c:v>102.12</c:v>
                 </c:pt>
-                <c:pt idx="9">
-                  <c:v>103.52</c:v>
+                <c:pt idx="20">
+                  <c:v>102.61</c:v>
+                </c:pt>
+                <c:pt idx="21">
+                  <c:v>103.17</c:v>
+                </c:pt>
+                <c:pt idx="22">
+                  <c:v>103.9</c:v>
+                </c:pt>
+                <c:pt idx="23">
+                  <c:v>104.67</c:v>
+                </c:pt>
+                <c:pt idx="24">
+                  <c:v>105.46</c:v>
+                </c:pt>
+                <c:pt idx="25">
+                  <c:v>106.41</c:v>
+                </c:pt>
+                <c:pt idx="26">
+                  <c:v>107.35</c:v>
+                </c:pt>
+                <c:pt idx="27">
+                  <c:v>108.27</c:v>
+                </c:pt>
+                <c:pt idx="28">
+                  <c:v>109.39</c:v>
+                </c:pt>
+                <c:pt idx="29">
+                  <c:v>110.42</c:v>
+                </c:pt>
+                <c:pt idx="30">
+                  <c:v>111.53</c:v>
+                </c:pt>
+                <c:pt idx="31">
+                  <c:v>112.51</c:v>
+                </c:pt>
+                <c:pt idx="32">
+                  <c:v>113.61</c:v>
+                </c:pt>
+                <c:pt idx="33">
+                  <c:v>114.6</c:v>
+                </c:pt>
+                <c:pt idx="34">
+                  <c:v>115.79</c:v>
+                </c:pt>
+                <c:pt idx="35">
+                  <c:v>116.88</c:v>
+                </c:pt>
+                <c:pt idx="36">
+                  <c:v>118.02</c:v>
+                </c:pt>
+                <c:pt idx="37">
+                  <c:v>119.07</c:v>
+                </c:pt>
+                <c:pt idx="38">
+                  <c:v>119.99</c:v>
+                </c:pt>
+                <c:pt idx="39">
+                  <c:v>121.01</c:v>
+                </c:pt>
+                <c:pt idx="40">
+                  <c:v>121.92</c:v>
+                </c:pt>
+                <c:pt idx="41">
+                  <c:v>122.78</c:v>
+                </c:pt>
+                <c:pt idx="42">
+                  <c:v>123.69</c:v>
+                </c:pt>
+                <c:pt idx="43">
+                  <c:v>124.44</c:v>
+                </c:pt>
+                <c:pt idx="44">
+                  <c:v>125.15</c:v>
+                </c:pt>
+                <c:pt idx="45">
+                  <c:v>125.91</c:v>
+                </c:pt>
+                <c:pt idx="46">
+                  <c:v>126.6</c:v>
+                </c:pt>
+                <c:pt idx="47">
+                  <c:v>127.19</c:v>
+                </c:pt>
+                <c:pt idx="48">
+                  <c:v>127.86</c:v>
+                </c:pt>
+                <c:pt idx="49">
+                  <c:v>128.47</c:v>
+                </c:pt>
+                <c:pt idx="50">
+                  <c:v>129.09</c:v>
+                </c:pt>
+                <c:pt idx="51">
+                  <c:v>129.67</c:v>
+                </c:pt>
+                <c:pt idx="52">
+                  <c:v>130.24</c:v>
+                </c:pt>
+                <c:pt idx="53">
+                  <c:v>130.82</c:v>
+                </c:pt>
+                <c:pt idx="54">
+                  <c:v>131.4</c:v>
+                </c:pt>
+                <c:pt idx="55">
+                  <c:v>131.91</c:v>
+                </c:pt>
+                <c:pt idx="56">
+                  <c:v>132.48</c:v>
+                </c:pt>
+                <c:pt idx="57">
+                  <c:v>133.03</c:v>
+                </c:pt>
+                <c:pt idx="58">
+                  <c:v>133.59</c:v>
+                </c:pt>
+                <c:pt idx="59">
+                  <c:v>134.16</c:v>
+                </c:pt>
+                <c:pt idx="60">
+                  <c:v>134.74</c:v>
+                </c:pt>
+                <c:pt idx="61">
+                  <c:v>135.26</c:v>
+                </c:pt>
+                <c:pt idx="62">
+                  <c:v>135.83</c:v>
+                </c:pt>
+                <c:pt idx="63">
+                  <c:v>136.37</c:v>
+                </c:pt>
+                <c:pt idx="64">
+                  <c:v>136.89</c:v>
+                </c:pt>
+                <c:pt idx="65">
+                  <c:v>137.46</c:v>
+                </c:pt>
+                <c:pt idx="66">
+                  <c:v>137.99</c:v>
+                </c:pt>
+                <c:pt idx="67">
+                  <c:v>138.49</c:v>
+                </c:pt>
+                <c:pt idx="68">
+                  <c:v>139.03</c:v>
+                </c:pt>
+                <c:pt idx="69">
+                  <c:v>139.55</c:v>
                 </c:pt>
               </c:numCache>
             </c:numRef>
@@ -339,38 +699,218 @@
           </c:marker>
           <c:cat>
             <c:multiLvlStrRef>
-              <c:f>Sheet1!$A$2:$A$11</c:f>
+              <c:f>Sheet1!$A$2:$A$71</c:f>
               <c:multiLvlStrCache>
-                <c:ptCount val="10"/>
+                <c:ptCount val="70"/>
                 <c:lvl>
                   <c:pt idx="0">
+                    <c:v>Jul 2020</c:v>
+                  </c:pt>
+                  <c:pt idx="1">
+                    <c:v>Aug 2020</c:v>
+                  </c:pt>
+                  <c:pt idx="2">
+                    <c:v>Sep 2020</c:v>
+                  </c:pt>
+                  <c:pt idx="3">
+                    <c:v>Oct 2020</c:v>
+                  </c:pt>
+                  <c:pt idx="4">
+                    <c:v>Nov 2020</c:v>
+                  </c:pt>
+                  <c:pt idx="5">
+                    <c:v>Dec 2020</c:v>
+                  </c:pt>
+                  <c:pt idx="6">
+                    <c:v>Jan 2021</c:v>
+                  </c:pt>
+                  <c:pt idx="7">
+                    <c:v>Feb 2021</c:v>
+                  </c:pt>
+                  <c:pt idx="8">
+                    <c:v>Mar 2021</c:v>
+                  </c:pt>
+                  <c:pt idx="9">
+                    <c:v>Apr 2021</c:v>
+                  </c:pt>
+                  <c:pt idx="10">
+                    <c:v>May 2021</c:v>
+                  </c:pt>
+                  <c:pt idx="11">
+                    <c:v>Jun 2021</c:v>
+                  </c:pt>
+                  <c:pt idx="12">
+                    <c:v>Jul 2021</c:v>
+                  </c:pt>
+                  <c:pt idx="13">
+                    <c:v>Aug 2021</c:v>
+                  </c:pt>
+                  <c:pt idx="14">
+                    <c:v>Sep 2021</c:v>
+                  </c:pt>
+                  <c:pt idx="15">
+                    <c:v>Oct 2021</c:v>
+                  </c:pt>
+                  <c:pt idx="16">
+                    <c:v>Nov 2021</c:v>
+                  </c:pt>
+                  <c:pt idx="17">
+                    <c:v>Dec 2021</c:v>
+                  </c:pt>
+                  <c:pt idx="18">
+                    <c:v>Jan 2022</c:v>
+                  </c:pt>
+                  <c:pt idx="19">
+                    <c:v>Feb 2022</c:v>
+                  </c:pt>
+                  <c:pt idx="20">
+                    <c:v>Mar 2022</c:v>
+                  </c:pt>
+                  <c:pt idx="21">
+                    <c:v>Apr 2022</c:v>
+                  </c:pt>
+                  <c:pt idx="22">
+                    <c:v>May 2022</c:v>
+                  </c:pt>
+                  <c:pt idx="23">
+                    <c:v>Jun 2022</c:v>
+                  </c:pt>
+                  <c:pt idx="24">
+                    <c:v>Jul 2022</c:v>
+                  </c:pt>
+                  <c:pt idx="25">
+                    <c:v>Aug 2022</c:v>
+                  </c:pt>
+                  <c:pt idx="26">
+                    <c:v>Sep 2022</c:v>
+                  </c:pt>
+                  <c:pt idx="27">
+                    <c:v>Oct 2022</c:v>
+                  </c:pt>
+                  <c:pt idx="28">
+                    <c:v>Nov 2022</c:v>
+                  </c:pt>
+                  <c:pt idx="29">
+                    <c:v>Dec 2022</c:v>
+                  </c:pt>
+                  <c:pt idx="30">
+                    <c:v>Jan 2023</c:v>
+                  </c:pt>
+                  <c:pt idx="31">
+                    <c:v>Feb 2023</c:v>
+                  </c:pt>
+                  <c:pt idx="32">
+                    <c:v>Mar 2023</c:v>
+                  </c:pt>
+                  <c:pt idx="33">
+                    <c:v>Apr 2023</c:v>
+                  </c:pt>
+                  <c:pt idx="34">
+                    <c:v>May 2023</c:v>
+                  </c:pt>
+                  <c:pt idx="35">
+                    <c:v>Jun 2023</c:v>
+                  </c:pt>
+                  <c:pt idx="36">
+                    <c:v>Jul 2023</c:v>
+                  </c:pt>
+                  <c:pt idx="37">
+                    <c:v>Aug 2023</c:v>
+                  </c:pt>
+                  <c:pt idx="38">
+                    <c:v>Sep 2023</c:v>
+                  </c:pt>
+                  <c:pt idx="39">
+                    <c:v>Oct 2023</c:v>
+                  </c:pt>
+                  <c:pt idx="40">
+                    <c:v>Nov 2023</c:v>
+                  </c:pt>
+                  <c:pt idx="41">
+                    <c:v>Dec 2023</c:v>
+                  </c:pt>
+                  <c:pt idx="42">
+                    <c:v>Jan 2024</c:v>
+                  </c:pt>
+                  <c:pt idx="43">
+                    <c:v>Feb 2024</c:v>
+                  </c:pt>
+                  <c:pt idx="44">
+                    <c:v>Mar 2024</c:v>
+                  </c:pt>
+                  <c:pt idx="45">
+                    <c:v>Apr 2024</c:v>
+                  </c:pt>
+                  <c:pt idx="46">
+                    <c:v>May 2024</c:v>
+                  </c:pt>
+                  <c:pt idx="47">
+                    <c:v>Jun 2024</c:v>
+                  </c:pt>
+                  <c:pt idx="48">
+                    <c:v>Jul 2024</c:v>
+                  </c:pt>
+                  <c:pt idx="49">
+                    <c:v>Aug 2024</c:v>
+                  </c:pt>
+                  <c:pt idx="50">
+                    <c:v>Sep 2024</c:v>
+                  </c:pt>
+                  <c:pt idx="51">
+                    <c:v>Oct 2024</c:v>
+                  </c:pt>
+                  <c:pt idx="52">
+                    <c:v>Nov 2024</c:v>
+                  </c:pt>
+                  <c:pt idx="53">
+                    <c:v>Dec 2024</c:v>
+                  </c:pt>
+                  <c:pt idx="54">
+                    <c:v>Jan 2025</c:v>
+                  </c:pt>
+                  <c:pt idx="55">
+                    <c:v>Feb 2025</c:v>
+                  </c:pt>
+                  <c:pt idx="56">
+                    <c:v>Mar 2025</c:v>
+                  </c:pt>
+                  <c:pt idx="57">
+                    <c:v>Apr 2025</c:v>
+                  </c:pt>
+                  <c:pt idx="58">
+                    <c:v>May 2025</c:v>
+                  </c:pt>
+                  <c:pt idx="59">
+                    <c:v>Jun 2025</c:v>
+                  </c:pt>
+                  <c:pt idx="60">
                     <c:v>Jul 2025</c:v>
                   </c:pt>
-                  <c:pt idx="1">
+                  <c:pt idx="61">
                     <c:v>Aug 2025</c:v>
                   </c:pt>
-                  <c:pt idx="2">
+                  <c:pt idx="62">
                     <c:v>Sep 2025</c:v>
                   </c:pt>
-                  <c:pt idx="3">
+                  <c:pt idx="63">
                     <c:v>Oct 2025</c:v>
                   </c:pt>
-                  <c:pt idx="4">
+                  <c:pt idx="64">
                     <c:v>Nov 2025</c:v>
                   </c:pt>
-                  <c:pt idx="5">
+                  <c:pt idx="65">
                     <c:v>Dec 2025</c:v>
                   </c:pt>
-                  <c:pt idx="6">
+                  <c:pt idx="66">
                     <c:v>Jan 2026</c:v>
                   </c:pt>
-                  <c:pt idx="7">
+                  <c:pt idx="67">
                     <c:v>Feb 2026</c:v>
                   </c:pt>
-                  <c:pt idx="8">
+                  <c:pt idx="68">
                     <c:v>Mar 2026</c:v>
                   </c:pt>
-                  <c:pt idx="9">
+                  <c:pt idx="69">
                     <c:v>Apr 2026</c:v>
                   </c:pt>
                 </c:lvl>
@@ -379,39 +919,219 @@
           </c:cat>
           <c:val>
             <c:numRef>
-              <c:f>Sheet1!$C$2:$C$11</c:f>
+              <c:f>Sheet1!$C$2:$C$71</c:f>
               <c:numCache>
                 <c:formatCode>General</c:formatCode>
-                <c:ptCount val="10"/>
+                <c:ptCount val="70"/>
                 <c:pt idx="0">
                   <c:v>100</c:v>
                 </c:pt>
                 <c:pt idx="1">
-                  <c:v>100.57</c:v>
+                  <c:v>100.19</c:v>
                 </c:pt>
                 <c:pt idx="2">
-                  <c:v>101.14</c:v>
+                  <c:v>100.38</c:v>
                 </c:pt>
                 <c:pt idx="3">
-                  <c:v>101.74</c:v>
+                  <c:v>100.58</c:v>
                 </c:pt>
                 <c:pt idx="4">
-                  <c:v>102.35</c:v>
+                  <c:v>100.77</c:v>
                 </c:pt>
                 <c:pt idx="5">
-                  <c:v>102.97</c:v>
+                  <c:v>100.83</c:v>
                 </c:pt>
                 <c:pt idx="6">
-                  <c:v>103.59</c:v>
+                  <c:v>101.01</c:v>
                 </c:pt>
                 <c:pt idx="7">
-                  <c:v>104.19</c:v>
+                  <c:v>101.21</c:v>
                 </c:pt>
                 <c:pt idx="8">
-                  <c:v>104.82</c:v>
+                  <c:v>101.35</c:v>
                 </c:pt>
                 <c:pt idx="9">
-                  <c:v>105.46</c:v>
+                  <c:v>101.51</c:v>
+                </c:pt>
+                <c:pt idx="10">
+                  <c:v>101.72</c:v>
+                </c:pt>
+                <c:pt idx="11">
+                  <c:v>101.89</c:v>
+                </c:pt>
+                <c:pt idx="12">
+                  <c:v>102.02</c:v>
+                </c:pt>
+                <c:pt idx="13">
+                  <c:v>102.15</c:v>
+                </c:pt>
+                <c:pt idx="14">
+                  <c:v>102.33</c:v>
+                </c:pt>
+                <c:pt idx="15">
+                  <c:v>102.52</c:v>
+                </c:pt>
+                <c:pt idx="16">
+                  <c:v>102.75</c:v>
+                </c:pt>
+                <c:pt idx="17">
+                  <c:v>103.04</c:v>
+                </c:pt>
+                <c:pt idx="18">
+                  <c:v>103.42</c:v>
+                </c:pt>
+                <c:pt idx="19">
+                  <c:v>103.88</c:v>
+                </c:pt>
+                <c:pt idx="20">
+                  <c:v>104.44</c:v>
+                </c:pt>
+                <c:pt idx="21">
+                  <c:v>105.2</c:v>
+                </c:pt>
+                <c:pt idx="22">
+                  <c:v>106.11</c:v>
+                </c:pt>
+                <c:pt idx="23">
+                  <c:v>106.95</c:v>
+                </c:pt>
+                <c:pt idx="24">
+                  <c:v>107.86</c:v>
+                </c:pt>
+                <c:pt idx="25">
+                  <c:v>108.85</c:v>
+                </c:pt>
+                <c:pt idx="26">
+                  <c:v>109.85</c:v>
+                </c:pt>
+                <c:pt idx="27">
+                  <c:v>110.88</c:v>
+                </c:pt>
+                <c:pt idx="28">
+                  <c:v>112.12</c:v>
+                </c:pt>
+                <c:pt idx="29">
+                  <c:v>113.42</c:v>
+                </c:pt>
+                <c:pt idx="30">
+                  <c:v>114.79</c:v>
+                </c:pt>
+                <c:pt idx="31">
+                  <c:v>115.92</c:v>
+                </c:pt>
+                <c:pt idx="32">
+                  <c:v>117.29</c:v>
+                </c:pt>
+                <c:pt idx="33">
+                  <c:v>118.44</c:v>
+                </c:pt>
+                <c:pt idx="34">
+                  <c:v>119.79</c:v>
+                </c:pt>
+                <c:pt idx="35">
+                  <c:v>121.04</c:v>
+                </c:pt>
+                <c:pt idx="36">
+                  <c:v>122.37</c:v>
+                </c:pt>
+                <c:pt idx="37">
+                  <c:v>123.62</c:v>
+                </c:pt>
+                <c:pt idx="38">
+                  <c:v>124.8</c:v>
+                </c:pt>
+                <c:pt idx="39">
+                  <c:v>126</c:v>
+                </c:pt>
+                <c:pt idx="40">
+                  <c:v>127.11</c:v>
+                </c:pt>
+                <c:pt idx="41">
+                  <c:v>128.23</c:v>
+                </c:pt>
+                <c:pt idx="42">
+                  <c:v>129.37</c:v>
+                </c:pt>
+                <c:pt idx="43">
+                  <c:v>130.24</c:v>
+                </c:pt>
+                <c:pt idx="44">
+                  <c:v>131.15</c:v>
+                </c:pt>
+                <c:pt idx="45">
+                  <c:v>132.01</c:v>
+                </c:pt>
+                <c:pt idx="46">
+                  <c:v>132.87</c:v>
+                </c:pt>
+                <c:pt idx="47">
+                  <c:v>133.64</c:v>
+                </c:pt>
+                <c:pt idx="48">
+                  <c:v>134.36</c:v>
+                </c:pt>
+                <c:pt idx="49">
+                  <c:v>135.09</c:v>
+                </c:pt>
+                <c:pt idx="50">
+                  <c:v>135.78</c:v>
+                </c:pt>
+                <c:pt idx="51">
+                  <c:v>136.46</c:v>
+                </c:pt>
+                <c:pt idx="52">
+                  <c:v>137.11</c:v>
+                </c:pt>
+                <c:pt idx="53">
+                  <c:v>137.78</c:v>
+                </c:pt>
+                <c:pt idx="54">
+                  <c:v>138.42</c:v>
+                </c:pt>
+                <c:pt idx="55">
+                  <c:v>139.07</c:v>
+                </c:pt>
+                <c:pt idx="56">
+                  <c:v>139.86</c:v>
+                </c:pt>
+                <c:pt idx="57">
+                  <c:v>140.64</c:v>
+                </c:pt>
+                <c:pt idx="58">
+                  <c:v>141.46</c:v>
+                </c:pt>
+                <c:pt idx="59">
+                  <c:v>142.28</c:v>
+                </c:pt>
+                <c:pt idx="60">
+                  <c:v>143.04</c:v>
+                </c:pt>
+                <c:pt idx="61">
+                  <c:v>143.85</c:v>
+                </c:pt>
+                <c:pt idx="62">
+                  <c:v>144.66</c:v>
+                </c:pt>
+                <c:pt idx="63">
+                  <c:v>145.52</c:v>
+                </c:pt>
+                <c:pt idx="64">
+                  <c:v>146.37</c:v>
+                </c:pt>
+                <c:pt idx="65">
+                  <c:v>147.23</c:v>
+                </c:pt>
+                <c:pt idx="66">
+                  <c:v>148.14</c:v>
+                </c:pt>
+                <c:pt idx="67">
+                  <c:v>148.99</c:v>
+                </c:pt>
+                <c:pt idx="68">
+                  <c:v>149.89</c:v>
+                </c:pt>
+                <c:pt idx="69">
+                  <c:v>150.79</c:v>
                 </c:pt>
               </c:numCache>
             </c:numRef>
@@ -489,38 +1209,218 @@
           </c:marker>
           <c:cat>
             <c:multiLvlStrRef>
-              <c:f>Sheet1!$A$2:$A$11</c:f>
+              <c:f>Sheet1!$A$2:$A$71</c:f>
               <c:multiLvlStrCache>
-                <c:ptCount val="10"/>
+                <c:ptCount val="70"/>
                 <c:lvl>
                   <c:pt idx="0">
+                    <c:v>Jul 2020</c:v>
+                  </c:pt>
+                  <c:pt idx="1">
+                    <c:v>Aug 2020</c:v>
+                  </c:pt>
+                  <c:pt idx="2">
+                    <c:v>Sep 2020</c:v>
+                  </c:pt>
+                  <c:pt idx="3">
+                    <c:v>Oct 2020</c:v>
+                  </c:pt>
+                  <c:pt idx="4">
+                    <c:v>Nov 2020</c:v>
+                  </c:pt>
+                  <c:pt idx="5">
+                    <c:v>Dec 2020</c:v>
+                  </c:pt>
+                  <c:pt idx="6">
+                    <c:v>Jan 2021</c:v>
+                  </c:pt>
+                  <c:pt idx="7">
+                    <c:v>Feb 2021</c:v>
+                  </c:pt>
+                  <c:pt idx="8">
+                    <c:v>Mar 2021</c:v>
+                  </c:pt>
+                  <c:pt idx="9">
+                    <c:v>Apr 2021</c:v>
+                  </c:pt>
+                  <c:pt idx="10">
+                    <c:v>May 2021</c:v>
+                  </c:pt>
+                  <c:pt idx="11">
+                    <c:v>Jun 2021</c:v>
+                  </c:pt>
+                  <c:pt idx="12">
+                    <c:v>Jul 2021</c:v>
+                  </c:pt>
+                  <c:pt idx="13">
+                    <c:v>Aug 2021</c:v>
+                  </c:pt>
+                  <c:pt idx="14">
+                    <c:v>Sep 2021</c:v>
+                  </c:pt>
+                  <c:pt idx="15">
+                    <c:v>Oct 2021</c:v>
+                  </c:pt>
+                  <c:pt idx="16">
+                    <c:v>Nov 2021</c:v>
+                  </c:pt>
+                  <c:pt idx="17">
+                    <c:v>Dec 2021</c:v>
+                  </c:pt>
+                  <c:pt idx="18">
+                    <c:v>Jan 2022</c:v>
+                  </c:pt>
+                  <c:pt idx="19">
+                    <c:v>Feb 2022</c:v>
+                  </c:pt>
+                  <c:pt idx="20">
+                    <c:v>Mar 2022</c:v>
+                  </c:pt>
+                  <c:pt idx="21">
+                    <c:v>Apr 2022</c:v>
+                  </c:pt>
+                  <c:pt idx="22">
+                    <c:v>May 2022</c:v>
+                  </c:pt>
+                  <c:pt idx="23">
+                    <c:v>Jun 2022</c:v>
+                  </c:pt>
+                  <c:pt idx="24">
+                    <c:v>Jul 2022</c:v>
+                  </c:pt>
+                  <c:pt idx="25">
+                    <c:v>Aug 2022</c:v>
+                  </c:pt>
+                  <c:pt idx="26">
+                    <c:v>Sep 2022</c:v>
+                  </c:pt>
+                  <c:pt idx="27">
+                    <c:v>Oct 2022</c:v>
+                  </c:pt>
+                  <c:pt idx="28">
+                    <c:v>Nov 2022</c:v>
+                  </c:pt>
+                  <c:pt idx="29">
+                    <c:v>Dec 2022</c:v>
+                  </c:pt>
+                  <c:pt idx="30">
+                    <c:v>Jan 2023</c:v>
+                  </c:pt>
+                  <c:pt idx="31">
+                    <c:v>Feb 2023</c:v>
+                  </c:pt>
+                  <c:pt idx="32">
+                    <c:v>Mar 2023</c:v>
+                  </c:pt>
+                  <c:pt idx="33">
+                    <c:v>Apr 2023</c:v>
+                  </c:pt>
+                  <c:pt idx="34">
+                    <c:v>May 2023</c:v>
+                  </c:pt>
+                  <c:pt idx="35">
+                    <c:v>Jun 2023</c:v>
+                  </c:pt>
+                  <c:pt idx="36">
+                    <c:v>Jul 2023</c:v>
+                  </c:pt>
+                  <c:pt idx="37">
+                    <c:v>Aug 2023</c:v>
+                  </c:pt>
+                  <c:pt idx="38">
+                    <c:v>Sep 2023</c:v>
+                  </c:pt>
+                  <c:pt idx="39">
+                    <c:v>Oct 2023</c:v>
+                  </c:pt>
+                  <c:pt idx="40">
+                    <c:v>Nov 2023</c:v>
+                  </c:pt>
+                  <c:pt idx="41">
+                    <c:v>Dec 2023</c:v>
+                  </c:pt>
+                  <c:pt idx="42">
+                    <c:v>Jan 2024</c:v>
+                  </c:pt>
+                  <c:pt idx="43">
+                    <c:v>Feb 2024</c:v>
+                  </c:pt>
+                  <c:pt idx="44">
+                    <c:v>Mar 2024</c:v>
+                  </c:pt>
+                  <c:pt idx="45">
+                    <c:v>Apr 2024</c:v>
+                  </c:pt>
+                  <c:pt idx="46">
+                    <c:v>May 2024</c:v>
+                  </c:pt>
+                  <c:pt idx="47">
+                    <c:v>Jun 2024</c:v>
+                  </c:pt>
+                  <c:pt idx="48">
+                    <c:v>Jul 2024</c:v>
+                  </c:pt>
+                  <c:pt idx="49">
+                    <c:v>Aug 2024</c:v>
+                  </c:pt>
+                  <c:pt idx="50">
+                    <c:v>Sep 2024</c:v>
+                  </c:pt>
+                  <c:pt idx="51">
+                    <c:v>Oct 2024</c:v>
+                  </c:pt>
+                  <c:pt idx="52">
+                    <c:v>Nov 2024</c:v>
+                  </c:pt>
+                  <c:pt idx="53">
+                    <c:v>Dec 2024</c:v>
+                  </c:pt>
+                  <c:pt idx="54">
+                    <c:v>Jan 2025</c:v>
+                  </c:pt>
+                  <c:pt idx="55">
+                    <c:v>Feb 2025</c:v>
+                  </c:pt>
+                  <c:pt idx="56">
+                    <c:v>Mar 2025</c:v>
+                  </c:pt>
+                  <c:pt idx="57">
+                    <c:v>Apr 2025</c:v>
+                  </c:pt>
+                  <c:pt idx="58">
+                    <c:v>May 2025</c:v>
+                  </c:pt>
+                  <c:pt idx="59">
+                    <c:v>Jun 2025</c:v>
+                  </c:pt>
+                  <c:pt idx="60">
                     <c:v>Jul 2025</c:v>
                   </c:pt>
-                  <c:pt idx="1">
+                  <c:pt idx="61">
                     <c:v>Aug 2025</c:v>
                   </c:pt>
-                  <c:pt idx="2">
+                  <c:pt idx="62">
                     <c:v>Sep 2025</c:v>
                   </c:pt>
-                  <c:pt idx="3">
+                  <c:pt idx="63">
                     <c:v>Oct 2025</c:v>
                   </c:pt>
-                  <c:pt idx="4">
+                  <c:pt idx="64">
                     <c:v>Nov 2025</c:v>
                   </c:pt>
-                  <c:pt idx="5">
+                  <c:pt idx="65">
                     <c:v>Dec 2025</c:v>
                   </c:pt>
-                  <c:pt idx="6">
+                  <c:pt idx="66">
                     <c:v>Jan 2026</c:v>
                   </c:pt>
-                  <c:pt idx="7">
+                  <c:pt idx="67">
                     <c:v>Feb 2026</c:v>
                   </c:pt>
-                  <c:pt idx="8">
+                  <c:pt idx="68">
                     <c:v>Mar 2026</c:v>
                   </c:pt>
-                  <c:pt idx="9">
+                  <c:pt idx="69">
                     <c:v>Apr 2026</c:v>
                   </c:pt>
                 </c:lvl>
@@ -529,39 +1429,219 @@
           </c:cat>
           <c:val>
             <c:numRef>
-              <c:f>Sheet1!$D$2:$D$11</c:f>
+              <c:f>Sheet1!$D$2:$D$71</c:f>
               <c:numCache>
                 <c:formatCode>General</c:formatCode>
-                <c:ptCount val="10"/>
+                <c:ptCount val="70"/>
                 <c:pt idx="0">
                   <c:v>100</c:v>
                 </c:pt>
                 <c:pt idx="1">
-                  <c:v>100.3</c:v>
+                  <c:v>100.02</c:v>
                 </c:pt>
                 <c:pt idx="2">
-                  <c:v>100.58</c:v>
+                  <c:v>100.03</c:v>
                 </c:pt>
                 <c:pt idx="3">
-                  <c:v>100.87</c:v>
+                  <c:v>100.03</c:v>
                 </c:pt>
                 <c:pt idx="4">
-                  <c:v>101.15</c:v>
+                  <c:v>100.04</c:v>
                 </c:pt>
                 <c:pt idx="5">
-                  <c:v>101.71</c:v>
+                  <c:v>100.05</c:v>
                 </c:pt>
                 <c:pt idx="6">
-                  <c:v>101.71</c:v>
+                  <c:v>100.05</c:v>
                 </c:pt>
                 <c:pt idx="7">
-                  <c:v>101.96</c:v>
+                  <c:v>100.06</c:v>
                 </c:pt>
                 <c:pt idx="8">
-                  <c:v>102.23</c:v>
+                  <c:v>100.06</c:v>
                 </c:pt>
                 <c:pt idx="9">
-                  <c:v>102.5</c:v>
+                  <c:v>100.07</c:v>
+                </c:pt>
+                <c:pt idx="10">
+                  <c:v>100.07</c:v>
+                </c:pt>
+                <c:pt idx="11">
+                  <c:v>100.08</c:v>
+                </c:pt>
+                <c:pt idx="12">
+                  <c:v>100.09</c:v>
+                </c:pt>
+                <c:pt idx="13">
+                  <c:v>100.09</c:v>
+                </c:pt>
+                <c:pt idx="14">
+                  <c:v>100.08</c:v>
+                </c:pt>
+                <c:pt idx="15">
+                  <c:v>100.18</c:v>
+                </c:pt>
+                <c:pt idx="16">
+                  <c:v>100.31</c:v>
+                </c:pt>
+                <c:pt idx="17">
+                  <c:v>100.49</c:v>
+                </c:pt>
+                <c:pt idx="18">
+                  <c:v>100.75</c:v>
+                </c:pt>
+                <c:pt idx="19">
+                  <c:v>101.08</c:v>
+                </c:pt>
+                <c:pt idx="20">
+                  <c:v>101.47</c:v>
+                </c:pt>
+                <c:pt idx="21">
+                  <c:v>101.93</c:v>
+                </c:pt>
+                <c:pt idx="22">
+                  <c:v>102.49</c:v>
+                </c:pt>
+                <c:pt idx="23">
+                  <c:v>103.09</c:v>
+                </c:pt>
+                <c:pt idx="24">
+                  <c:v>103.77</c:v>
+                </c:pt>
+                <c:pt idx="25">
+                  <c:v>104.5</c:v>
+                </c:pt>
+                <c:pt idx="26">
+                  <c:v>105.26</c:v>
+                </c:pt>
+                <c:pt idx="27">
+                  <c:v>106.02</c:v>
+                </c:pt>
+                <c:pt idx="28">
+                  <c:v>106.95</c:v>
+                </c:pt>
+                <c:pt idx="29">
+                  <c:v>107.8</c:v>
+                </c:pt>
+                <c:pt idx="30">
+                  <c:v>108.71</c:v>
+                </c:pt>
+                <c:pt idx="31">
+                  <c:v>109.51</c:v>
+                </c:pt>
+                <c:pt idx="32">
+                  <c:v>110.41</c:v>
+                </c:pt>
+                <c:pt idx="33">
+                  <c:v>111.23</c:v>
+                </c:pt>
+                <c:pt idx="34">
+                  <c:v>112.22</c:v>
+                </c:pt>
+                <c:pt idx="35">
+                  <c:v>113.11</c:v>
+                </c:pt>
+                <c:pt idx="36">
+                  <c:v>114.04</c:v>
+                </c:pt>
+                <c:pt idx="37">
+                  <c:v>114.91</c:v>
+                </c:pt>
+                <c:pt idx="38">
+                  <c:v>115.69</c:v>
+                </c:pt>
+                <c:pt idx="39">
+                  <c:v>116.46</c:v>
+                </c:pt>
+                <c:pt idx="40">
+                  <c:v>117.18</c:v>
+                </c:pt>
+                <c:pt idx="41">
+                  <c:v>117.89</c:v>
+                </c:pt>
+                <c:pt idx="42">
+                  <c:v>118.59</c:v>
+                </c:pt>
+                <c:pt idx="43">
+                  <c:v>119.19</c:v>
+                </c:pt>
+                <c:pt idx="44">
+                  <c:v>119.72</c:v>
+                </c:pt>
+                <c:pt idx="45">
+                  <c:v>120.28</c:v>
+                </c:pt>
+                <c:pt idx="46">
+                  <c:v>120.79</c:v>
+                </c:pt>
+                <c:pt idx="47">
+                  <c:v>121.23</c:v>
+                </c:pt>
+                <c:pt idx="48">
+                  <c:v>121.67</c:v>
+                </c:pt>
+                <c:pt idx="49">
+                  <c:v>122.11</c:v>
+                </c:pt>
+                <c:pt idx="50">
+                  <c:v>122.52</c:v>
+                </c:pt>
+                <c:pt idx="51">
+                  <c:v>122.94</c:v>
+                </c:pt>
+                <c:pt idx="52">
+                  <c:v>123.34</c:v>
+                </c:pt>
+                <c:pt idx="53">
+                  <c:v>123.73</c:v>
+                </c:pt>
+                <c:pt idx="54">
+                  <c:v>124.11</c:v>
+                </c:pt>
+                <c:pt idx="55">
+                  <c:v>124.45</c:v>
+                </c:pt>
+                <c:pt idx="56">
+                  <c:v>124.83</c:v>
+                </c:pt>
+                <c:pt idx="57">
+                  <c:v>125.2</c:v>
+                </c:pt>
+                <c:pt idx="58">
+                  <c:v>125.59</c:v>
+                </c:pt>
+                <c:pt idx="59">
+                  <c:v>125.97</c:v>
+                </c:pt>
+                <c:pt idx="60">
+                  <c:v>126.35</c:v>
+                </c:pt>
+                <c:pt idx="61">
+                  <c:v>126.72</c:v>
+                </c:pt>
+                <c:pt idx="62">
+                  <c:v>127.07</c:v>
+                </c:pt>
+                <c:pt idx="63">
+                  <c:v>127.43</c:v>
+                </c:pt>
+                <c:pt idx="64">
+                  <c:v>127.79</c:v>
+                </c:pt>
+                <c:pt idx="65">
+                  <c:v>128.15</c:v>
+                </c:pt>
+                <c:pt idx="66">
+                  <c:v>128.5</c:v>
+                </c:pt>
+                <c:pt idx="67">
+                  <c:v>128.81</c:v>
+                </c:pt>
+                <c:pt idx="68">
+                  <c:v>129.16</c:v>
+                </c:pt>
+                <c:pt idx="69">
+                  <c:v>129.49</c:v>
                 </c:pt>
               </c:numCache>
             </c:numRef>
@@ -637,7 +1717,7 @@
         <c:auto val="1"/>
         <c:lblAlgn val="ctr"/>
         <c:noMultiLvlLbl val="1"/>
-        <c:tickLblSkip val="1"/>
+        <c:tickLblSkip val="7"/>
       </c:catAx>
       <c:valAx>
         <c:axId val="2094734552"/>
@@ -3113,7 +4193,7 @@
                 <a:ea typeface="Calibri" pitchFamily="34" charset="-122"/>
                 <a:cs typeface="Calibri" pitchFamily="34" charset="-120"/>
               </a:rPr>
-              <a:t>prueba 13 CLP</a:t>
+              <a:t>prueba CLP</a:t>
             </a:r>
             <a:endParaRPr lang="en-US" sz="800" dirty="0"/>
           </a:p>
@@ -3783,7 +4863,7 @@
                           <a:ea typeface="Calibri" pitchFamily="34" charset="-122"/>
                           <a:cs typeface="Calibri" pitchFamily="34" charset="-120"/>
                         </a:rPr>
-                        <a:t>0.37%</a:t>
+                        <a:t>0.38%</a:t>
                       </a:r>
                       <a:endParaRPr lang="en-US" sz="750" dirty="0">
                         <a:latin typeface="Calibri" charset="0"/>
@@ -3919,7 +4999,7 @@
                           <a:ea typeface="Calibri" pitchFamily="34" charset="-122"/>
                           <a:cs typeface="Calibri" pitchFamily="34" charset="-120"/>
                         </a:rPr>
-                        <a:t>2.30%</a:t>
+                        <a:t>2.33%</a:t>
                       </a:r>
                       <a:endParaRPr lang="en-US" sz="750" dirty="0">
                         <a:latin typeface="Calibri" charset="0"/>
@@ -3987,7 +5067,7 @@
                           <a:ea typeface="Calibri" pitchFamily="34" charset="-122"/>
                           <a:cs typeface="Calibri" pitchFamily="34" charset="-120"/>
                         </a:rPr>
-                        <a:t>4.82%</a:t>
+                        <a:t>4.90%</a:t>
                       </a:r>
                       <a:endParaRPr lang="en-US" sz="750" dirty="0">
                         <a:latin typeface="Calibri" charset="0"/>
@@ -4603,7 +5683,7 @@
                           <a:ea typeface="Calibri" pitchFamily="34" charset="-122"/>
                           <a:cs typeface="Calibri" pitchFamily="34" charset="-120"/>
                         </a:rPr>
-                        <a:t>0.61%</a:t>
+                        <a:t>0.60%</a:t>
                       </a:r>
                       <a:endParaRPr lang="en-US" sz="750" dirty="0">
                         <a:latin typeface="Calibri" charset="0"/>
@@ -4671,7 +5751,7 @@
                           <a:ea typeface="Calibri" pitchFamily="34" charset="-122"/>
                           <a:cs typeface="Calibri" pitchFamily="34" charset="-120"/>
                         </a:rPr>
-                        <a:t>1.81%</a:t>
+                        <a:t>1.79%</a:t>
                       </a:r>
                       <a:endParaRPr lang="en-US" sz="750" dirty="0">
                         <a:latin typeface="Calibri" charset="0"/>
@@ -4739,7 +5819,7 @@
                           <a:ea typeface="Calibri" pitchFamily="34" charset="-122"/>
                           <a:cs typeface="Calibri" pitchFamily="34" charset="-120"/>
                         </a:rPr>
-                        <a:t>3.65%</a:t>
+                        <a:t>3.63%</a:t>
                       </a:r>
                       <a:endParaRPr lang="en-US" sz="750" dirty="0">
                         <a:latin typeface="Calibri" charset="0"/>
@@ -4807,7 +5887,7 @@
                           <a:ea typeface="Calibri" pitchFamily="34" charset="-122"/>
                           <a:cs typeface="Calibri" pitchFamily="34" charset="-120"/>
                         </a:rPr>
-                        <a:t>—</a:t>
+                        <a:t>7.22%</a:t>
                       </a:r>
                       <a:endParaRPr lang="en-US" sz="750" dirty="0">
                         <a:latin typeface="Calibri" charset="0"/>
@@ -4875,7 +5955,7 @@
                           <a:ea typeface="Calibri" pitchFamily="34" charset="-122"/>
                           <a:cs typeface="Calibri" pitchFamily="34" charset="-120"/>
                         </a:rPr>
-                        <a:t>5.42%</a:t>
+                        <a:t>5.38%</a:t>
                       </a:r>
                       <a:endParaRPr lang="en-US" sz="750" dirty="0">
                         <a:latin typeface="Calibri" charset="0"/>
@@ -5017,20 +6097,20 @@
               <a:tblPr/>
               <a:tblGrid>
                 <a:gridCol w="201168"/>
-                <a:gridCol w="822960"/>
-                <a:gridCol w="246888"/>
-                <a:gridCol w="246888"/>
-                <a:gridCol w="246888"/>
-                <a:gridCol w="246888"/>
-                <a:gridCol w="246888"/>
-                <a:gridCol w="246888"/>
-                <a:gridCol w="246888"/>
-                <a:gridCol w="246888"/>
-                <a:gridCol w="246888"/>
-                <a:gridCol w="246888"/>
-                <a:gridCol w="246888"/>
-                <a:gridCol w="246888"/>
-                <a:gridCol w="283464"/>
+                <a:gridCol w="804672"/>
+                <a:gridCol w="292608"/>
+                <a:gridCol w="292608"/>
+                <a:gridCol w="292608"/>
+                <a:gridCol w="292608"/>
+                <a:gridCol w="292608"/>
+                <a:gridCol w="292608"/>
+                <a:gridCol w="292608"/>
+                <a:gridCol w="292608"/>
+                <a:gridCol w="292608"/>
+                <a:gridCol w="292608"/>
+                <a:gridCol w="292608"/>
+                <a:gridCol w="292608"/>
+                <a:gridCol w="301752"/>
               </a:tblGrid>
               <a:tr h="123444">
                 <a:tc>
@@ -6178,7 +7258,7 @@
                           <a:ea typeface="Calibri" pitchFamily="34" charset="-122"/>
                           <a:cs typeface="Calibri" pitchFamily="34" charset="-120"/>
                         </a:rPr>
-                        <a:t>0.15%</a:t>
+                        <a:t>0.17%</a:t>
                       </a:r>
                       <a:endParaRPr lang="en-US" sz="500" dirty="0">
                         <a:latin typeface="Calibri" charset="0"/>
@@ -6243,7 +7323,7 @@
                           <a:ea typeface="Calibri" pitchFamily="34" charset="-122"/>
                           <a:cs typeface="Calibri" pitchFamily="34" charset="-120"/>
                         </a:rPr>
-                        <a:t>0.15%</a:t>
+                        <a:t>0.14%</a:t>
                       </a:r>
                       <a:endParaRPr lang="en-US" sz="500" dirty="0">
                         <a:latin typeface="Calibri" charset="0"/>
@@ -6373,6 +7453,71 @@
                           <a:ea typeface="Calibri" pitchFamily="34" charset="-122"/>
                           <a:cs typeface="Calibri" pitchFamily="34" charset="-120"/>
                         </a:rPr>
+                        <a:t>0.05%</a:t>
+                      </a:r>
+                      <a:endParaRPr lang="en-US" sz="500" dirty="0">
+                        <a:latin typeface="Calibri" charset="0"/>
+                        <a:ea typeface="Calibri" charset="0"/>
+                        <a:cs typeface="Calibri" charset="0"/>
+                      </a:endParaRPr>
+                    </a:p>
+                  </a:txBody>
+                  <a:tcPr marL="91440" marR="91440" marT="45720" marB="45720">
+                    <a:lnL w="2540" cap="flat" cmpd="sng" algn="ctr">
+                      <a:solidFill>
+                        <a:srgbClr val="EEEEEE"/>
+                      </a:solidFill>
+                      <a:prstDash val="solid"/>
+                      <a:round/>
+                      <a:headEnd type="none" w="med" len="med"/>
+                      <a:tailEnd type="none" w="med" len="med"/>
+                    </a:lnL>
+                    <a:lnR w="2540" cap="flat" cmpd="sng" algn="ctr">
+                      <a:solidFill>
+                        <a:srgbClr val="EEEEEE"/>
+                      </a:solidFill>
+                      <a:prstDash val="solid"/>
+                      <a:round/>
+                      <a:headEnd type="none" w="med" len="med"/>
+                      <a:tailEnd type="none" w="med" len="med"/>
+                    </a:lnR>
+                    <a:lnT w="2540" cap="flat" cmpd="sng" algn="ctr">
+                      <a:solidFill>
+                        <a:srgbClr val="EEEEEE"/>
+                      </a:solidFill>
+                      <a:prstDash val="solid"/>
+                      <a:round/>
+                      <a:headEnd type="none" w="med" len="med"/>
+                      <a:tailEnd type="none" w="med" len="med"/>
+                    </a:lnT>
+                    <a:lnB w="2540" cap="flat" cmpd="sng" algn="ctr">
+                      <a:solidFill>
+                        <a:srgbClr val="EEEEEE"/>
+                      </a:solidFill>
+                      <a:prstDash val="solid"/>
+                      <a:round/>
+                      <a:headEnd type="none" w="med" len="med"/>
+                      <a:tailEnd type="none" w="med" len="med"/>
+                    </a:lnB>
+                  </a:tcPr>
+                </a:tc>
+                <a:tc>
+                  <a:txBody>
+                    <a:bodyPr/>
+                    <a:lstStyle/>
+                    <a:p>
+                      <a:pPr algn="ctr" indent="0" marL="0">
+                        <a:buNone/>
+                      </a:pPr>
+                      <a:r>
+                        <a:rPr lang="en-US" sz="500" dirty="0">
+                          <a:solidFill>
+                            <a:srgbClr val="777777"/>
+                          </a:solidFill>
+                          <a:latin typeface="Calibri" pitchFamily="34" charset="0"/>
+                          <a:ea typeface="Calibri" pitchFamily="34" charset="-122"/>
+                          <a:cs typeface="Calibri" pitchFamily="34" charset="-120"/>
+                        </a:rPr>
                         <a:t>0.04%</a:t>
                       </a:r>
                       <a:endParaRPr lang="en-US" sz="500" dirty="0">
@@ -6503,6 +7648,71 @@
                           <a:ea typeface="Calibri" pitchFamily="34" charset="-122"/>
                           <a:cs typeface="Calibri" pitchFamily="34" charset="-120"/>
                         </a:rPr>
+                        <a:t>0.05%</a:t>
+                      </a:r>
+                      <a:endParaRPr lang="en-US" sz="500" dirty="0">
+                        <a:latin typeface="Calibri" charset="0"/>
+                        <a:ea typeface="Calibri" charset="0"/>
+                        <a:cs typeface="Calibri" charset="0"/>
+                      </a:endParaRPr>
+                    </a:p>
+                  </a:txBody>
+                  <a:tcPr marL="91440" marR="91440" marT="45720" marB="45720">
+                    <a:lnL w="2540" cap="flat" cmpd="sng" algn="ctr">
+                      <a:solidFill>
+                        <a:srgbClr val="EEEEEE"/>
+                      </a:solidFill>
+                      <a:prstDash val="solid"/>
+                      <a:round/>
+                      <a:headEnd type="none" w="med" len="med"/>
+                      <a:tailEnd type="none" w="med" len="med"/>
+                    </a:lnL>
+                    <a:lnR w="2540" cap="flat" cmpd="sng" algn="ctr">
+                      <a:solidFill>
+                        <a:srgbClr val="EEEEEE"/>
+                      </a:solidFill>
+                      <a:prstDash val="solid"/>
+                      <a:round/>
+                      <a:headEnd type="none" w="med" len="med"/>
+                      <a:tailEnd type="none" w="med" len="med"/>
+                    </a:lnR>
+                    <a:lnT w="2540" cap="flat" cmpd="sng" algn="ctr">
+                      <a:solidFill>
+                        <a:srgbClr val="EEEEEE"/>
+                      </a:solidFill>
+                      <a:prstDash val="solid"/>
+                      <a:round/>
+                      <a:headEnd type="none" w="med" len="med"/>
+                      <a:tailEnd type="none" w="med" len="med"/>
+                    </a:lnT>
+                    <a:lnB w="2540" cap="flat" cmpd="sng" algn="ctr">
+                      <a:solidFill>
+                        <a:srgbClr val="EEEEEE"/>
+                      </a:solidFill>
+                      <a:prstDash val="solid"/>
+                      <a:round/>
+                      <a:headEnd type="none" w="med" len="med"/>
+                      <a:tailEnd type="none" w="med" len="med"/>
+                    </a:lnB>
+                  </a:tcPr>
+                </a:tc>
+                <a:tc>
+                  <a:txBody>
+                    <a:bodyPr/>
+                    <a:lstStyle/>
+                    <a:p>
+                      <a:pPr algn="ctr" indent="0" marL="0">
+                        <a:buNone/>
+                      </a:pPr>
+                      <a:r>
+                        <a:rPr lang="en-US" sz="500" dirty="0">
+                          <a:solidFill>
+                            <a:srgbClr val="777777"/>
+                          </a:solidFill>
+                          <a:latin typeface="Calibri" pitchFamily="34" charset="0"/>
+                          <a:ea typeface="Calibri" pitchFamily="34" charset="-122"/>
+                          <a:cs typeface="Calibri" pitchFamily="34" charset="-120"/>
+                        </a:rPr>
                         <a:t>0.04%</a:t>
                       </a:r>
                       <a:endParaRPr lang="en-US" sz="500" dirty="0">
@@ -6698,6 +7908,71 @@
                           <a:ea typeface="Calibri" pitchFamily="34" charset="-122"/>
                           <a:cs typeface="Calibri" pitchFamily="34" charset="-120"/>
                         </a:rPr>
+                        <a:t>0.03%</a:t>
+                      </a:r>
+                      <a:endParaRPr lang="en-US" sz="500" dirty="0">
+                        <a:latin typeface="Calibri" charset="0"/>
+                        <a:ea typeface="Calibri" charset="0"/>
+                        <a:cs typeface="Calibri" charset="0"/>
+                      </a:endParaRPr>
+                    </a:p>
+                  </a:txBody>
+                  <a:tcPr marL="91440" marR="91440" marT="45720" marB="45720">
+                    <a:lnL w="2540" cap="flat" cmpd="sng" algn="ctr">
+                      <a:solidFill>
+                        <a:srgbClr val="EEEEEE"/>
+                      </a:solidFill>
+                      <a:prstDash val="solid"/>
+                      <a:round/>
+                      <a:headEnd type="none" w="med" len="med"/>
+                      <a:tailEnd type="none" w="med" len="med"/>
+                    </a:lnL>
+                    <a:lnR w="2540" cap="flat" cmpd="sng" algn="ctr">
+                      <a:solidFill>
+                        <a:srgbClr val="EEEEEE"/>
+                      </a:solidFill>
+                      <a:prstDash val="solid"/>
+                      <a:round/>
+                      <a:headEnd type="none" w="med" len="med"/>
+                      <a:tailEnd type="none" w="med" len="med"/>
+                    </a:lnR>
+                    <a:lnT w="2540" cap="flat" cmpd="sng" algn="ctr">
+                      <a:solidFill>
+                        <a:srgbClr val="EEEEEE"/>
+                      </a:solidFill>
+                      <a:prstDash val="solid"/>
+                      <a:round/>
+                      <a:headEnd type="none" w="med" len="med"/>
+                      <a:tailEnd type="none" w="med" len="med"/>
+                    </a:lnT>
+                    <a:lnB w="2540" cap="flat" cmpd="sng" algn="ctr">
+                      <a:solidFill>
+                        <a:srgbClr val="EEEEEE"/>
+                      </a:solidFill>
+                      <a:prstDash val="solid"/>
+                      <a:round/>
+                      <a:headEnd type="none" w="med" len="med"/>
+                      <a:tailEnd type="none" w="med" len="med"/>
+                    </a:lnB>
+                  </a:tcPr>
+                </a:tc>
+                <a:tc>
+                  <a:txBody>
+                    <a:bodyPr/>
+                    <a:lstStyle/>
+                    <a:p>
+                      <a:pPr algn="ctr" indent="0" marL="0">
+                        <a:buNone/>
+                      </a:pPr>
+                      <a:r>
+                        <a:rPr lang="en-US" sz="500" dirty="0">
+                          <a:solidFill>
+                            <a:srgbClr val="777777"/>
+                          </a:solidFill>
+                          <a:latin typeface="Calibri" pitchFamily="34" charset="0"/>
+                          <a:ea typeface="Calibri" pitchFamily="34" charset="-122"/>
+                          <a:cs typeface="Calibri" pitchFamily="34" charset="-120"/>
+                        </a:rPr>
                         <a:t>0.04%</a:t>
                       </a:r>
                       <a:endParaRPr lang="en-US" sz="500" dirty="0">
@@ -6755,7 +8030,7 @@
                         <a:buNone/>
                       </a:pPr>
                       <a:r>
-                        <a:rPr lang="en-US" sz="500" dirty="0">
+                        <a:rPr lang="en-US" sz="500" b="1" dirty="0">
                           <a:solidFill>
                             <a:srgbClr val="777777"/>
                           </a:solidFill>
@@ -6763,202 +8038,7 @@
                           <a:ea typeface="Calibri" pitchFamily="34" charset="-122"/>
                           <a:cs typeface="Calibri" pitchFamily="34" charset="-120"/>
                         </a:rPr>
-                        <a:t>0.04%</a:t>
-                      </a:r>
-                      <a:endParaRPr lang="en-US" sz="500" dirty="0">
-                        <a:latin typeface="Calibri" charset="0"/>
-                        <a:ea typeface="Calibri" charset="0"/>
-                        <a:cs typeface="Calibri" charset="0"/>
-                      </a:endParaRPr>
-                    </a:p>
-                  </a:txBody>
-                  <a:tcPr marL="91440" marR="91440" marT="45720" marB="45720">
-                    <a:lnL w="2540" cap="flat" cmpd="sng" algn="ctr">
-                      <a:solidFill>
-                        <a:srgbClr val="EEEEEE"/>
-                      </a:solidFill>
-                      <a:prstDash val="solid"/>
-                      <a:round/>
-                      <a:headEnd type="none" w="med" len="med"/>
-                      <a:tailEnd type="none" w="med" len="med"/>
-                    </a:lnL>
-                    <a:lnR w="2540" cap="flat" cmpd="sng" algn="ctr">
-                      <a:solidFill>
-                        <a:srgbClr val="EEEEEE"/>
-                      </a:solidFill>
-                      <a:prstDash val="solid"/>
-                      <a:round/>
-                      <a:headEnd type="none" w="med" len="med"/>
-                      <a:tailEnd type="none" w="med" len="med"/>
-                    </a:lnR>
-                    <a:lnT w="2540" cap="flat" cmpd="sng" algn="ctr">
-                      <a:solidFill>
-                        <a:srgbClr val="EEEEEE"/>
-                      </a:solidFill>
-                      <a:prstDash val="solid"/>
-                      <a:round/>
-                      <a:headEnd type="none" w="med" len="med"/>
-                      <a:tailEnd type="none" w="med" len="med"/>
-                    </a:lnT>
-                    <a:lnB w="2540" cap="flat" cmpd="sng" algn="ctr">
-                      <a:solidFill>
-                        <a:srgbClr val="EEEEEE"/>
-                      </a:solidFill>
-                      <a:prstDash val="solid"/>
-                      <a:round/>
-                      <a:headEnd type="none" w="med" len="med"/>
-                      <a:tailEnd type="none" w="med" len="med"/>
-                    </a:lnB>
-                  </a:tcPr>
-                </a:tc>
-                <a:tc>
-                  <a:txBody>
-                    <a:bodyPr/>
-                    <a:lstStyle/>
-                    <a:p>
-                      <a:pPr algn="ctr" indent="0" marL="0">
-                        <a:buNone/>
-                      </a:pPr>
-                      <a:r>
-                        <a:rPr lang="en-US" sz="500" dirty="0">
-                          <a:solidFill>
-                            <a:srgbClr val="777777"/>
-                          </a:solidFill>
-                          <a:latin typeface="Calibri" pitchFamily="34" charset="0"/>
-                          <a:ea typeface="Calibri" pitchFamily="34" charset="-122"/>
-                          <a:cs typeface="Calibri" pitchFamily="34" charset="-120"/>
-                        </a:rPr>
-                        <a:t>0.04%</a:t>
-                      </a:r>
-                      <a:endParaRPr lang="en-US" sz="500" dirty="0">
-                        <a:latin typeface="Calibri" charset="0"/>
-                        <a:ea typeface="Calibri" charset="0"/>
-                        <a:cs typeface="Calibri" charset="0"/>
-                      </a:endParaRPr>
-                    </a:p>
-                  </a:txBody>
-                  <a:tcPr marL="91440" marR="91440" marT="45720" marB="45720">
-                    <a:lnL w="2540" cap="flat" cmpd="sng" algn="ctr">
-                      <a:solidFill>
-                        <a:srgbClr val="EEEEEE"/>
-                      </a:solidFill>
-                      <a:prstDash val="solid"/>
-                      <a:round/>
-                      <a:headEnd type="none" w="med" len="med"/>
-                      <a:tailEnd type="none" w="med" len="med"/>
-                    </a:lnL>
-                    <a:lnR w="2540" cap="flat" cmpd="sng" algn="ctr">
-                      <a:solidFill>
-                        <a:srgbClr val="EEEEEE"/>
-                      </a:solidFill>
-                      <a:prstDash val="solid"/>
-                      <a:round/>
-                      <a:headEnd type="none" w="med" len="med"/>
-                      <a:tailEnd type="none" w="med" len="med"/>
-                    </a:lnR>
-                    <a:lnT w="2540" cap="flat" cmpd="sng" algn="ctr">
-                      <a:solidFill>
-                        <a:srgbClr val="EEEEEE"/>
-                      </a:solidFill>
-                      <a:prstDash val="solid"/>
-                      <a:round/>
-                      <a:headEnd type="none" w="med" len="med"/>
-                      <a:tailEnd type="none" w="med" len="med"/>
-                    </a:lnT>
-                    <a:lnB w="2540" cap="flat" cmpd="sng" algn="ctr">
-                      <a:solidFill>
-                        <a:srgbClr val="EEEEEE"/>
-                      </a:solidFill>
-                      <a:prstDash val="solid"/>
-                      <a:round/>
-                      <a:headEnd type="none" w="med" len="med"/>
-                      <a:tailEnd type="none" w="med" len="med"/>
-                    </a:lnB>
-                  </a:tcPr>
-                </a:tc>
-                <a:tc>
-                  <a:txBody>
-                    <a:bodyPr/>
-                    <a:lstStyle/>
-                    <a:p>
-                      <a:pPr algn="ctr" indent="0" marL="0">
-                        <a:buNone/>
-                      </a:pPr>
-                      <a:r>
-                        <a:rPr lang="en-US" sz="500" dirty="0">
-                          <a:solidFill>
-                            <a:srgbClr val="777777"/>
-                          </a:solidFill>
-                          <a:latin typeface="Calibri" pitchFamily="34" charset="0"/>
-                          <a:ea typeface="Calibri" pitchFamily="34" charset="-122"/>
-                          <a:cs typeface="Calibri" pitchFamily="34" charset="-120"/>
-                        </a:rPr>
-                        <a:t>0.04%</a:t>
-                      </a:r>
-                      <a:endParaRPr lang="en-US" sz="500" dirty="0">
-                        <a:latin typeface="Calibri" charset="0"/>
-                        <a:ea typeface="Calibri" charset="0"/>
-                        <a:cs typeface="Calibri" charset="0"/>
-                      </a:endParaRPr>
-                    </a:p>
-                  </a:txBody>
-                  <a:tcPr marL="91440" marR="91440" marT="45720" marB="45720">
-                    <a:lnL w="2540" cap="flat" cmpd="sng" algn="ctr">
-                      <a:solidFill>
-                        <a:srgbClr val="EEEEEE"/>
-                      </a:solidFill>
-                      <a:prstDash val="solid"/>
-                      <a:round/>
-                      <a:headEnd type="none" w="med" len="med"/>
-                      <a:tailEnd type="none" w="med" len="med"/>
-                    </a:lnL>
-                    <a:lnR w="2540" cap="flat" cmpd="sng" algn="ctr">
-                      <a:solidFill>
-                        <a:srgbClr val="EEEEEE"/>
-                      </a:solidFill>
-                      <a:prstDash val="solid"/>
-                      <a:round/>
-                      <a:headEnd type="none" w="med" len="med"/>
-                      <a:tailEnd type="none" w="med" len="med"/>
-                    </a:lnR>
-                    <a:lnT w="2540" cap="flat" cmpd="sng" algn="ctr">
-                      <a:solidFill>
-                        <a:srgbClr val="EEEEEE"/>
-                      </a:solidFill>
-                      <a:prstDash val="solid"/>
-                      <a:round/>
-                      <a:headEnd type="none" w="med" len="med"/>
-                      <a:tailEnd type="none" w="med" len="med"/>
-                    </a:lnT>
-                    <a:lnB w="2540" cap="flat" cmpd="sng" algn="ctr">
-                      <a:solidFill>
-                        <a:srgbClr val="EEEEEE"/>
-                      </a:solidFill>
-                      <a:prstDash val="solid"/>
-                      <a:round/>
-                      <a:headEnd type="none" w="med" len="med"/>
-                      <a:tailEnd type="none" w="med" len="med"/>
-                    </a:lnB>
-                  </a:tcPr>
-                </a:tc>
-                <a:tc>
-                  <a:txBody>
-                    <a:bodyPr/>
-                    <a:lstStyle/>
-                    <a:p>
-                      <a:pPr algn="ctr" indent="0" marL="0">
-                        <a:buNone/>
-                      </a:pPr>
-                      <a:r>
-                        <a:rPr lang="en-US" sz="500" b="1" dirty="0">
-                          <a:solidFill>
-                            <a:srgbClr val="777777"/>
-                          </a:solidFill>
-                          <a:latin typeface="Calibri" pitchFamily="34" charset="0"/>
-                          <a:ea typeface="Calibri" pitchFamily="34" charset="-122"/>
-                          <a:cs typeface="Calibri" pitchFamily="34" charset="-120"/>
-                        </a:rPr>
-                        <a:t>0.78%</a:t>
+                        <a:t>0.89%</a:t>
                       </a:r>
                       <a:endParaRPr lang="en-US" sz="500" dirty="0">
                         <a:latin typeface="Calibri" charset="0"/>
@@ -7144,7 +8224,7 @@
                           <a:ea typeface="Calibri" pitchFamily="34" charset="-122"/>
                           <a:cs typeface="Calibri" pitchFamily="34" charset="-120"/>
                         </a:rPr>
-                        <a:t>0.00%</a:t>
+                        <a:t>0.16%</a:t>
                       </a:r>
                       <a:endParaRPr lang="en-US" sz="500" dirty="0">
                         <a:latin typeface="Calibri" charset="0"/>
@@ -7859,7 +8939,7 @@
                           <a:ea typeface="Calibri" pitchFamily="34" charset="-122"/>
                           <a:cs typeface="Calibri" pitchFamily="34" charset="-120"/>
                         </a:rPr>
-                        <a:t>0.89%</a:t>
+                        <a:t>0.02%</a:t>
                       </a:r>
                       <a:endParaRPr lang="en-US" sz="500" dirty="0">
                         <a:latin typeface="Calibri" charset="0"/>
@@ -7924,7 +9004,7 @@
                           <a:ea typeface="Calibri" pitchFamily="34" charset="-122"/>
                           <a:cs typeface="Calibri" pitchFamily="34" charset="-120"/>
                         </a:rPr>
-                        <a:t>1.64%</a:t>
+                        <a:t>0.50%</a:t>
                       </a:r>
                       <a:endParaRPr lang="en-US" sz="500" dirty="0">
                         <a:latin typeface="Calibri" charset="0"/>
@@ -8813,7 +9893,7 @@
                           <a:ea typeface="Calibri" pitchFamily="34" charset="-122"/>
                           <a:cs typeface="Calibri" pitchFamily="34" charset="-120"/>
                         </a:rPr>
-                        <a:t>0.83%</a:t>
+                        <a:t>2.00%</a:t>
                       </a:r>
                       <a:endParaRPr lang="en-US" sz="500" dirty="0">
                         <a:latin typeface="Calibri" charset="0"/>
@@ -9010,7 +10090,7 @@
                           <a:ea typeface="Calibri" pitchFamily="34" charset="-122"/>
                           <a:cs typeface="Calibri" pitchFamily="34" charset="-120"/>
                         </a:rPr>
-                        <a:t>0.04%</a:t>
+                        <a:t>0.03%</a:t>
                       </a:r>
                       <a:endParaRPr lang="en-US" sz="500" dirty="0">
                         <a:latin typeface="Calibri" charset="0"/>
@@ -9075,7 +10155,7 @@
                           <a:ea typeface="Calibri" pitchFamily="34" charset="-122"/>
                           <a:cs typeface="Calibri" pitchFamily="34" charset="-120"/>
                         </a:rPr>
-                        <a:t>0.04%</a:t>
+                        <a:t>0.02%</a:t>
                       </a:r>
                       <a:endParaRPr lang="en-US" sz="500" dirty="0">
                         <a:latin typeface="Calibri" charset="0"/>
@@ -9140,7 +10220,7 @@
                           <a:ea typeface="Calibri" pitchFamily="34" charset="-122"/>
                           <a:cs typeface="Calibri" pitchFamily="34" charset="-120"/>
                         </a:rPr>
-                        <a:t>0.04%</a:t>
+                        <a:t>0.03%</a:t>
                       </a:r>
                       <a:endParaRPr lang="en-US" sz="500" dirty="0">
                         <a:latin typeface="Calibri" charset="0"/>
@@ -9205,7 +10285,7 @@
                           <a:ea typeface="Calibri" pitchFamily="34" charset="-122"/>
                           <a:cs typeface="Calibri" pitchFamily="34" charset="-120"/>
                         </a:rPr>
-                        <a:t>0.04%</a:t>
+                        <a:t>0.03%</a:t>
                       </a:r>
                       <a:endParaRPr lang="en-US" sz="500" dirty="0">
                         <a:latin typeface="Calibri" charset="0"/>
@@ -9270,7 +10350,7 @@
                           <a:ea typeface="Calibri" pitchFamily="34" charset="-122"/>
                           <a:cs typeface="Calibri" pitchFamily="34" charset="-120"/>
                         </a:rPr>
-                        <a:t>0.04%</a:t>
+                        <a:t>0.02%</a:t>
                       </a:r>
                       <a:endParaRPr lang="en-US" sz="500" dirty="0">
                         <a:latin typeface="Calibri" charset="0"/>
@@ -9335,7 +10415,7 @@
                           <a:ea typeface="Calibri" pitchFamily="34" charset="-122"/>
                           <a:cs typeface="Calibri" pitchFamily="34" charset="-120"/>
                         </a:rPr>
-                        <a:t>0.04%</a:t>
+                        <a:t>0.03%</a:t>
                       </a:r>
                       <a:endParaRPr lang="en-US" sz="500" dirty="0">
                         <a:latin typeface="Calibri" charset="0"/>
@@ -9595,7 +10675,7 @@
                           <a:ea typeface="Calibri" pitchFamily="34" charset="-122"/>
                           <a:cs typeface="Calibri" pitchFamily="34" charset="-120"/>
                         </a:rPr>
-                        <a:t>0.19%</a:t>
+                        <a:t>0.21%</a:t>
                       </a:r>
                       <a:endParaRPr lang="en-US" sz="500" dirty="0">
                         <a:latin typeface="Calibri" charset="0"/>
@@ -9660,7 +10740,7 @@
                           <a:ea typeface="Calibri" pitchFamily="34" charset="-122"/>
                           <a:cs typeface="Calibri" pitchFamily="34" charset="-120"/>
                         </a:rPr>
-                        <a:t>0.23%</a:t>
+                        <a:t>0.21%</a:t>
                       </a:r>
                       <a:endParaRPr lang="en-US" sz="500" dirty="0">
                         <a:latin typeface="Calibri" charset="0"/>
@@ -9725,7 +10805,7 @@
                           <a:ea typeface="Calibri" pitchFamily="34" charset="-122"/>
                           <a:cs typeface="Calibri" pitchFamily="34" charset="-120"/>
                         </a:rPr>
-                        <a:t>0.29%</a:t>
+                        <a:t>0.32%</a:t>
                       </a:r>
                       <a:endParaRPr lang="en-US" sz="500" dirty="0">
                         <a:latin typeface="Calibri" charset="0"/>
@@ -9790,7 +10870,7 @@
                           <a:ea typeface="Calibri" pitchFamily="34" charset="-122"/>
                           <a:cs typeface="Calibri" pitchFamily="34" charset="-120"/>
                         </a:rPr>
-                        <a:t>1.20%</a:t>
+                        <a:t>1.14%</a:t>
                       </a:r>
                       <a:endParaRPr lang="en-US" sz="500" dirty="0">
                         <a:latin typeface="Calibri" charset="0"/>
@@ -9976,7 +11056,7 @@
                           <a:ea typeface="Calibri" pitchFamily="34" charset="-122"/>
                           <a:cs typeface="Calibri" pitchFamily="34" charset="-120"/>
                         </a:rPr>
-                        <a:t>0.00%</a:t>
+                        <a:t>0.02%</a:t>
                       </a:r>
                       <a:endParaRPr lang="en-US" sz="500" dirty="0">
                         <a:latin typeface="Calibri" charset="0"/>
@@ -10691,7 +11771,7 @@
                           <a:ea typeface="Calibri" pitchFamily="34" charset="-122"/>
                           <a:cs typeface="Calibri" pitchFamily="34" charset="-120"/>
                         </a:rPr>
-                        <a:t>0.60%</a:t>
+                        <a:t>0.18%</a:t>
                       </a:r>
                       <a:endParaRPr lang="en-US" sz="500" dirty="0">
                         <a:latin typeface="Calibri" charset="0"/>
@@ -10756,7 +11836,7 @@
                           <a:ea typeface="Calibri" pitchFamily="34" charset="-122"/>
                           <a:cs typeface="Calibri" pitchFamily="34" charset="-120"/>
                         </a:rPr>
-                        <a:t>0.88%</a:t>
+                        <a:t>0.45%</a:t>
                       </a:r>
                       <a:endParaRPr lang="en-US" sz="500" dirty="0">
                         <a:latin typeface="Calibri" charset="0"/>
@@ -11919,7 +12999,7 @@
                           <a:ea typeface="Calibri" pitchFamily="34" charset="-122"/>
                           <a:cs typeface="Calibri" pitchFamily="34" charset="-120"/>
                         </a:rPr>
-                        <a:t>0.35%</a:t>
+                        <a:t>0.34%</a:t>
                       </a:r>
                       <a:endParaRPr lang="en-US" sz="500" dirty="0">
                         <a:latin typeface="Calibri" charset="0"/>
@@ -11984,7 +13064,7 @@
                           <a:ea typeface="Calibri" pitchFamily="34" charset="-122"/>
                           <a:cs typeface="Calibri" pitchFamily="34" charset="-120"/>
                         </a:rPr>
-                        <a:t>0.46%</a:t>
+                        <a:t>0.43%</a:t>
                       </a:r>
                       <a:endParaRPr lang="en-US" sz="500" dirty="0">
                         <a:latin typeface="Calibri" charset="0"/>
@@ -12049,7 +13129,7 @@
                           <a:ea typeface="Calibri" pitchFamily="34" charset="-122"/>
                           <a:cs typeface="Calibri" pitchFamily="34" charset="-120"/>
                         </a:rPr>
-                        <a:t>0.47%</a:t>
+                        <a:t>0.48%</a:t>
                       </a:r>
                       <a:endParaRPr lang="en-US" sz="500" dirty="0">
                         <a:latin typeface="Calibri" charset="0"/>
@@ -12114,7 +13194,7 @@
                           <a:ea typeface="Calibri" pitchFamily="34" charset="-122"/>
                           <a:cs typeface="Calibri" pitchFamily="34" charset="-120"/>
                         </a:rPr>
-                        <a:t>0.58%</a:t>
+                        <a:t>0.55%</a:t>
                       </a:r>
                       <a:endParaRPr lang="en-US" sz="500" dirty="0">
                         <a:latin typeface="Calibri" charset="0"/>
@@ -12179,7 +13259,7 @@
                           <a:ea typeface="Calibri" pitchFamily="34" charset="-122"/>
                           <a:cs typeface="Calibri" pitchFamily="34" charset="-120"/>
                         </a:rPr>
-                        <a:t>0.67%</a:t>
+                        <a:t>0.71%</a:t>
                       </a:r>
                       <a:endParaRPr lang="en-US" sz="500" dirty="0">
                         <a:latin typeface="Calibri" charset="0"/>
@@ -12244,7 +13324,7 @@
                           <a:ea typeface="Calibri" pitchFamily="34" charset="-122"/>
                           <a:cs typeface="Calibri" pitchFamily="34" charset="-120"/>
                         </a:rPr>
-                        <a:t>0.73%</a:t>
+                        <a:t>0.74%</a:t>
                       </a:r>
                       <a:endParaRPr lang="en-US" sz="500" dirty="0">
                         <a:latin typeface="Calibri" charset="0"/>
@@ -12309,7 +13389,7 @@
                           <a:ea typeface="Calibri" pitchFamily="34" charset="-122"/>
                           <a:cs typeface="Calibri" pitchFamily="34" charset="-120"/>
                         </a:rPr>
-                        <a:t>0.79%</a:t>
+                        <a:t>0.76%</a:t>
                       </a:r>
                       <a:endParaRPr lang="en-US" sz="500" dirty="0">
                         <a:latin typeface="Calibri" charset="0"/>
@@ -12374,7 +13454,7 @@
                           <a:ea typeface="Calibri" pitchFamily="34" charset="-122"/>
                           <a:cs typeface="Calibri" pitchFamily="34" charset="-120"/>
                         </a:rPr>
-                        <a:t>0.81%</a:t>
+                        <a:t>0.90%</a:t>
                       </a:r>
                       <a:endParaRPr lang="en-US" sz="500" dirty="0">
                         <a:latin typeface="Calibri" charset="0"/>
@@ -12504,7 +13584,7 @@
                           <a:ea typeface="Calibri" pitchFamily="34" charset="-122"/>
                           <a:cs typeface="Calibri" pitchFamily="34" charset="-120"/>
                         </a:rPr>
-                        <a:t>0.92%</a:t>
+                        <a:t>0.86%</a:t>
                       </a:r>
                       <a:endParaRPr lang="en-US" sz="500" dirty="0">
                         <a:latin typeface="Calibri" charset="0"/>
@@ -12569,6 +13649,71 @@
                           <a:ea typeface="Calibri" pitchFamily="34" charset="-122"/>
                           <a:cs typeface="Calibri" pitchFamily="34" charset="-120"/>
                         </a:rPr>
+                        <a:t>1.04%</a:t>
+                      </a:r>
+                      <a:endParaRPr lang="en-US" sz="500" dirty="0">
+                        <a:latin typeface="Calibri" charset="0"/>
+                        <a:ea typeface="Calibri" charset="0"/>
+                        <a:cs typeface="Calibri" charset="0"/>
+                      </a:endParaRPr>
+                    </a:p>
+                  </a:txBody>
+                  <a:tcPr marL="91440" marR="91440" marT="45720" marB="45720">
+                    <a:lnL w="2540" cap="flat" cmpd="sng" algn="ctr">
+                      <a:solidFill>
+                        <a:srgbClr val="EEEEEE"/>
+                      </a:solidFill>
+                      <a:prstDash val="solid"/>
+                      <a:round/>
+                      <a:headEnd type="none" w="med" len="med"/>
+                      <a:tailEnd type="none" w="med" len="med"/>
+                    </a:lnL>
+                    <a:lnR w="2540" cap="flat" cmpd="sng" algn="ctr">
+                      <a:solidFill>
+                        <a:srgbClr val="EEEEEE"/>
+                      </a:solidFill>
+                      <a:prstDash val="solid"/>
+                      <a:round/>
+                      <a:headEnd type="none" w="med" len="med"/>
+                      <a:tailEnd type="none" w="med" len="med"/>
+                    </a:lnR>
+                    <a:lnT w="2540" cap="flat" cmpd="sng" algn="ctr">
+                      <a:solidFill>
+                        <a:srgbClr val="EEEEEE"/>
+                      </a:solidFill>
+                      <a:prstDash val="solid"/>
+                      <a:round/>
+                      <a:headEnd type="none" w="med" len="med"/>
+                      <a:tailEnd type="none" w="med" len="med"/>
+                    </a:lnT>
+                    <a:lnB w="2540" cap="flat" cmpd="sng" algn="ctr">
+                      <a:solidFill>
+                        <a:srgbClr val="EEEEEE"/>
+                      </a:solidFill>
+                      <a:prstDash val="solid"/>
+                      <a:round/>
+                      <a:headEnd type="none" w="med" len="med"/>
+                      <a:tailEnd type="none" w="med" len="med"/>
+                    </a:lnB>
+                  </a:tcPr>
+                </a:tc>
+                <a:tc>
+                  <a:txBody>
+                    <a:bodyPr/>
+                    <a:lstStyle/>
+                    <a:p>
+                      <a:pPr algn="ctr" indent="0" marL="0">
+                        <a:buNone/>
+                      </a:pPr>
+                      <a:r>
+                        <a:rPr lang="en-US" sz="500" dirty="0">
+                          <a:solidFill>
+                            <a:srgbClr val="777777"/>
+                          </a:solidFill>
+                          <a:latin typeface="Calibri" pitchFamily="34" charset="0"/>
+                          <a:ea typeface="Calibri" pitchFamily="34" charset="-122"/>
+                          <a:cs typeface="Calibri" pitchFamily="34" charset="-120"/>
+                        </a:rPr>
                         <a:t>0.94%</a:t>
                       </a:r>
                       <a:endParaRPr lang="en-US" sz="500" dirty="0">
@@ -12626,7 +13771,7 @@
                         <a:buNone/>
                       </a:pPr>
                       <a:r>
-                        <a:rPr lang="en-US" sz="500" dirty="0">
+                        <a:rPr lang="en-US" sz="500" b="1" dirty="0">
                           <a:solidFill>
                             <a:srgbClr val="777777"/>
                           </a:solidFill>
@@ -12634,72 +13779,7 @@
                           <a:ea typeface="Calibri" pitchFamily="34" charset="-122"/>
                           <a:cs typeface="Calibri" pitchFamily="34" charset="-120"/>
                         </a:rPr>
-                        <a:t>0.94%</a:t>
-                      </a:r>
-                      <a:endParaRPr lang="en-US" sz="500" dirty="0">
-                        <a:latin typeface="Calibri" charset="0"/>
-                        <a:ea typeface="Calibri" charset="0"/>
-                        <a:cs typeface="Calibri" charset="0"/>
-                      </a:endParaRPr>
-                    </a:p>
-                  </a:txBody>
-                  <a:tcPr marL="91440" marR="91440" marT="45720" marB="45720">
-                    <a:lnL w="2540" cap="flat" cmpd="sng" algn="ctr">
-                      <a:solidFill>
-                        <a:srgbClr val="EEEEEE"/>
-                      </a:solidFill>
-                      <a:prstDash val="solid"/>
-                      <a:round/>
-                      <a:headEnd type="none" w="med" len="med"/>
-                      <a:tailEnd type="none" w="med" len="med"/>
-                    </a:lnL>
-                    <a:lnR w="2540" cap="flat" cmpd="sng" algn="ctr">
-                      <a:solidFill>
-                        <a:srgbClr val="EEEEEE"/>
-                      </a:solidFill>
-                      <a:prstDash val="solid"/>
-                      <a:round/>
-                      <a:headEnd type="none" w="med" len="med"/>
-                      <a:tailEnd type="none" w="med" len="med"/>
-                    </a:lnR>
-                    <a:lnT w="2540" cap="flat" cmpd="sng" algn="ctr">
-                      <a:solidFill>
-                        <a:srgbClr val="EEEEEE"/>
-                      </a:solidFill>
-                      <a:prstDash val="solid"/>
-                      <a:round/>
-                      <a:headEnd type="none" w="med" len="med"/>
-                      <a:tailEnd type="none" w="med" len="med"/>
-                    </a:lnT>
-                    <a:lnB w="2540" cap="flat" cmpd="sng" algn="ctr">
-                      <a:solidFill>
-                        <a:srgbClr val="EEEEEE"/>
-                      </a:solidFill>
-                      <a:prstDash val="solid"/>
-                      <a:round/>
-                      <a:headEnd type="none" w="med" len="med"/>
-                      <a:tailEnd type="none" w="med" len="med"/>
-                    </a:lnB>
-                  </a:tcPr>
-                </a:tc>
-                <a:tc>
-                  <a:txBody>
-                    <a:bodyPr/>
-                    <a:lstStyle/>
-                    <a:p>
-                      <a:pPr algn="ctr" indent="0" marL="0">
-                        <a:buNone/>
-                      </a:pPr>
-                      <a:r>
-                        <a:rPr lang="en-US" sz="500" b="1" dirty="0">
-                          <a:solidFill>
-                            <a:srgbClr val="777777"/>
-                          </a:solidFill>
-                          <a:latin typeface="Calibri" pitchFamily="34" charset="0"/>
-                          <a:ea typeface="Calibri" pitchFamily="34" charset="-122"/>
-                          <a:cs typeface="Calibri" pitchFamily="34" charset="-120"/>
-                        </a:rPr>
-                        <a:t>8.88%</a:t>
+                        <a:t>8.97%</a:t>
                       </a:r>
                       <a:endParaRPr lang="en-US" sz="500" dirty="0">
                         <a:latin typeface="Calibri" charset="0"/>
@@ -12885,7 +13965,7 @@
                           <a:ea typeface="Calibri" pitchFamily="34" charset="-122"/>
                           <a:cs typeface="Calibri" pitchFamily="34" charset="-120"/>
                         </a:rPr>
-                        <a:t>0.00%</a:t>
+                        <a:t>0.26%</a:t>
                       </a:r>
                       <a:endParaRPr lang="en-US" sz="500" dirty="0">
                         <a:latin typeface="Calibri" charset="0"/>
@@ -13600,7 +14680,7 @@
                           <a:ea typeface="Calibri" pitchFamily="34" charset="-122"/>
                           <a:cs typeface="Calibri" pitchFamily="34" charset="-120"/>
                         </a:rPr>
-                        <a:t>8.43%</a:t>
+                        <a:t>0.79%</a:t>
                       </a:r>
                       <a:endParaRPr lang="en-US" sz="500" dirty="0">
                         <a:latin typeface="Calibri" charset="0"/>
@@ -13665,7 +14745,7 @@
                           <a:ea typeface="Calibri" pitchFamily="34" charset="-122"/>
                           <a:cs typeface="Calibri" pitchFamily="34" charset="-120"/>
                         </a:rPr>
-                        <a:t>15.11%</a:t>
+                        <a:t>6.43%</a:t>
                       </a:r>
                       <a:endParaRPr lang="en-US" sz="500" dirty="0">
                         <a:latin typeface="Calibri" charset="0"/>
@@ -14828,6 +15908,331 @@
                           <a:ea typeface="Calibri" pitchFamily="34" charset="-122"/>
                           <a:cs typeface="Calibri" pitchFamily="34" charset="-120"/>
                         </a:rPr>
+                        <a:t>1.00%</a:t>
+                      </a:r>
+                      <a:endParaRPr lang="en-US" sz="500" dirty="0">
+                        <a:latin typeface="Calibri" charset="0"/>
+                        <a:ea typeface="Calibri" charset="0"/>
+                        <a:cs typeface="Calibri" charset="0"/>
+                      </a:endParaRPr>
+                    </a:p>
+                  </a:txBody>
+                  <a:tcPr marL="91440" marR="91440" marT="45720" marB="45720">
+                    <a:lnL w="2540" cap="flat" cmpd="sng" algn="ctr">
+                      <a:solidFill>
+                        <a:srgbClr val="EEEEEE"/>
+                      </a:solidFill>
+                      <a:prstDash val="solid"/>
+                      <a:round/>
+                      <a:headEnd type="none" w="med" len="med"/>
+                      <a:tailEnd type="none" w="med" len="med"/>
+                    </a:lnL>
+                    <a:lnR w="2540" cap="flat" cmpd="sng" algn="ctr">
+                      <a:solidFill>
+                        <a:srgbClr val="EEEEEE"/>
+                      </a:solidFill>
+                      <a:prstDash val="solid"/>
+                      <a:round/>
+                      <a:headEnd type="none" w="med" len="med"/>
+                      <a:tailEnd type="none" w="med" len="med"/>
+                    </a:lnR>
+                    <a:lnT w="2540" cap="flat" cmpd="sng" algn="ctr">
+                      <a:solidFill>
+                        <a:srgbClr val="EEEEEE"/>
+                      </a:solidFill>
+                      <a:prstDash val="solid"/>
+                      <a:round/>
+                      <a:headEnd type="none" w="med" len="med"/>
+                      <a:tailEnd type="none" w="med" len="med"/>
+                    </a:lnT>
+                    <a:lnB w="2540" cap="flat" cmpd="sng" algn="ctr">
+                      <a:solidFill>
+                        <a:srgbClr val="EEEEEE"/>
+                      </a:solidFill>
+                      <a:prstDash val="solid"/>
+                      <a:round/>
+                      <a:headEnd type="none" w="med" len="med"/>
+                      <a:tailEnd type="none" w="med" len="med"/>
+                    </a:lnB>
+                  </a:tcPr>
+                </a:tc>
+                <a:tc>
+                  <a:txBody>
+                    <a:bodyPr/>
+                    <a:lstStyle/>
+                    <a:p>
+                      <a:pPr algn="ctr" indent="0" marL="0">
+                        <a:buNone/>
+                      </a:pPr>
+                      <a:r>
+                        <a:rPr lang="en-US" sz="500" dirty="0">
+                          <a:solidFill>
+                            <a:srgbClr val="777777"/>
+                          </a:solidFill>
+                          <a:latin typeface="Calibri" pitchFamily="34" charset="0"/>
+                          <a:ea typeface="Calibri" pitchFamily="34" charset="-122"/>
+                          <a:cs typeface="Calibri" pitchFamily="34" charset="-120"/>
+                        </a:rPr>
+                        <a:t>0.88%</a:t>
+                      </a:r>
+                      <a:endParaRPr lang="en-US" sz="500" dirty="0">
+                        <a:latin typeface="Calibri" charset="0"/>
+                        <a:ea typeface="Calibri" charset="0"/>
+                        <a:cs typeface="Calibri" charset="0"/>
+                      </a:endParaRPr>
+                    </a:p>
+                  </a:txBody>
+                  <a:tcPr marL="91440" marR="91440" marT="45720" marB="45720">
+                    <a:lnL w="2540" cap="flat" cmpd="sng" algn="ctr">
+                      <a:solidFill>
+                        <a:srgbClr val="EEEEEE"/>
+                      </a:solidFill>
+                      <a:prstDash val="solid"/>
+                      <a:round/>
+                      <a:headEnd type="none" w="med" len="med"/>
+                      <a:tailEnd type="none" w="med" len="med"/>
+                    </a:lnL>
+                    <a:lnR w="2540" cap="flat" cmpd="sng" algn="ctr">
+                      <a:solidFill>
+                        <a:srgbClr val="EEEEEE"/>
+                      </a:solidFill>
+                      <a:prstDash val="solid"/>
+                      <a:round/>
+                      <a:headEnd type="none" w="med" len="med"/>
+                      <a:tailEnd type="none" w="med" len="med"/>
+                    </a:lnR>
+                    <a:lnT w="2540" cap="flat" cmpd="sng" algn="ctr">
+                      <a:solidFill>
+                        <a:srgbClr val="EEEEEE"/>
+                      </a:solidFill>
+                      <a:prstDash val="solid"/>
+                      <a:round/>
+                      <a:headEnd type="none" w="med" len="med"/>
+                      <a:tailEnd type="none" w="med" len="med"/>
+                    </a:lnT>
+                    <a:lnB w="2540" cap="flat" cmpd="sng" algn="ctr">
+                      <a:solidFill>
+                        <a:srgbClr val="EEEEEE"/>
+                      </a:solidFill>
+                      <a:prstDash val="solid"/>
+                      <a:round/>
+                      <a:headEnd type="none" w="med" len="med"/>
+                      <a:tailEnd type="none" w="med" len="med"/>
+                    </a:lnB>
+                  </a:tcPr>
+                </a:tc>
+                <a:tc>
+                  <a:txBody>
+                    <a:bodyPr/>
+                    <a:lstStyle/>
+                    <a:p>
+                      <a:pPr algn="ctr" indent="0" marL="0">
+                        <a:buNone/>
+                      </a:pPr>
+                      <a:r>
+                        <a:rPr lang="en-US" sz="500" dirty="0">
+                          <a:solidFill>
+                            <a:srgbClr val="777777"/>
+                          </a:solidFill>
+                          <a:latin typeface="Calibri" pitchFamily="34" charset="0"/>
+                          <a:ea typeface="Calibri" pitchFamily="34" charset="-122"/>
+                          <a:cs typeface="Calibri" pitchFamily="34" charset="-120"/>
+                        </a:rPr>
+                        <a:t>0.97%</a:t>
+                      </a:r>
+                      <a:endParaRPr lang="en-US" sz="500" dirty="0">
+                        <a:latin typeface="Calibri" charset="0"/>
+                        <a:ea typeface="Calibri" charset="0"/>
+                        <a:cs typeface="Calibri" charset="0"/>
+                      </a:endParaRPr>
+                    </a:p>
+                  </a:txBody>
+                  <a:tcPr marL="91440" marR="91440" marT="45720" marB="45720">
+                    <a:lnL w="2540" cap="flat" cmpd="sng" algn="ctr">
+                      <a:solidFill>
+                        <a:srgbClr val="EEEEEE"/>
+                      </a:solidFill>
+                      <a:prstDash val="solid"/>
+                      <a:round/>
+                      <a:headEnd type="none" w="med" len="med"/>
+                      <a:tailEnd type="none" w="med" len="med"/>
+                    </a:lnL>
+                    <a:lnR w="2540" cap="flat" cmpd="sng" algn="ctr">
+                      <a:solidFill>
+                        <a:srgbClr val="EEEEEE"/>
+                      </a:solidFill>
+                      <a:prstDash val="solid"/>
+                      <a:round/>
+                      <a:headEnd type="none" w="med" len="med"/>
+                      <a:tailEnd type="none" w="med" len="med"/>
+                    </a:lnR>
+                    <a:lnT w="2540" cap="flat" cmpd="sng" algn="ctr">
+                      <a:solidFill>
+                        <a:srgbClr val="EEEEEE"/>
+                      </a:solidFill>
+                      <a:prstDash val="solid"/>
+                      <a:round/>
+                      <a:headEnd type="none" w="med" len="med"/>
+                      <a:tailEnd type="none" w="med" len="med"/>
+                    </a:lnT>
+                    <a:lnB w="2540" cap="flat" cmpd="sng" algn="ctr">
+                      <a:solidFill>
+                        <a:srgbClr val="EEEEEE"/>
+                      </a:solidFill>
+                      <a:prstDash val="solid"/>
+                      <a:round/>
+                      <a:headEnd type="none" w="med" len="med"/>
+                      <a:tailEnd type="none" w="med" len="med"/>
+                    </a:lnB>
+                  </a:tcPr>
+                </a:tc>
+                <a:tc>
+                  <a:txBody>
+                    <a:bodyPr/>
+                    <a:lstStyle/>
+                    <a:p>
+                      <a:pPr algn="ctr" indent="0" marL="0">
+                        <a:buNone/>
+                      </a:pPr>
+                      <a:r>
+                        <a:rPr lang="en-US" sz="500" dirty="0">
+                          <a:solidFill>
+                            <a:srgbClr val="777777"/>
+                          </a:solidFill>
+                          <a:latin typeface="Calibri" pitchFamily="34" charset="0"/>
+                          <a:ea typeface="Calibri" pitchFamily="34" charset="-122"/>
+                          <a:cs typeface="Calibri" pitchFamily="34" charset="-120"/>
+                        </a:rPr>
+                        <a:t>0.88%</a:t>
+                      </a:r>
+                      <a:endParaRPr lang="en-US" sz="500" dirty="0">
+                        <a:latin typeface="Calibri" charset="0"/>
+                        <a:ea typeface="Calibri" charset="0"/>
+                        <a:cs typeface="Calibri" charset="0"/>
+                      </a:endParaRPr>
+                    </a:p>
+                  </a:txBody>
+                  <a:tcPr marL="91440" marR="91440" marT="45720" marB="45720">
+                    <a:lnL w="2540" cap="flat" cmpd="sng" algn="ctr">
+                      <a:solidFill>
+                        <a:srgbClr val="EEEEEE"/>
+                      </a:solidFill>
+                      <a:prstDash val="solid"/>
+                      <a:round/>
+                      <a:headEnd type="none" w="med" len="med"/>
+                      <a:tailEnd type="none" w="med" len="med"/>
+                    </a:lnL>
+                    <a:lnR w="2540" cap="flat" cmpd="sng" algn="ctr">
+                      <a:solidFill>
+                        <a:srgbClr val="EEEEEE"/>
+                      </a:solidFill>
+                      <a:prstDash val="solid"/>
+                      <a:round/>
+                      <a:headEnd type="none" w="med" len="med"/>
+                      <a:tailEnd type="none" w="med" len="med"/>
+                    </a:lnR>
+                    <a:lnT w="2540" cap="flat" cmpd="sng" algn="ctr">
+                      <a:solidFill>
+                        <a:srgbClr val="EEEEEE"/>
+                      </a:solidFill>
+                      <a:prstDash val="solid"/>
+                      <a:round/>
+                      <a:headEnd type="none" w="med" len="med"/>
+                      <a:tailEnd type="none" w="med" len="med"/>
+                    </a:lnT>
+                    <a:lnB w="2540" cap="flat" cmpd="sng" algn="ctr">
+                      <a:solidFill>
+                        <a:srgbClr val="EEEEEE"/>
+                      </a:solidFill>
+                      <a:prstDash val="solid"/>
+                      <a:round/>
+                      <a:headEnd type="none" w="med" len="med"/>
+                      <a:tailEnd type="none" w="med" len="med"/>
+                    </a:lnB>
+                  </a:tcPr>
+                </a:tc>
+                <a:tc>
+                  <a:txBody>
+                    <a:bodyPr/>
+                    <a:lstStyle/>
+                    <a:p>
+                      <a:pPr algn="ctr" indent="0" marL="0">
+                        <a:buNone/>
+                      </a:pPr>
+                      <a:r>
+                        <a:rPr lang="en-US" sz="500" dirty="0">
+                          <a:solidFill>
+                            <a:srgbClr val="777777"/>
+                          </a:solidFill>
+                          <a:latin typeface="Calibri" pitchFamily="34" charset="0"/>
+                          <a:ea typeface="Calibri" pitchFamily="34" charset="-122"/>
+                          <a:cs typeface="Calibri" pitchFamily="34" charset="-120"/>
+                        </a:rPr>
+                        <a:t>1.04%</a:t>
+                      </a:r>
+                      <a:endParaRPr lang="en-US" sz="500" dirty="0">
+                        <a:latin typeface="Calibri" charset="0"/>
+                        <a:ea typeface="Calibri" charset="0"/>
+                        <a:cs typeface="Calibri" charset="0"/>
+                      </a:endParaRPr>
+                    </a:p>
+                  </a:txBody>
+                  <a:tcPr marL="91440" marR="91440" marT="45720" marB="45720">
+                    <a:lnL w="2540" cap="flat" cmpd="sng" algn="ctr">
+                      <a:solidFill>
+                        <a:srgbClr val="EEEEEE"/>
+                      </a:solidFill>
+                      <a:prstDash val="solid"/>
+                      <a:round/>
+                      <a:headEnd type="none" w="med" len="med"/>
+                      <a:tailEnd type="none" w="med" len="med"/>
+                    </a:lnL>
+                    <a:lnR w="2540" cap="flat" cmpd="sng" algn="ctr">
+                      <a:solidFill>
+                        <a:srgbClr val="EEEEEE"/>
+                      </a:solidFill>
+                      <a:prstDash val="solid"/>
+                      <a:round/>
+                      <a:headEnd type="none" w="med" len="med"/>
+                      <a:tailEnd type="none" w="med" len="med"/>
+                    </a:lnR>
+                    <a:lnT w="2540" cap="flat" cmpd="sng" algn="ctr">
+                      <a:solidFill>
+                        <a:srgbClr val="EEEEEE"/>
+                      </a:solidFill>
+                      <a:prstDash val="solid"/>
+                      <a:round/>
+                      <a:headEnd type="none" w="med" len="med"/>
+                      <a:tailEnd type="none" w="med" len="med"/>
+                    </a:lnT>
+                    <a:lnB w="2540" cap="flat" cmpd="sng" algn="ctr">
+                      <a:solidFill>
+                        <a:srgbClr val="EEEEEE"/>
+                      </a:solidFill>
+                      <a:prstDash val="solid"/>
+                      <a:round/>
+                      <a:headEnd type="none" w="med" len="med"/>
+                      <a:tailEnd type="none" w="med" len="med"/>
+                    </a:lnB>
+                  </a:tcPr>
+                </a:tc>
+                <a:tc>
+                  <a:txBody>
+                    <a:bodyPr/>
+                    <a:lstStyle/>
+                    <a:p>
+                      <a:pPr algn="ctr" indent="0" marL="0">
+                        <a:buNone/>
+                      </a:pPr>
+                      <a:r>
+                        <a:rPr lang="en-US" sz="500" dirty="0">
+                          <a:solidFill>
+                            <a:srgbClr val="777777"/>
+                          </a:solidFill>
+                          <a:latin typeface="Calibri" pitchFamily="34" charset="0"/>
+                          <a:ea typeface="Calibri" pitchFamily="34" charset="-122"/>
+                          <a:cs typeface="Calibri" pitchFamily="34" charset="-120"/>
+                        </a:rPr>
                         <a:t>0.94%</a:t>
                       </a:r>
                       <a:endParaRPr lang="en-US" sz="500" dirty="0">
@@ -14893,7 +16298,7 @@
                           <a:ea typeface="Calibri" pitchFamily="34" charset="-122"/>
                           <a:cs typeface="Calibri" pitchFamily="34" charset="-120"/>
                         </a:rPr>
-                        <a:t>0.94%</a:t>
+                        <a:t>0.97%</a:t>
                       </a:r>
                       <a:endParaRPr lang="en-US" sz="500" dirty="0">
                         <a:latin typeface="Calibri" charset="0"/>
@@ -14958,7 +16363,7 @@
                           <a:ea typeface="Calibri" pitchFamily="34" charset="-122"/>
                           <a:cs typeface="Calibri" pitchFamily="34" charset="-120"/>
                         </a:rPr>
-                        <a:t>0.94%</a:t>
+                        <a:t>0.89%</a:t>
                       </a:r>
                       <a:endParaRPr lang="en-US" sz="500" dirty="0">
                         <a:latin typeface="Calibri" charset="0"/>
@@ -15023,7 +16428,7 @@
                           <a:ea typeface="Calibri" pitchFamily="34" charset="-122"/>
                           <a:cs typeface="Calibri" pitchFamily="34" charset="-120"/>
                         </a:rPr>
-                        <a:t>0.94%</a:t>
+                        <a:t>0.78%</a:t>
                       </a:r>
                       <a:endParaRPr lang="en-US" sz="500" dirty="0">
                         <a:latin typeface="Calibri" charset="0"/>
@@ -15088,7 +16493,7 @@
                           <a:ea typeface="Calibri" pitchFamily="34" charset="-122"/>
                           <a:cs typeface="Calibri" pitchFamily="34" charset="-120"/>
                         </a:rPr>
-                        <a:t>0.94%</a:t>
+                        <a:t>0.85%</a:t>
                       </a:r>
                       <a:endParaRPr lang="en-US" sz="500" dirty="0">
                         <a:latin typeface="Calibri" charset="0"/>
@@ -15153,7 +16558,7 @@
                           <a:ea typeface="Calibri" pitchFamily="34" charset="-122"/>
                           <a:cs typeface="Calibri" pitchFamily="34" charset="-120"/>
                         </a:rPr>
-                        <a:t>0.94%</a:t>
+                        <a:t>0.75%</a:t>
                       </a:r>
                       <a:endParaRPr lang="en-US" sz="500" dirty="0">
                         <a:latin typeface="Calibri" charset="0"/>
@@ -15218,64 +16623,64 @@
                           <a:ea typeface="Calibri" pitchFamily="34" charset="-122"/>
                           <a:cs typeface="Calibri" pitchFamily="34" charset="-120"/>
                         </a:rPr>
-                        <a:t>0.93%</a:t>
-                      </a:r>
-                      <a:endParaRPr lang="en-US" sz="500" dirty="0">
-                        <a:latin typeface="Calibri" charset="0"/>
-                        <a:ea typeface="Calibri" charset="0"/>
-                        <a:cs typeface="Calibri" charset="0"/>
-                      </a:endParaRPr>
-                    </a:p>
-                  </a:txBody>
-                  <a:tcPr marL="91440" marR="91440" marT="45720" marB="45720">
-                    <a:lnL w="2540" cap="flat" cmpd="sng" algn="ctr">
-                      <a:solidFill>
-                        <a:srgbClr val="EEEEEE"/>
-                      </a:solidFill>
-                      <a:prstDash val="solid"/>
-                      <a:round/>
-                      <a:headEnd type="none" w="med" len="med"/>
-                      <a:tailEnd type="none" w="med" len="med"/>
-                    </a:lnL>
-                    <a:lnR w="2540" cap="flat" cmpd="sng" algn="ctr">
-                      <a:solidFill>
-                        <a:srgbClr val="EEEEEE"/>
-                      </a:solidFill>
-                      <a:prstDash val="solid"/>
-                      <a:round/>
-                      <a:headEnd type="none" w="med" len="med"/>
-                      <a:tailEnd type="none" w="med" len="med"/>
-                    </a:lnR>
-                    <a:lnT w="2540" cap="flat" cmpd="sng" algn="ctr">
-                      <a:solidFill>
-                        <a:srgbClr val="EEEEEE"/>
-                      </a:solidFill>
-                      <a:prstDash val="solid"/>
-                      <a:round/>
-                      <a:headEnd type="none" w="med" len="med"/>
-                      <a:tailEnd type="none" w="med" len="med"/>
-                    </a:lnT>
-                    <a:lnB w="2540" cap="flat" cmpd="sng" algn="ctr">
-                      <a:solidFill>
-                        <a:srgbClr val="EEEEEE"/>
-                      </a:solidFill>
-                      <a:prstDash val="solid"/>
-                      <a:round/>
-                      <a:headEnd type="none" w="med" len="med"/>
-                      <a:tailEnd type="none" w="med" len="med"/>
-                    </a:lnB>
-                  </a:tcPr>
-                </a:tc>
-                <a:tc>
-                  <a:txBody>
-                    <a:bodyPr/>
-                    <a:lstStyle/>
-                    <a:p>
-                      <a:pPr algn="ctr" indent="0" marL="0">
-                        <a:buNone/>
-                      </a:pPr>
-                      <a:r>
-                        <a:rPr lang="en-US" sz="500" dirty="0">
+                        <a:t>0.71%</a:t>
+                      </a:r>
+                      <a:endParaRPr lang="en-US" sz="500" dirty="0">
+                        <a:latin typeface="Calibri" charset="0"/>
+                        <a:ea typeface="Calibri" charset="0"/>
+                        <a:cs typeface="Calibri" charset="0"/>
+                      </a:endParaRPr>
+                    </a:p>
+                  </a:txBody>
+                  <a:tcPr marL="91440" marR="91440" marT="45720" marB="45720">
+                    <a:lnL w="2540" cap="flat" cmpd="sng" algn="ctr">
+                      <a:solidFill>
+                        <a:srgbClr val="EEEEEE"/>
+                      </a:solidFill>
+                      <a:prstDash val="solid"/>
+                      <a:round/>
+                      <a:headEnd type="none" w="med" len="med"/>
+                      <a:tailEnd type="none" w="med" len="med"/>
+                    </a:lnL>
+                    <a:lnR w="2540" cap="flat" cmpd="sng" algn="ctr">
+                      <a:solidFill>
+                        <a:srgbClr val="EEEEEE"/>
+                      </a:solidFill>
+                      <a:prstDash val="solid"/>
+                      <a:round/>
+                      <a:headEnd type="none" w="med" len="med"/>
+                      <a:tailEnd type="none" w="med" len="med"/>
+                    </a:lnR>
+                    <a:lnT w="2540" cap="flat" cmpd="sng" algn="ctr">
+                      <a:solidFill>
+                        <a:srgbClr val="EEEEEE"/>
+                      </a:solidFill>
+                      <a:prstDash val="solid"/>
+                      <a:round/>
+                      <a:headEnd type="none" w="med" len="med"/>
+                      <a:tailEnd type="none" w="med" len="med"/>
+                    </a:lnT>
+                    <a:lnB w="2540" cap="flat" cmpd="sng" algn="ctr">
+                      <a:solidFill>
+                        <a:srgbClr val="EEEEEE"/>
+                      </a:solidFill>
+                      <a:prstDash val="solid"/>
+                      <a:round/>
+                      <a:headEnd type="none" w="med" len="med"/>
+                      <a:tailEnd type="none" w="med" len="med"/>
+                    </a:lnB>
+                  </a:tcPr>
+                </a:tc>
+                <a:tc>
+                  <a:txBody>
+                    <a:bodyPr/>
+                    <a:lstStyle/>
+                    <a:p>
+                      <a:pPr algn="ctr" indent="0" marL="0">
+                        <a:buNone/>
+                      </a:pPr>
+                      <a:r>
+                        <a:rPr lang="en-US" sz="500" b="1" dirty="0">
                           <a:solidFill>
                             <a:srgbClr val="777777"/>
                           </a:solidFill>
@@ -15283,332 +16688,7 @@
                           <a:ea typeface="Calibri" pitchFamily="34" charset="-122"/>
                           <a:cs typeface="Calibri" pitchFamily="34" charset="-120"/>
                         </a:rPr>
-                        <a:t>0.85%</a:t>
-                      </a:r>
-                      <a:endParaRPr lang="en-US" sz="500" dirty="0">
-                        <a:latin typeface="Calibri" charset="0"/>
-                        <a:ea typeface="Calibri" charset="0"/>
-                        <a:cs typeface="Calibri" charset="0"/>
-                      </a:endParaRPr>
-                    </a:p>
-                  </a:txBody>
-                  <a:tcPr marL="91440" marR="91440" marT="45720" marB="45720">
-                    <a:lnL w="2540" cap="flat" cmpd="sng" algn="ctr">
-                      <a:solidFill>
-                        <a:srgbClr val="EEEEEE"/>
-                      </a:solidFill>
-                      <a:prstDash val="solid"/>
-                      <a:round/>
-                      <a:headEnd type="none" w="med" len="med"/>
-                      <a:tailEnd type="none" w="med" len="med"/>
-                    </a:lnL>
-                    <a:lnR w="2540" cap="flat" cmpd="sng" algn="ctr">
-                      <a:solidFill>
-                        <a:srgbClr val="EEEEEE"/>
-                      </a:solidFill>
-                      <a:prstDash val="solid"/>
-                      <a:round/>
-                      <a:headEnd type="none" w="med" len="med"/>
-                      <a:tailEnd type="none" w="med" len="med"/>
-                    </a:lnR>
-                    <a:lnT w="2540" cap="flat" cmpd="sng" algn="ctr">
-                      <a:solidFill>
-                        <a:srgbClr val="EEEEEE"/>
-                      </a:solidFill>
-                      <a:prstDash val="solid"/>
-                      <a:round/>
-                      <a:headEnd type="none" w="med" len="med"/>
-                      <a:tailEnd type="none" w="med" len="med"/>
-                    </a:lnT>
-                    <a:lnB w="2540" cap="flat" cmpd="sng" algn="ctr">
-                      <a:solidFill>
-                        <a:srgbClr val="EEEEEE"/>
-                      </a:solidFill>
-                      <a:prstDash val="solid"/>
-                      <a:round/>
-                      <a:headEnd type="none" w="med" len="med"/>
-                      <a:tailEnd type="none" w="med" len="med"/>
-                    </a:lnB>
-                  </a:tcPr>
-                </a:tc>
-                <a:tc>
-                  <a:txBody>
-                    <a:bodyPr/>
-                    <a:lstStyle/>
-                    <a:p>
-                      <a:pPr algn="ctr" indent="0" marL="0">
-                        <a:buNone/>
-                      </a:pPr>
-                      <a:r>
-                        <a:rPr lang="en-US" sz="500" dirty="0">
-                          <a:solidFill>
-                            <a:srgbClr val="777777"/>
-                          </a:solidFill>
-                          <a:latin typeface="Calibri" pitchFamily="34" charset="0"/>
-                          <a:ea typeface="Calibri" pitchFamily="34" charset="-122"/>
-                          <a:cs typeface="Calibri" pitchFamily="34" charset="-120"/>
-                        </a:rPr>
-                        <a:t>0.80%</a:t>
-                      </a:r>
-                      <a:endParaRPr lang="en-US" sz="500" dirty="0">
-                        <a:latin typeface="Calibri" charset="0"/>
-                        <a:ea typeface="Calibri" charset="0"/>
-                        <a:cs typeface="Calibri" charset="0"/>
-                      </a:endParaRPr>
-                    </a:p>
-                  </a:txBody>
-                  <a:tcPr marL="91440" marR="91440" marT="45720" marB="45720">
-                    <a:lnL w="2540" cap="flat" cmpd="sng" algn="ctr">
-                      <a:solidFill>
-                        <a:srgbClr val="EEEEEE"/>
-                      </a:solidFill>
-                      <a:prstDash val="solid"/>
-                      <a:round/>
-                      <a:headEnd type="none" w="med" len="med"/>
-                      <a:tailEnd type="none" w="med" len="med"/>
-                    </a:lnL>
-                    <a:lnR w="2540" cap="flat" cmpd="sng" algn="ctr">
-                      <a:solidFill>
-                        <a:srgbClr val="EEEEEE"/>
-                      </a:solidFill>
-                      <a:prstDash val="solid"/>
-                      <a:round/>
-                      <a:headEnd type="none" w="med" len="med"/>
-                      <a:tailEnd type="none" w="med" len="med"/>
-                    </a:lnR>
-                    <a:lnT w="2540" cap="flat" cmpd="sng" algn="ctr">
-                      <a:solidFill>
-                        <a:srgbClr val="EEEEEE"/>
-                      </a:solidFill>
-                      <a:prstDash val="solid"/>
-                      <a:round/>
-                      <a:headEnd type="none" w="med" len="med"/>
-                      <a:tailEnd type="none" w="med" len="med"/>
-                    </a:lnT>
-                    <a:lnB w="2540" cap="flat" cmpd="sng" algn="ctr">
-                      <a:solidFill>
-                        <a:srgbClr val="EEEEEE"/>
-                      </a:solidFill>
-                      <a:prstDash val="solid"/>
-                      <a:round/>
-                      <a:headEnd type="none" w="med" len="med"/>
-                      <a:tailEnd type="none" w="med" len="med"/>
-                    </a:lnB>
-                  </a:tcPr>
-                </a:tc>
-                <a:tc>
-                  <a:txBody>
-                    <a:bodyPr/>
-                    <a:lstStyle/>
-                    <a:p>
-                      <a:pPr algn="ctr" indent="0" marL="0">
-                        <a:buNone/>
-                      </a:pPr>
-                      <a:r>
-                        <a:rPr lang="en-US" sz="500" dirty="0">
-                          <a:solidFill>
-                            <a:srgbClr val="777777"/>
-                          </a:solidFill>
-                          <a:latin typeface="Calibri" pitchFamily="34" charset="0"/>
-                          <a:ea typeface="Calibri" pitchFamily="34" charset="-122"/>
-                          <a:cs typeface="Calibri" pitchFamily="34" charset="-120"/>
-                        </a:rPr>
-                        <a:t>0.79%</a:t>
-                      </a:r>
-                      <a:endParaRPr lang="en-US" sz="500" dirty="0">
-                        <a:latin typeface="Calibri" charset="0"/>
-                        <a:ea typeface="Calibri" charset="0"/>
-                        <a:cs typeface="Calibri" charset="0"/>
-                      </a:endParaRPr>
-                    </a:p>
-                  </a:txBody>
-                  <a:tcPr marL="91440" marR="91440" marT="45720" marB="45720">
-                    <a:lnL w="2540" cap="flat" cmpd="sng" algn="ctr">
-                      <a:solidFill>
-                        <a:srgbClr val="EEEEEE"/>
-                      </a:solidFill>
-                      <a:prstDash val="solid"/>
-                      <a:round/>
-                      <a:headEnd type="none" w="med" len="med"/>
-                      <a:tailEnd type="none" w="med" len="med"/>
-                    </a:lnL>
-                    <a:lnR w="2540" cap="flat" cmpd="sng" algn="ctr">
-                      <a:solidFill>
-                        <a:srgbClr val="EEEEEE"/>
-                      </a:solidFill>
-                      <a:prstDash val="solid"/>
-                      <a:round/>
-                      <a:headEnd type="none" w="med" len="med"/>
-                      <a:tailEnd type="none" w="med" len="med"/>
-                    </a:lnR>
-                    <a:lnT w="2540" cap="flat" cmpd="sng" algn="ctr">
-                      <a:solidFill>
-                        <a:srgbClr val="EEEEEE"/>
-                      </a:solidFill>
-                      <a:prstDash val="solid"/>
-                      <a:round/>
-                      <a:headEnd type="none" w="med" len="med"/>
-                      <a:tailEnd type="none" w="med" len="med"/>
-                    </a:lnT>
-                    <a:lnB w="2540" cap="flat" cmpd="sng" algn="ctr">
-                      <a:solidFill>
-                        <a:srgbClr val="EEEEEE"/>
-                      </a:solidFill>
-                      <a:prstDash val="solid"/>
-                      <a:round/>
-                      <a:headEnd type="none" w="med" len="med"/>
-                      <a:tailEnd type="none" w="med" len="med"/>
-                    </a:lnB>
-                  </a:tcPr>
-                </a:tc>
-                <a:tc>
-                  <a:txBody>
-                    <a:bodyPr/>
-                    <a:lstStyle/>
-                    <a:p>
-                      <a:pPr algn="ctr" indent="0" marL="0">
-                        <a:buNone/>
-                      </a:pPr>
-                      <a:r>
-                        <a:rPr lang="en-US" sz="500" dirty="0">
-                          <a:solidFill>
-                            <a:srgbClr val="777777"/>
-                          </a:solidFill>
-                          <a:latin typeface="Calibri" pitchFamily="34" charset="0"/>
-                          <a:ea typeface="Calibri" pitchFamily="34" charset="-122"/>
-                          <a:cs typeface="Calibri" pitchFamily="34" charset="-120"/>
-                        </a:rPr>
-                        <a:t>0.75%</a:t>
-                      </a:r>
-                      <a:endParaRPr lang="en-US" sz="500" dirty="0">
-                        <a:latin typeface="Calibri" charset="0"/>
-                        <a:ea typeface="Calibri" charset="0"/>
-                        <a:cs typeface="Calibri" charset="0"/>
-                      </a:endParaRPr>
-                    </a:p>
-                  </a:txBody>
-                  <a:tcPr marL="91440" marR="91440" marT="45720" marB="45720">
-                    <a:lnL w="2540" cap="flat" cmpd="sng" algn="ctr">
-                      <a:solidFill>
-                        <a:srgbClr val="EEEEEE"/>
-                      </a:solidFill>
-                      <a:prstDash val="solid"/>
-                      <a:round/>
-                      <a:headEnd type="none" w="med" len="med"/>
-                      <a:tailEnd type="none" w="med" len="med"/>
-                    </a:lnL>
-                    <a:lnR w="2540" cap="flat" cmpd="sng" algn="ctr">
-                      <a:solidFill>
-                        <a:srgbClr val="EEEEEE"/>
-                      </a:solidFill>
-                      <a:prstDash val="solid"/>
-                      <a:round/>
-                      <a:headEnd type="none" w="med" len="med"/>
-                      <a:tailEnd type="none" w="med" len="med"/>
-                    </a:lnR>
-                    <a:lnT w="2540" cap="flat" cmpd="sng" algn="ctr">
-                      <a:solidFill>
-                        <a:srgbClr val="EEEEEE"/>
-                      </a:solidFill>
-                      <a:prstDash val="solid"/>
-                      <a:round/>
-                      <a:headEnd type="none" w="med" len="med"/>
-                      <a:tailEnd type="none" w="med" len="med"/>
-                    </a:lnT>
-                    <a:lnB w="2540" cap="flat" cmpd="sng" algn="ctr">
-                      <a:solidFill>
-                        <a:srgbClr val="EEEEEE"/>
-                      </a:solidFill>
-                      <a:prstDash val="solid"/>
-                      <a:round/>
-                      <a:headEnd type="none" w="med" len="med"/>
-                      <a:tailEnd type="none" w="med" len="med"/>
-                    </a:lnB>
-                  </a:tcPr>
-                </a:tc>
-                <a:tc>
-                  <a:txBody>
-                    <a:bodyPr/>
-                    <a:lstStyle/>
-                    <a:p>
-                      <a:pPr algn="ctr" indent="0" marL="0">
-                        <a:buNone/>
-                      </a:pPr>
-                      <a:r>
-                        <a:rPr lang="en-US" sz="500" dirty="0">
-                          <a:solidFill>
-                            <a:srgbClr val="777777"/>
-                          </a:solidFill>
-                          <a:latin typeface="Calibri" pitchFamily="34" charset="0"/>
-                          <a:ea typeface="Calibri" pitchFamily="34" charset="-122"/>
-                          <a:cs typeface="Calibri" pitchFamily="34" charset="-120"/>
-                        </a:rPr>
-                        <a:t>0.73%</a:t>
-                      </a:r>
-                      <a:endParaRPr lang="en-US" sz="500" dirty="0">
-                        <a:latin typeface="Calibri" charset="0"/>
-                        <a:ea typeface="Calibri" charset="0"/>
-                        <a:cs typeface="Calibri" charset="0"/>
-                      </a:endParaRPr>
-                    </a:p>
-                  </a:txBody>
-                  <a:tcPr marL="91440" marR="91440" marT="45720" marB="45720">
-                    <a:lnL w="2540" cap="flat" cmpd="sng" algn="ctr">
-                      <a:solidFill>
-                        <a:srgbClr val="EEEEEE"/>
-                      </a:solidFill>
-                      <a:prstDash val="solid"/>
-                      <a:round/>
-                      <a:headEnd type="none" w="med" len="med"/>
-                      <a:tailEnd type="none" w="med" len="med"/>
-                    </a:lnL>
-                    <a:lnR w="2540" cap="flat" cmpd="sng" algn="ctr">
-                      <a:solidFill>
-                        <a:srgbClr val="EEEEEE"/>
-                      </a:solidFill>
-                      <a:prstDash val="solid"/>
-                      <a:round/>
-                      <a:headEnd type="none" w="med" len="med"/>
-                      <a:tailEnd type="none" w="med" len="med"/>
-                    </a:lnR>
-                    <a:lnT w="2540" cap="flat" cmpd="sng" algn="ctr">
-                      <a:solidFill>
-                        <a:srgbClr val="EEEEEE"/>
-                      </a:solidFill>
-                      <a:prstDash val="solid"/>
-                      <a:round/>
-                      <a:headEnd type="none" w="med" len="med"/>
-                      <a:tailEnd type="none" w="med" len="med"/>
-                    </a:lnT>
-                    <a:lnB w="2540" cap="flat" cmpd="sng" algn="ctr">
-                      <a:solidFill>
-                        <a:srgbClr val="EEEEEE"/>
-                      </a:solidFill>
-                      <a:prstDash val="solid"/>
-                      <a:round/>
-                      <a:headEnd type="none" w="med" len="med"/>
-                      <a:tailEnd type="none" w="med" len="med"/>
-                    </a:lnB>
-                  </a:tcPr>
-                </a:tc>
-                <a:tc>
-                  <a:txBody>
-                    <a:bodyPr/>
-                    <a:lstStyle/>
-                    <a:p>
-                      <a:pPr algn="ctr" indent="0" marL="0">
-                        <a:buNone/>
-                      </a:pPr>
-                      <a:r>
-                        <a:rPr lang="en-US" sz="500" b="1" dirty="0">
-                          <a:solidFill>
-                            <a:srgbClr val="777777"/>
-                          </a:solidFill>
-                          <a:latin typeface="Calibri" pitchFamily="34" charset="0"/>
-                          <a:ea typeface="Calibri" pitchFamily="34" charset="-122"/>
-                          <a:cs typeface="Calibri" pitchFamily="34" charset="-120"/>
-                        </a:rPr>
-                        <a:t>11.00%</a:t>
+                        <a:t>11.19%</a:t>
                       </a:r>
                       <a:endParaRPr lang="en-US" sz="500" dirty="0">
                         <a:latin typeface="Calibri" charset="0"/>
@@ -15794,7 +16874,7 @@
                           <a:ea typeface="Calibri" pitchFamily="34" charset="-122"/>
                           <a:cs typeface="Calibri" pitchFamily="34" charset="-120"/>
                         </a:rPr>
-                        <a:t>0.00%</a:t>
+                        <a:t>0.84%</a:t>
                       </a:r>
                       <a:endParaRPr lang="en-US" sz="500" dirty="0">
                         <a:latin typeface="Calibri" charset="0"/>
@@ -16509,7 +17589,7 @@
                           <a:ea typeface="Calibri" pitchFamily="34" charset="-122"/>
                           <a:cs typeface="Calibri" pitchFamily="34" charset="-120"/>
                         </a:rPr>
-                        <a:t>7.49%</a:t>
+                        <a:t>0.61%</a:t>
                       </a:r>
                       <a:endParaRPr lang="en-US" sz="500" dirty="0">
                         <a:latin typeface="Calibri" charset="0"/>
@@ -16574,7 +17654,7 @@
                           <a:ea typeface="Calibri" pitchFamily="34" charset="-122"/>
                           <a:cs typeface="Calibri" pitchFamily="34" charset="-120"/>
                         </a:rPr>
-                        <a:t>15.86%</a:t>
+                        <a:t>9.36%</a:t>
                       </a:r>
                       <a:endParaRPr lang="en-US" sz="500" dirty="0">
                         <a:latin typeface="Calibri" charset="0"/>
@@ -17540,7 +18620,7 @@
                           <a:ea typeface="Calibri" pitchFamily="34" charset="-122"/>
                           <a:cs typeface="Calibri" pitchFamily="34" charset="-120"/>
                         </a:rPr>
-                        <a:t>12.83%</a:t>
+                        <a:t>13.06%</a:t>
                       </a:r>
                       <a:endParaRPr lang="en-US" sz="500" dirty="0">
                         <a:latin typeface="Calibri" charset="0"/>
@@ -17737,7 +18817,7 @@
                           <a:ea typeface="Calibri" pitchFamily="34" charset="-122"/>
                           <a:cs typeface="Calibri" pitchFamily="34" charset="-120"/>
                         </a:rPr>
-                        <a:t>0.69%</a:t>
+                        <a:t>0.74%</a:t>
                       </a:r>
                       <a:endParaRPr lang="en-US" sz="500" dirty="0">
                         <a:latin typeface="Calibri" charset="0"/>
@@ -17802,7 +18882,7 @@
                           <a:ea typeface="Calibri" pitchFamily="34" charset="-122"/>
                           <a:cs typeface="Calibri" pitchFamily="34" charset="-120"/>
                         </a:rPr>
-                        <a:t>0.60%</a:t>
+                        <a:t>0.61%</a:t>
                       </a:r>
                       <a:endParaRPr lang="en-US" sz="500" dirty="0">
                         <a:latin typeface="Calibri" charset="0"/>
@@ -17867,7 +18947,7 @@
                           <a:ea typeface="Calibri" pitchFamily="34" charset="-122"/>
                           <a:cs typeface="Calibri" pitchFamily="34" charset="-120"/>
                         </a:rPr>
-                        <a:t>0.60%</a:t>
+                        <a:t>0.56%</a:t>
                       </a:r>
                       <a:endParaRPr lang="en-US" sz="500" dirty="0">
                         <a:latin typeface="Calibri" charset="0"/>
@@ -17932,6 +19012,71 @@
                           <a:ea typeface="Calibri" pitchFamily="34" charset="-122"/>
                           <a:cs typeface="Calibri" pitchFamily="34" charset="-120"/>
                         </a:rPr>
+                        <a:t>0.61%</a:t>
+                      </a:r>
+                      <a:endParaRPr lang="en-US" sz="500" dirty="0">
+                        <a:latin typeface="Calibri" charset="0"/>
+                        <a:ea typeface="Calibri" charset="0"/>
+                        <a:cs typeface="Calibri" charset="0"/>
+                      </a:endParaRPr>
+                    </a:p>
+                  </a:txBody>
+                  <a:tcPr marL="91440" marR="91440" marT="45720" marB="45720">
+                    <a:lnL w="2540" cap="flat" cmpd="sng" algn="ctr">
+                      <a:solidFill>
+                        <a:srgbClr val="EEEEEE"/>
+                      </a:solidFill>
+                      <a:prstDash val="solid"/>
+                      <a:round/>
+                      <a:headEnd type="none" w="med" len="med"/>
+                      <a:tailEnd type="none" w="med" len="med"/>
+                    </a:lnL>
+                    <a:lnR w="2540" cap="flat" cmpd="sng" algn="ctr">
+                      <a:solidFill>
+                        <a:srgbClr val="EEEEEE"/>
+                      </a:solidFill>
+                      <a:prstDash val="solid"/>
+                      <a:round/>
+                      <a:headEnd type="none" w="med" len="med"/>
+                      <a:tailEnd type="none" w="med" len="med"/>
+                    </a:lnR>
+                    <a:lnT w="2540" cap="flat" cmpd="sng" algn="ctr">
+                      <a:solidFill>
+                        <a:srgbClr val="EEEEEE"/>
+                      </a:solidFill>
+                      <a:prstDash val="solid"/>
+                      <a:round/>
+                      <a:headEnd type="none" w="med" len="med"/>
+                      <a:tailEnd type="none" w="med" len="med"/>
+                    </a:lnT>
+                    <a:lnB w="2540" cap="flat" cmpd="sng" algn="ctr">
+                      <a:solidFill>
+                        <a:srgbClr val="EEEEEE"/>
+                      </a:solidFill>
+                      <a:prstDash val="solid"/>
+                      <a:round/>
+                      <a:headEnd type="none" w="med" len="med"/>
+                      <a:tailEnd type="none" w="med" len="med"/>
+                    </a:lnB>
+                  </a:tcPr>
+                </a:tc>
+                <a:tc>
+                  <a:txBody>
+                    <a:bodyPr/>
+                    <a:lstStyle/>
+                    <a:p>
+                      <a:pPr algn="ctr" indent="0" marL="0">
+                        <a:buNone/>
+                      </a:pPr>
+                      <a:r>
+                        <a:rPr lang="en-US" sz="500" dirty="0">
+                          <a:solidFill>
+                            <a:srgbClr val="777777"/>
+                          </a:solidFill>
+                          <a:latin typeface="Calibri" pitchFamily="34" charset="0"/>
+                          <a:ea typeface="Calibri" pitchFamily="34" charset="-122"/>
+                          <a:cs typeface="Calibri" pitchFamily="34" charset="-120"/>
+                        </a:rPr>
                         <a:t>0.55%</a:t>
                       </a:r>
                       <a:endParaRPr lang="en-US" sz="500" dirty="0">
@@ -17997,6 +19142,71 @@
                           <a:ea typeface="Calibri" pitchFamily="34" charset="-122"/>
                           <a:cs typeface="Calibri" pitchFamily="34" charset="-120"/>
                         </a:rPr>
+                        <a:t>0.46%</a:t>
+                      </a:r>
+                      <a:endParaRPr lang="en-US" sz="500" dirty="0">
+                        <a:latin typeface="Calibri" charset="0"/>
+                        <a:ea typeface="Calibri" charset="0"/>
+                        <a:cs typeface="Calibri" charset="0"/>
+                      </a:endParaRPr>
+                    </a:p>
+                  </a:txBody>
+                  <a:tcPr marL="91440" marR="91440" marT="45720" marB="45720">
+                    <a:lnL w="2540" cap="flat" cmpd="sng" algn="ctr">
+                      <a:solidFill>
+                        <a:srgbClr val="EEEEEE"/>
+                      </a:solidFill>
+                      <a:prstDash val="solid"/>
+                      <a:round/>
+                      <a:headEnd type="none" w="med" len="med"/>
+                      <a:tailEnd type="none" w="med" len="med"/>
+                    </a:lnL>
+                    <a:lnR w="2540" cap="flat" cmpd="sng" algn="ctr">
+                      <a:solidFill>
+                        <a:srgbClr val="EEEEEE"/>
+                      </a:solidFill>
+                      <a:prstDash val="solid"/>
+                      <a:round/>
+                      <a:headEnd type="none" w="med" len="med"/>
+                      <a:tailEnd type="none" w="med" len="med"/>
+                    </a:lnR>
+                    <a:lnT w="2540" cap="flat" cmpd="sng" algn="ctr">
+                      <a:solidFill>
+                        <a:srgbClr val="EEEEEE"/>
+                      </a:solidFill>
+                      <a:prstDash val="solid"/>
+                      <a:round/>
+                      <a:headEnd type="none" w="med" len="med"/>
+                      <a:tailEnd type="none" w="med" len="med"/>
+                    </a:lnT>
+                    <a:lnB w="2540" cap="flat" cmpd="sng" algn="ctr">
+                      <a:solidFill>
+                        <a:srgbClr val="EEEEEE"/>
+                      </a:solidFill>
+                      <a:prstDash val="solid"/>
+                      <a:round/>
+                      <a:headEnd type="none" w="med" len="med"/>
+                      <a:tailEnd type="none" w="med" len="med"/>
+                    </a:lnB>
+                  </a:tcPr>
+                </a:tc>
+                <a:tc>
+                  <a:txBody>
+                    <a:bodyPr/>
+                    <a:lstStyle/>
+                    <a:p>
+                      <a:pPr algn="ctr" indent="0" marL="0">
+                        <a:buNone/>
+                      </a:pPr>
+                      <a:r>
+                        <a:rPr lang="en-US" sz="500" dirty="0">
+                          <a:solidFill>
+                            <a:srgbClr val="777777"/>
+                          </a:solidFill>
+                          <a:latin typeface="Calibri" pitchFamily="34" charset="0"/>
+                          <a:ea typeface="Calibri" pitchFamily="34" charset="-122"/>
+                          <a:cs typeface="Calibri" pitchFamily="34" charset="-120"/>
+                        </a:rPr>
                         <a:t>0.53%</a:t>
                       </a:r>
                       <a:endParaRPr lang="en-US" sz="500" dirty="0">
@@ -18062,7 +19272,7 @@
                           <a:ea typeface="Calibri" pitchFamily="34" charset="-122"/>
                           <a:cs typeface="Calibri" pitchFamily="34" charset="-120"/>
                         </a:rPr>
-                        <a:t>0.49%</a:t>
+                        <a:t>0.48%</a:t>
                       </a:r>
                       <a:endParaRPr lang="en-US" sz="500" dirty="0">
                         <a:latin typeface="Calibri" charset="0"/>
@@ -18192,7 +19402,7 @@
                           <a:ea typeface="Calibri" pitchFamily="34" charset="-122"/>
                           <a:cs typeface="Calibri" pitchFamily="34" charset="-120"/>
                         </a:rPr>
-                        <a:t>0.48%</a:t>
+                        <a:t>0.45%</a:t>
                       </a:r>
                       <a:endParaRPr lang="en-US" sz="500" dirty="0">
                         <a:latin typeface="Calibri" charset="0"/>
@@ -18257,7 +19467,7 @@
                           <a:ea typeface="Calibri" pitchFamily="34" charset="-122"/>
                           <a:cs typeface="Calibri" pitchFamily="34" charset="-120"/>
                         </a:rPr>
-                        <a:t>0.46%</a:t>
+                        <a:t>0.44%</a:t>
                       </a:r>
                       <a:endParaRPr lang="en-US" sz="500" dirty="0">
                         <a:latin typeface="Calibri" charset="0"/>
@@ -18322,64 +19532,64 @@
                           <a:ea typeface="Calibri" pitchFamily="34" charset="-122"/>
                           <a:cs typeface="Calibri" pitchFamily="34" charset="-120"/>
                         </a:rPr>
-                        <a:t>0.45%</a:t>
-                      </a:r>
-                      <a:endParaRPr lang="en-US" sz="500" dirty="0">
-                        <a:latin typeface="Calibri" charset="0"/>
-                        <a:ea typeface="Calibri" charset="0"/>
-                        <a:cs typeface="Calibri" charset="0"/>
-                      </a:endParaRPr>
-                    </a:p>
-                  </a:txBody>
-                  <a:tcPr marL="91440" marR="91440" marT="45720" marB="45720">
-                    <a:lnL w="2540" cap="flat" cmpd="sng" algn="ctr">
-                      <a:solidFill>
-                        <a:srgbClr val="EEEEEE"/>
-                      </a:solidFill>
-                      <a:prstDash val="solid"/>
-                      <a:round/>
-                      <a:headEnd type="none" w="med" len="med"/>
-                      <a:tailEnd type="none" w="med" len="med"/>
-                    </a:lnL>
-                    <a:lnR w="2540" cap="flat" cmpd="sng" algn="ctr">
-                      <a:solidFill>
-                        <a:srgbClr val="EEEEEE"/>
-                      </a:solidFill>
-                      <a:prstDash val="solid"/>
-                      <a:round/>
-                      <a:headEnd type="none" w="med" len="med"/>
-                      <a:tailEnd type="none" w="med" len="med"/>
-                    </a:lnR>
-                    <a:lnT w="2540" cap="flat" cmpd="sng" algn="ctr">
-                      <a:solidFill>
-                        <a:srgbClr val="EEEEEE"/>
-                      </a:solidFill>
-                      <a:prstDash val="solid"/>
-                      <a:round/>
-                      <a:headEnd type="none" w="med" len="med"/>
-                      <a:tailEnd type="none" w="med" len="med"/>
-                    </a:lnT>
-                    <a:lnB w="2540" cap="flat" cmpd="sng" algn="ctr">
-                      <a:solidFill>
-                        <a:srgbClr val="EEEEEE"/>
-                      </a:solidFill>
-                      <a:prstDash val="solid"/>
-                      <a:round/>
-                      <a:headEnd type="none" w="med" len="med"/>
-                      <a:tailEnd type="none" w="med" len="med"/>
-                    </a:lnB>
-                  </a:tcPr>
-                </a:tc>
-                <a:tc>
-                  <a:txBody>
-                    <a:bodyPr/>
-                    <a:lstStyle/>
-                    <a:p>
-                      <a:pPr algn="ctr" indent="0" marL="0">
-                        <a:buNone/>
-                      </a:pPr>
-                      <a:r>
-                        <a:rPr lang="en-US" sz="500" dirty="0">
+                        <a:t>0.44%</a:t>
+                      </a:r>
+                      <a:endParaRPr lang="en-US" sz="500" dirty="0">
+                        <a:latin typeface="Calibri" charset="0"/>
+                        <a:ea typeface="Calibri" charset="0"/>
+                        <a:cs typeface="Calibri" charset="0"/>
+                      </a:endParaRPr>
+                    </a:p>
+                  </a:txBody>
+                  <a:tcPr marL="91440" marR="91440" marT="45720" marB="45720">
+                    <a:lnL w="2540" cap="flat" cmpd="sng" algn="ctr">
+                      <a:solidFill>
+                        <a:srgbClr val="EEEEEE"/>
+                      </a:solidFill>
+                      <a:prstDash val="solid"/>
+                      <a:round/>
+                      <a:headEnd type="none" w="med" len="med"/>
+                      <a:tailEnd type="none" w="med" len="med"/>
+                    </a:lnL>
+                    <a:lnR w="2540" cap="flat" cmpd="sng" algn="ctr">
+                      <a:solidFill>
+                        <a:srgbClr val="EEEEEE"/>
+                      </a:solidFill>
+                      <a:prstDash val="solid"/>
+                      <a:round/>
+                      <a:headEnd type="none" w="med" len="med"/>
+                      <a:tailEnd type="none" w="med" len="med"/>
+                    </a:lnR>
+                    <a:lnT w="2540" cap="flat" cmpd="sng" algn="ctr">
+                      <a:solidFill>
+                        <a:srgbClr val="EEEEEE"/>
+                      </a:solidFill>
+                      <a:prstDash val="solid"/>
+                      <a:round/>
+                      <a:headEnd type="none" w="med" len="med"/>
+                      <a:tailEnd type="none" w="med" len="med"/>
+                    </a:lnT>
+                    <a:lnB w="2540" cap="flat" cmpd="sng" algn="ctr">
+                      <a:solidFill>
+                        <a:srgbClr val="EEEEEE"/>
+                      </a:solidFill>
+                      <a:prstDash val="solid"/>
+                      <a:round/>
+                      <a:headEnd type="none" w="med" len="med"/>
+                      <a:tailEnd type="none" w="med" len="med"/>
+                    </a:lnB>
+                  </a:tcPr>
+                </a:tc>
+                <a:tc>
+                  <a:txBody>
+                    <a:bodyPr/>
+                    <a:lstStyle/>
+                    <a:p>
+                      <a:pPr algn="ctr" indent="0" marL="0">
+                        <a:buNone/>
+                      </a:pPr>
+                      <a:r>
+                        <a:rPr lang="en-US" sz="500" b="1" dirty="0">
                           <a:solidFill>
                             <a:srgbClr val="777777"/>
                           </a:solidFill>
@@ -18387,137 +19597,7 @@
                           <a:ea typeface="Calibri" pitchFamily="34" charset="-122"/>
                           <a:cs typeface="Calibri" pitchFamily="34" charset="-120"/>
                         </a:rPr>
-                        <a:t>0.44%</a:t>
-                      </a:r>
-                      <a:endParaRPr lang="en-US" sz="500" dirty="0">
-                        <a:latin typeface="Calibri" charset="0"/>
-                        <a:ea typeface="Calibri" charset="0"/>
-                        <a:cs typeface="Calibri" charset="0"/>
-                      </a:endParaRPr>
-                    </a:p>
-                  </a:txBody>
-                  <a:tcPr marL="91440" marR="91440" marT="45720" marB="45720">
-                    <a:lnL w="2540" cap="flat" cmpd="sng" algn="ctr">
-                      <a:solidFill>
-                        <a:srgbClr val="EEEEEE"/>
-                      </a:solidFill>
-                      <a:prstDash val="solid"/>
-                      <a:round/>
-                      <a:headEnd type="none" w="med" len="med"/>
-                      <a:tailEnd type="none" w="med" len="med"/>
-                    </a:lnL>
-                    <a:lnR w="2540" cap="flat" cmpd="sng" algn="ctr">
-                      <a:solidFill>
-                        <a:srgbClr val="EEEEEE"/>
-                      </a:solidFill>
-                      <a:prstDash val="solid"/>
-                      <a:round/>
-                      <a:headEnd type="none" w="med" len="med"/>
-                      <a:tailEnd type="none" w="med" len="med"/>
-                    </a:lnR>
-                    <a:lnT w="2540" cap="flat" cmpd="sng" algn="ctr">
-                      <a:solidFill>
-                        <a:srgbClr val="EEEEEE"/>
-                      </a:solidFill>
-                      <a:prstDash val="solid"/>
-                      <a:round/>
-                      <a:headEnd type="none" w="med" len="med"/>
-                      <a:tailEnd type="none" w="med" len="med"/>
-                    </a:lnT>
-                    <a:lnB w="2540" cap="flat" cmpd="sng" algn="ctr">
-                      <a:solidFill>
-                        <a:srgbClr val="EEEEEE"/>
-                      </a:solidFill>
-                      <a:prstDash val="solid"/>
-                      <a:round/>
-                      <a:headEnd type="none" w="med" len="med"/>
-                      <a:tailEnd type="none" w="med" len="med"/>
-                    </a:lnB>
-                  </a:tcPr>
-                </a:tc>
-                <a:tc>
-                  <a:txBody>
-                    <a:bodyPr/>
-                    <a:lstStyle/>
-                    <a:p>
-                      <a:pPr algn="ctr" indent="0" marL="0">
-                        <a:buNone/>
-                      </a:pPr>
-                      <a:r>
-                        <a:rPr lang="en-US" sz="500" dirty="0">
-                          <a:solidFill>
-                            <a:srgbClr val="777777"/>
-                          </a:solidFill>
-                          <a:latin typeface="Calibri" pitchFamily="34" charset="0"/>
-                          <a:ea typeface="Calibri" pitchFamily="34" charset="-122"/>
-                          <a:cs typeface="Calibri" pitchFamily="34" charset="-120"/>
-                        </a:rPr>
-                        <a:t>0.43%</a:t>
-                      </a:r>
-                      <a:endParaRPr lang="en-US" sz="500" dirty="0">
-                        <a:latin typeface="Calibri" charset="0"/>
-                        <a:ea typeface="Calibri" charset="0"/>
-                        <a:cs typeface="Calibri" charset="0"/>
-                      </a:endParaRPr>
-                    </a:p>
-                  </a:txBody>
-                  <a:tcPr marL="91440" marR="91440" marT="45720" marB="45720">
-                    <a:lnL w="2540" cap="flat" cmpd="sng" algn="ctr">
-                      <a:solidFill>
-                        <a:srgbClr val="EEEEEE"/>
-                      </a:solidFill>
-                      <a:prstDash val="solid"/>
-                      <a:round/>
-                      <a:headEnd type="none" w="med" len="med"/>
-                      <a:tailEnd type="none" w="med" len="med"/>
-                    </a:lnL>
-                    <a:lnR w="2540" cap="flat" cmpd="sng" algn="ctr">
-                      <a:solidFill>
-                        <a:srgbClr val="EEEEEE"/>
-                      </a:solidFill>
-                      <a:prstDash val="solid"/>
-                      <a:round/>
-                      <a:headEnd type="none" w="med" len="med"/>
-                      <a:tailEnd type="none" w="med" len="med"/>
-                    </a:lnR>
-                    <a:lnT w="2540" cap="flat" cmpd="sng" algn="ctr">
-                      <a:solidFill>
-                        <a:srgbClr val="EEEEEE"/>
-                      </a:solidFill>
-                      <a:prstDash val="solid"/>
-                      <a:round/>
-                      <a:headEnd type="none" w="med" len="med"/>
-                      <a:tailEnd type="none" w="med" len="med"/>
-                    </a:lnT>
-                    <a:lnB w="2540" cap="flat" cmpd="sng" algn="ctr">
-                      <a:solidFill>
-                        <a:srgbClr val="EEEEEE"/>
-                      </a:solidFill>
-                      <a:prstDash val="solid"/>
-                      <a:round/>
-                      <a:headEnd type="none" w="med" len="med"/>
-                      <a:tailEnd type="none" w="med" len="med"/>
-                    </a:lnB>
-                  </a:tcPr>
-                </a:tc>
-                <a:tc>
-                  <a:txBody>
-                    <a:bodyPr/>
-                    <a:lstStyle/>
-                    <a:p>
-                      <a:pPr algn="ctr" indent="0" marL="0">
-                        <a:buNone/>
-                      </a:pPr>
-                      <a:r>
-                        <a:rPr lang="en-US" sz="500" b="1" dirty="0">
-                          <a:solidFill>
-                            <a:srgbClr val="777777"/>
-                          </a:solidFill>
-                          <a:latin typeface="Calibri" pitchFamily="34" charset="0"/>
-                          <a:ea typeface="Calibri" pitchFamily="34" charset="-122"/>
-                          <a:cs typeface="Calibri" pitchFamily="34" charset="-120"/>
-                        </a:rPr>
-                        <a:t>6.38%</a:t>
+                        <a:t>6.54%</a:t>
                       </a:r>
                       <a:endParaRPr lang="en-US" sz="500" dirty="0">
                         <a:latin typeface="Calibri" charset="0"/>
@@ -18703,7 +19783,7 @@
                           <a:ea typeface="Calibri" pitchFamily="34" charset="-122"/>
                           <a:cs typeface="Calibri" pitchFamily="34" charset="-120"/>
                         </a:rPr>
-                        <a:t>0.00%</a:t>
+                        <a:t>0.59%</a:t>
                       </a:r>
                       <a:endParaRPr lang="en-US" sz="500" dirty="0">
                         <a:latin typeface="Calibri" charset="0"/>
@@ -19418,7 +20498,7 @@
                           <a:ea typeface="Calibri" pitchFamily="34" charset="-122"/>
                           <a:cs typeface="Calibri" pitchFamily="34" charset="-120"/>
                         </a:rPr>
-                        <a:t>-2.99%</a:t>
+                        <a:t>0.32%</a:t>
                       </a:r>
                       <a:endParaRPr lang="en-US" sz="500" dirty="0">
                         <a:latin typeface="Calibri" charset="0"/>
@@ -19483,7 +20563,7 @@
                           <a:ea typeface="Calibri" pitchFamily="34" charset="-122"/>
                           <a:cs typeface="Calibri" pitchFamily="34" charset="-120"/>
                         </a:rPr>
-                        <a:t>0.90%</a:t>
+                        <a:t>4.95%</a:t>
                       </a:r>
                       <a:endParaRPr lang="en-US" sz="500" dirty="0">
                         <a:latin typeface="Calibri" charset="0"/>
@@ -20646,6 +21726,201 @@
                           <a:ea typeface="Calibri" pitchFamily="34" charset="-122"/>
                           <a:cs typeface="Calibri" pitchFamily="34" charset="-120"/>
                         </a:rPr>
+                        <a:t>0.45%</a:t>
+                      </a:r>
+                      <a:endParaRPr lang="en-US" sz="500" dirty="0">
+                        <a:latin typeface="Calibri" charset="0"/>
+                        <a:ea typeface="Calibri" charset="0"/>
+                        <a:cs typeface="Calibri" charset="0"/>
+                      </a:endParaRPr>
+                    </a:p>
+                  </a:txBody>
+                  <a:tcPr marL="91440" marR="91440" marT="45720" marB="45720">
+                    <a:lnL w="2540" cap="flat" cmpd="sng" algn="ctr">
+                      <a:solidFill>
+                        <a:srgbClr val="EEEEEE"/>
+                      </a:solidFill>
+                      <a:prstDash val="solid"/>
+                      <a:round/>
+                      <a:headEnd type="none" w="med" len="med"/>
+                      <a:tailEnd type="none" w="med" len="med"/>
+                    </a:lnL>
+                    <a:lnR w="2540" cap="flat" cmpd="sng" algn="ctr">
+                      <a:solidFill>
+                        <a:srgbClr val="EEEEEE"/>
+                      </a:solidFill>
+                      <a:prstDash val="solid"/>
+                      <a:round/>
+                      <a:headEnd type="none" w="med" len="med"/>
+                      <a:tailEnd type="none" w="med" len="med"/>
+                    </a:lnR>
+                    <a:lnT w="2540" cap="flat" cmpd="sng" algn="ctr">
+                      <a:solidFill>
+                        <a:srgbClr val="EEEEEE"/>
+                      </a:solidFill>
+                      <a:prstDash val="solid"/>
+                      <a:round/>
+                      <a:headEnd type="none" w="med" len="med"/>
+                      <a:tailEnd type="none" w="med" len="med"/>
+                    </a:lnT>
+                    <a:lnB w="2540" cap="flat" cmpd="sng" algn="ctr">
+                      <a:solidFill>
+                        <a:srgbClr val="EEEEEE"/>
+                      </a:solidFill>
+                      <a:prstDash val="solid"/>
+                      <a:round/>
+                      <a:headEnd type="none" w="med" len="med"/>
+                      <a:tailEnd type="none" w="med" len="med"/>
+                    </a:lnB>
+                  </a:tcPr>
+                </a:tc>
+                <a:tc>
+                  <a:txBody>
+                    <a:bodyPr/>
+                    <a:lstStyle/>
+                    <a:p>
+                      <a:pPr algn="ctr" indent="0" marL="0">
+                        <a:buNone/>
+                      </a:pPr>
+                      <a:r>
+                        <a:rPr lang="en-US" sz="500" dirty="0">
+                          <a:solidFill>
+                            <a:srgbClr val="777777"/>
+                          </a:solidFill>
+                          <a:latin typeface="Calibri" pitchFamily="34" charset="0"/>
+                          <a:ea typeface="Calibri" pitchFamily="34" charset="-122"/>
+                          <a:cs typeface="Calibri" pitchFamily="34" charset="-120"/>
+                        </a:rPr>
+                        <a:t>0.39%</a:t>
+                      </a:r>
+                      <a:endParaRPr lang="en-US" sz="500" dirty="0">
+                        <a:latin typeface="Calibri" charset="0"/>
+                        <a:ea typeface="Calibri" charset="0"/>
+                        <a:cs typeface="Calibri" charset="0"/>
+                      </a:endParaRPr>
+                    </a:p>
+                  </a:txBody>
+                  <a:tcPr marL="91440" marR="91440" marT="45720" marB="45720">
+                    <a:lnL w="2540" cap="flat" cmpd="sng" algn="ctr">
+                      <a:solidFill>
+                        <a:srgbClr val="EEEEEE"/>
+                      </a:solidFill>
+                      <a:prstDash val="solid"/>
+                      <a:round/>
+                      <a:headEnd type="none" w="med" len="med"/>
+                      <a:tailEnd type="none" w="med" len="med"/>
+                    </a:lnL>
+                    <a:lnR w="2540" cap="flat" cmpd="sng" algn="ctr">
+                      <a:solidFill>
+                        <a:srgbClr val="EEEEEE"/>
+                      </a:solidFill>
+                      <a:prstDash val="solid"/>
+                      <a:round/>
+                      <a:headEnd type="none" w="med" len="med"/>
+                      <a:tailEnd type="none" w="med" len="med"/>
+                    </a:lnR>
+                    <a:lnT w="2540" cap="flat" cmpd="sng" algn="ctr">
+                      <a:solidFill>
+                        <a:srgbClr val="EEEEEE"/>
+                      </a:solidFill>
+                      <a:prstDash val="solid"/>
+                      <a:round/>
+                      <a:headEnd type="none" w="med" len="med"/>
+                      <a:tailEnd type="none" w="med" len="med"/>
+                    </a:lnT>
+                    <a:lnB w="2540" cap="flat" cmpd="sng" algn="ctr">
+                      <a:solidFill>
+                        <a:srgbClr val="EEEEEE"/>
+                      </a:solidFill>
+                      <a:prstDash val="solid"/>
+                      <a:round/>
+                      <a:headEnd type="none" w="med" len="med"/>
+                      <a:tailEnd type="none" w="med" len="med"/>
+                    </a:lnB>
+                  </a:tcPr>
+                </a:tc>
+                <a:tc>
+                  <a:txBody>
+                    <a:bodyPr/>
+                    <a:lstStyle/>
+                    <a:p>
+                      <a:pPr algn="ctr" indent="0" marL="0">
+                        <a:buNone/>
+                      </a:pPr>
+                      <a:r>
+                        <a:rPr lang="en-US" sz="500" dirty="0">
+                          <a:solidFill>
+                            <a:srgbClr val="777777"/>
+                          </a:solidFill>
+                          <a:latin typeface="Calibri" pitchFamily="34" charset="0"/>
+                          <a:ea typeface="Calibri" pitchFamily="34" charset="-122"/>
+                          <a:cs typeface="Calibri" pitchFamily="34" charset="-120"/>
+                        </a:rPr>
+                        <a:t>0.43%</a:t>
+                      </a:r>
+                      <a:endParaRPr lang="en-US" sz="500" dirty="0">
+                        <a:latin typeface="Calibri" charset="0"/>
+                        <a:ea typeface="Calibri" charset="0"/>
+                        <a:cs typeface="Calibri" charset="0"/>
+                      </a:endParaRPr>
+                    </a:p>
+                  </a:txBody>
+                  <a:tcPr marL="91440" marR="91440" marT="45720" marB="45720">
+                    <a:lnL w="2540" cap="flat" cmpd="sng" algn="ctr">
+                      <a:solidFill>
+                        <a:srgbClr val="EEEEEE"/>
+                      </a:solidFill>
+                      <a:prstDash val="solid"/>
+                      <a:round/>
+                      <a:headEnd type="none" w="med" len="med"/>
+                      <a:tailEnd type="none" w="med" len="med"/>
+                    </a:lnL>
+                    <a:lnR w="2540" cap="flat" cmpd="sng" algn="ctr">
+                      <a:solidFill>
+                        <a:srgbClr val="EEEEEE"/>
+                      </a:solidFill>
+                      <a:prstDash val="solid"/>
+                      <a:round/>
+                      <a:headEnd type="none" w="med" len="med"/>
+                      <a:tailEnd type="none" w="med" len="med"/>
+                    </a:lnR>
+                    <a:lnT w="2540" cap="flat" cmpd="sng" algn="ctr">
+                      <a:solidFill>
+                        <a:srgbClr val="EEEEEE"/>
+                      </a:solidFill>
+                      <a:prstDash val="solid"/>
+                      <a:round/>
+                      <a:headEnd type="none" w="med" len="med"/>
+                      <a:tailEnd type="none" w="med" len="med"/>
+                    </a:lnT>
+                    <a:lnB w="2540" cap="flat" cmpd="sng" algn="ctr">
+                      <a:solidFill>
+                        <a:srgbClr val="EEEEEE"/>
+                      </a:solidFill>
+                      <a:prstDash val="solid"/>
+                      <a:round/>
+                      <a:headEnd type="none" w="med" len="med"/>
+                      <a:tailEnd type="none" w="med" len="med"/>
+                    </a:lnB>
+                  </a:tcPr>
+                </a:tc>
+                <a:tc>
+                  <a:txBody>
+                    <a:bodyPr/>
+                    <a:lstStyle/>
+                    <a:p>
+                      <a:pPr algn="ctr" indent="0" marL="0">
+                        <a:buNone/>
+                      </a:pPr>
+                      <a:r>
+                        <a:rPr lang="en-US" sz="500" dirty="0">
+                          <a:solidFill>
+                            <a:srgbClr val="777777"/>
+                          </a:solidFill>
+                          <a:latin typeface="Calibri" pitchFamily="34" charset="0"/>
+                          <a:ea typeface="Calibri" pitchFamily="34" charset="-122"/>
+                          <a:cs typeface="Calibri" pitchFamily="34" charset="-120"/>
+                        </a:rPr>
                         <a:t>0.42%</a:t>
                       </a:r>
                       <a:endParaRPr lang="en-US" sz="500" dirty="0">
@@ -20776,6 +22051,201 @@
                           <a:ea typeface="Calibri" pitchFamily="34" charset="-122"/>
                           <a:cs typeface="Calibri" pitchFamily="34" charset="-120"/>
                         </a:rPr>
+                        <a:t>0.43%</a:t>
+                      </a:r>
+                      <a:endParaRPr lang="en-US" sz="500" dirty="0">
+                        <a:latin typeface="Calibri" charset="0"/>
+                        <a:ea typeface="Calibri" charset="0"/>
+                        <a:cs typeface="Calibri" charset="0"/>
+                      </a:endParaRPr>
+                    </a:p>
+                  </a:txBody>
+                  <a:tcPr marL="91440" marR="91440" marT="45720" marB="45720">
+                    <a:lnL w="2540" cap="flat" cmpd="sng" algn="ctr">
+                      <a:solidFill>
+                        <a:srgbClr val="EEEEEE"/>
+                      </a:solidFill>
+                      <a:prstDash val="solid"/>
+                      <a:round/>
+                      <a:headEnd type="none" w="med" len="med"/>
+                      <a:tailEnd type="none" w="med" len="med"/>
+                    </a:lnL>
+                    <a:lnR w="2540" cap="flat" cmpd="sng" algn="ctr">
+                      <a:solidFill>
+                        <a:srgbClr val="EEEEEE"/>
+                      </a:solidFill>
+                      <a:prstDash val="solid"/>
+                      <a:round/>
+                      <a:headEnd type="none" w="med" len="med"/>
+                      <a:tailEnd type="none" w="med" len="med"/>
+                    </a:lnR>
+                    <a:lnT w="2540" cap="flat" cmpd="sng" algn="ctr">
+                      <a:solidFill>
+                        <a:srgbClr val="EEEEEE"/>
+                      </a:solidFill>
+                      <a:prstDash val="solid"/>
+                      <a:round/>
+                      <a:headEnd type="none" w="med" len="med"/>
+                      <a:tailEnd type="none" w="med" len="med"/>
+                    </a:lnT>
+                    <a:lnB w="2540" cap="flat" cmpd="sng" algn="ctr">
+                      <a:solidFill>
+                        <a:srgbClr val="EEEEEE"/>
+                      </a:solidFill>
+                      <a:prstDash val="solid"/>
+                      <a:round/>
+                      <a:headEnd type="none" w="med" len="med"/>
+                      <a:tailEnd type="none" w="med" len="med"/>
+                    </a:lnB>
+                  </a:tcPr>
+                </a:tc>
+                <a:tc>
+                  <a:txBody>
+                    <a:bodyPr/>
+                    <a:lstStyle/>
+                    <a:p>
+                      <a:pPr algn="ctr" indent="0" marL="0">
+                        <a:buNone/>
+                      </a:pPr>
+                      <a:r>
+                        <a:rPr lang="en-US" sz="500" dirty="0">
+                          <a:solidFill>
+                            <a:srgbClr val="777777"/>
+                          </a:solidFill>
+                          <a:latin typeface="Calibri" pitchFamily="34" charset="0"/>
+                          <a:ea typeface="Calibri" pitchFamily="34" charset="-122"/>
+                          <a:cs typeface="Calibri" pitchFamily="34" charset="-120"/>
+                        </a:rPr>
+                        <a:t>0.43%</a:t>
+                      </a:r>
+                      <a:endParaRPr lang="en-US" sz="500" dirty="0">
+                        <a:latin typeface="Calibri" charset="0"/>
+                        <a:ea typeface="Calibri" charset="0"/>
+                        <a:cs typeface="Calibri" charset="0"/>
+                      </a:endParaRPr>
+                    </a:p>
+                  </a:txBody>
+                  <a:tcPr marL="91440" marR="91440" marT="45720" marB="45720">
+                    <a:lnL w="2540" cap="flat" cmpd="sng" algn="ctr">
+                      <a:solidFill>
+                        <a:srgbClr val="EEEEEE"/>
+                      </a:solidFill>
+                      <a:prstDash val="solid"/>
+                      <a:round/>
+                      <a:headEnd type="none" w="med" len="med"/>
+                      <a:tailEnd type="none" w="med" len="med"/>
+                    </a:lnL>
+                    <a:lnR w="2540" cap="flat" cmpd="sng" algn="ctr">
+                      <a:solidFill>
+                        <a:srgbClr val="EEEEEE"/>
+                      </a:solidFill>
+                      <a:prstDash val="solid"/>
+                      <a:round/>
+                      <a:headEnd type="none" w="med" len="med"/>
+                      <a:tailEnd type="none" w="med" len="med"/>
+                    </a:lnR>
+                    <a:lnT w="2540" cap="flat" cmpd="sng" algn="ctr">
+                      <a:solidFill>
+                        <a:srgbClr val="EEEEEE"/>
+                      </a:solidFill>
+                      <a:prstDash val="solid"/>
+                      <a:round/>
+                      <a:headEnd type="none" w="med" len="med"/>
+                      <a:tailEnd type="none" w="med" len="med"/>
+                    </a:lnT>
+                    <a:lnB w="2540" cap="flat" cmpd="sng" algn="ctr">
+                      <a:solidFill>
+                        <a:srgbClr val="EEEEEE"/>
+                      </a:solidFill>
+                      <a:prstDash val="solid"/>
+                      <a:round/>
+                      <a:headEnd type="none" w="med" len="med"/>
+                      <a:tailEnd type="none" w="med" len="med"/>
+                    </a:lnB>
+                  </a:tcPr>
+                </a:tc>
+                <a:tc>
+                  <a:txBody>
+                    <a:bodyPr/>
+                    <a:lstStyle/>
+                    <a:p>
+                      <a:pPr algn="ctr" indent="0" marL="0">
+                        <a:buNone/>
+                      </a:pPr>
+                      <a:r>
+                        <a:rPr lang="en-US" sz="500" dirty="0">
+                          <a:solidFill>
+                            <a:srgbClr val="777777"/>
+                          </a:solidFill>
+                          <a:latin typeface="Calibri" pitchFamily="34" charset="0"/>
+                          <a:ea typeface="Calibri" pitchFamily="34" charset="-122"/>
+                          <a:cs typeface="Calibri" pitchFamily="34" charset="-120"/>
+                        </a:rPr>
+                        <a:t>0.38%</a:t>
+                      </a:r>
+                      <a:endParaRPr lang="en-US" sz="500" dirty="0">
+                        <a:latin typeface="Calibri" charset="0"/>
+                        <a:ea typeface="Calibri" charset="0"/>
+                        <a:cs typeface="Calibri" charset="0"/>
+                      </a:endParaRPr>
+                    </a:p>
+                  </a:txBody>
+                  <a:tcPr marL="91440" marR="91440" marT="45720" marB="45720">
+                    <a:lnL w="2540" cap="flat" cmpd="sng" algn="ctr">
+                      <a:solidFill>
+                        <a:srgbClr val="EEEEEE"/>
+                      </a:solidFill>
+                      <a:prstDash val="solid"/>
+                      <a:round/>
+                      <a:headEnd type="none" w="med" len="med"/>
+                      <a:tailEnd type="none" w="med" len="med"/>
+                    </a:lnL>
+                    <a:lnR w="2540" cap="flat" cmpd="sng" algn="ctr">
+                      <a:solidFill>
+                        <a:srgbClr val="EEEEEE"/>
+                      </a:solidFill>
+                      <a:prstDash val="solid"/>
+                      <a:round/>
+                      <a:headEnd type="none" w="med" len="med"/>
+                      <a:tailEnd type="none" w="med" len="med"/>
+                    </a:lnR>
+                    <a:lnT w="2540" cap="flat" cmpd="sng" algn="ctr">
+                      <a:solidFill>
+                        <a:srgbClr val="EEEEEE"/>
+                      </a:solidFill>
+                      <a:prstDash val="solid"/>
+                      <a:round/>
+                      <a:headEnd type="none" w="med" len="med"/>
+                      <a:tailEnd type="none" w="med" len="med"/>
+                    </a:lnT>
+                    <a:lnB w="2540" cap="flat" cmpd="sng" algn="ctr">
+                      <a:solidFill>
+                        <a:srgbClr val="EEEEEE"/>
+                      </a:solidFill>
+                      <a:prstDash val="solid"/>
+                      <a:round/>
+                      <a:headEnd type="none" w="med" len="med"/>
+                      <a:tailEnd type="none" w="med" len="med"/>
+                    </a:lnB>
+                  </a:tcPr>
+                </a:tc>
+                <a:tc>
+                  <a:txBody>
+                    <a:bodyPr/>
+                    <a:lstStyle/>
+                    <a:p>
+                      <a:pPr algn="ctr" indent="0" marL="0">
+                        <a:buNone/>
+                      </a:pPr>
+                      <a:r>
+                        <a:rPr lang="en-US" sz="500" dirty="0">
+                          <a:solidFill>
+                            <a:srgbClr val="777777"/>
+                          </a:solidFill>
+                          <a:latin typeface="Calibri" pitchFamily="34" charset="0"/>
+                          <a:ea typeface="Calibri" pitchFamily="34" charset="-122"/>
+                          <a:cs typeface="Calibri" pitchFamily="34" charset="-120"/>
+                        </a:rPr>
                         <a:t>0.42%</a:t>
                       </a:r>
                       <a:endParaRPr lang="en-US" sz="500" dirty="0">
@@ -20841,7 +22311,7 @@
                           <a:ea typeface="Calibri" pitchFamily="34" charset="-122"/>
                           <a:cs typeface="Calibri" pitchFamily="34" charset="-120"/>
                         </a:rPr>
-                        <a:t>0.42%</a:t>
+                        <a:t>0.40%</a:t>
                       </a:r>
                       <a:endParaRPr lang="en-US" sz="500" dirty="0">
                         <a:latin typeface="Calibri" charset="0"/>
@@ -20906,7 +22376,7 @@
                           <a:ea typeface="Calibri" pitchFamily="34" charset="-122"/>
                           <a:cs typeface="Calibri" pitchFamily="34" charset="-120"/>
                         </a:rPr>
-                        <a:t>0.42%</a:t>
+                        <a:t>0.38%</a:t>
                       </a:r>
                       <a:endParaRPr lang="en-US" sz="500" dirty="0">
                         <a:latin typeface="Calibri" charset="0"/>
@@ -20971,64 +22441,64 @@
                           <a:ea typeface="Calibri" pitchFamily="34" charset="-122"/>
                           <a:cs typeface="Calibri" pitchFamily="34" charset="-120"/>
                         </a:rPr>
-                        <a:t>0.42%</a:t>
-                      </a:r>
-                      <a:endParaRPr lang="en-US" sz="500" dirty="0">
-                        <a:latin typeface="Calibri" charset="0"/>
-                        <a:ea typeface="Calibri" charset="0"/>
-                        <a:cs typeface="Calibri" charset="0"/>
-                      </a:endParaRPr>
-                    </a:p>
-                  </a:txBody>
-                  <a:tcPr marL="91440" marR="91440" marT="45720" marB="45720">
-                    <a:lnL w="2540" cap="flat" cmpd="sng" algn="ctr">
-                      <a:solidFill>
-                        <a:srgbClr val="EEEEEE"/>
-                      </a:solidFill>
-                      <a:prstDash val="solid"/>
-                      <a:round/>
-                      <a:headEnd type="none" w="med" len="med"/>
-                      <a:tailEnd type="none" w="med" len="med"/>
-                    </a:lnL>
-                    <a:lnR w="2540" cap="flat" cmpd="sng" algn="ctr">
-                      <a:solidFill>
-                        <a:srgbClr val="EEEEEE"/>
-                      </a:solidFill>
-                      <a:prstDash val="solid"/>
-                      <a:round/>
-                      <a:headEnd type="none" w="med" len="med"/>
-                      <a:tailEnd type="none" w="med" len="med"/>
-                    </a:lnR>
-                    <a:lnT w="2540" cap="flat" cmpd="sng" algn="ctr">
-                      <a:solidFill>
-                        <a:srgbClr val="EEEEEE"/>
-                      </a:solidFill>
-                      <a:prstDash val="solid"/>
-                      <a:round/>
-                      <a:headEnd type="none" w="med" len="med"/>
-                      <a:tailEnd type="none" w="med" len="med"/>
-                    </a:lnT>
-                    <a:lnB w="2540" cap="flat" cmpd="sng" algn="ctr">
-                      <a:solidFill>
-                        <a:srgbClr val="EEEEEE"/>
-                      </a:solidFill>
-                      <a:prstDash val="solid"/>
-                      <a:round/>
-                      <a:headEnd type="none" w="med" len="med"/>
-                      <a:tailEnd type="none" w="med" len="med"/>
-                    </a:lnB>
-                  </a:tcPr>
-                </a:tc>
-                <a:tc>
-                  <a:txBody>
-                    <a:bodyPr/>
-                    <a:lstStyle/>
-                    <a:p>
-                      <a:pPr algn="ctr" indent="0" marL="0">
-                        <a:buNone/>
-                      </a:pPr>
-                      <a:r>
-                        <a:rPr lang="en-US" sz="500" dirty="0">
+                        <a:t>0.41%</a:t>
+                      </a:r>
+                      <a:endParaRPr lang="en-US" sz="500" dirty="0">
+                        <a:latin typeface="Calibri" charset="0"/>
+                        <a:ea typeface="Calibri" charset="0"/>
+                        <a:cs typeface="Calibri" charset="0"/>
+                      </a:endParaRPr>
+                    </a:p>
+                  </a:txBody>
+                  <a:tcPr marL="91440" marR="91440" marT="45720" marB="45720">
+                    <a:lnL w="2540" cap="flat" cmpd="sng" algn="ctr">
+                      <a:solidFill>
+                        <a:srgbClr val="EEEEEE"/>
+                      </a:solidFill>
+                      <a:prstDash val="solid"/>
+                      <a:round/>
+                      <a:headEnd type="none" w="med" len="med"/>
+                      <a:tailEnd type="none" w="med" len="med"/>
+                    </a:lnL>
+                    <a:lnR w="2540" cap="flat" cmpd="sng" algn="ctr">
+                      <a:solidFill>
+                        <a:srgbClr val="EEEEEE"/>
+                      </a:solidFill>
+                      <a:prstDash val="solid"/>
+                      <a:round/>
+                      <a:headEnd type="none" w="med" len="med"/>
+                      <a:tailEnd type="none" w="med" len="med"/>
+                    </a:lnR>
+                    <a:lnT w="2540" cap="flat" cmpd="sng" algn="ctr">
+                      <a:solidFill>
+                        <a:srgbClr val="EEEEEE"/>
+                      </a:solidFill>
+                      <a:prstDash val="solid"/>
+                      <a:round/>
+                      <a:headEnd type="none" w="med" len="med"/>
+                      <a:tailEnd type="none" w="med" len="med"/>
+                    </a:lnT>
+                    <a:lnB w="2540" cap="flat" cmpd="sng" algn="ctr">
+                      <a:solidFill>
+                        <a:srgbClr val="EEEEEE"/>
+                      </a:solidFill>
+                      <a:prstDash val="solid"/>
+                      <a:round/>
+                      <a:headEnd type="none" w="med" len="med"/>
+                      <a:tailEnd type="none" w="med" len="med"/>
+                    </a:lnB>
+                  </a:tcPr>
+                </a:tc>
+                <a:tc>
+                  <a:txBody>
+                    <a:bodyPr/>
+                    <a:lstStyle/>
+                    <a:p>
+                      <a:pPr algn="ctr" indent="0" marL="0">
+                        <a:buNone/>
+                      </a:pPr>
+                      <a:r>
+                        <a:rPr lang="en-US" sz="500" b="1" dirty="0">
                           <a:solidFill>
                             <a:srgbClr val="777777"/>
                           </a:solidFill>
@@ -21036,397 +22506,7 @@
                           <a:ea typeface="Calibri" pitchFamily="34" charset="-122"/>
                           <a:cs typeface="Calibri" pitchFamily="34" charset="-120"/>
                         </a:rPr>
-                        <a:t>0.41%</a:t>
-                      </a:r>
-                      <a:endParaRPr lang="en-US" sz="500" dirty="0">
-                        <a:latin typeface="Calibri" charset="0"/>
-                        <a:ea typeface="Calibri" charset="0"/>
-                        <a:cs typeface="Calibri" charset="0"/>
-                      </a:endParaRPr>
-                    </a:p>
-                  </a:txBody>
-                  <a:tcPr marL="91440" marR="91440" marT="45720" marB="45720">
-                    <a:lnL w="2540" cap="flat" cmpd="sng" algn="ctr">
-                      <a:solidFill>
-                        <a:srgbClr val="EEEEEE"/>
-                      </a:solidFill>
-                      <a:prstDash val="solid"/>
-                      <a:round/>
-                      <a:headEnd type="none" w="med" len="med"/>
-                      <a:tailEnd type="none" w="med" len="med"/>
-                    </a:lnL>
-                    <a:lnR w="2540" cap="flat" cmpd="sng" algn="ctr">
-                      <a:solidFill>
-                        <a:srgbClr val="EEEEEE"/>
-                      </a:solidFill>
-                      <a:prstDash val="solid"/>
-                      <a:round/>
-                      <a:headEnd type="none" w="med" len="med"/>
-                      <a:tailEnd type="none" w="med" len="med"/>
-                    </a:lnR>
-                    <a:lnT w="2540" cap="flat" cmpd="sng" algn="ctr">
-                      <a:solidFill>
-                        <a:srgbClr val="EEEEEE"/>
-                      </a:solidFill>
-                      <a:prstDash val="solid"/>
-                      <a:round/>
-                      <a:headEnd type="none" w="med" len="med"/>
-                      <a:tailEnd type="none" w="med" len="med"/>
-                    </a:lnT>
-                    <a:lnB w="2540" cap="flat" cmpd="sng" algn="ctr">
-                      <a:solidFill>
-                        <a:srgbClr val="EEEEEE"/>
-                      </a:solidFill>
-                      <a:prstDash val="solid"/>
-                      <a:round/>
-                      <a:headEnd type="none" w="med" len="med"/>
-                      <a:tailEnd type="none" w="med" len="med"/>
-                    </a:lnB>
-                  </a:tcPr>
-                </a:tc>
-                <a:tc>
-                  <a:txBody>
-                    <a:bodyPr/>
-                    <a:lstStyle/>
-                    <a:p>
-                      <a:pPr algn="ctr" indent="0" marL="0">
-                        <a:buNone/>
-                      </a:pPr>
-                      <a:r>
-                        <a:rPr lang="en-US" sz="500" dirty="0">
-                          <a:solidFill>
-                            <a:srgbClr val="777777"/>
-                          </a:solidFill>
-                          <a:latin typeface="Calibri" pitchFamily="34" charset="0"/>
-                          <a:ea typeface="Calibri" pitchFamily="34" charset="-122"/>
-                          <a:cs typeface="Calibri" pitchFamily="34" charset="-120"/>
-                        </a:rPr>
-                        <a:t>0.40%</a:t>
-                      </a:r>
-                      <a:endParaRPr lang="en-US" sz="500" dirty="0">
-                        <a:latin typeface="Calibri" charset="0"/>
-                        <a:ea typeface="Calibri" charset="0"/>
-                        <a:cs typeface="Calibri" charset="0"/>
-                      </a:endParaRPr>
-                    </a:p>
-                  </a:txBody>
-                  <a:tcPr marL="91440" marR="91440" marT="45720" marB="45720">
-                    <a:lnL w="2540" cap="flat" cmpd="sng" algn="ctr">
-                      <a:solidFill>
-                        <a:srgbClr val="EEEEEE"/>
-                      </a:solidFill>
-                      <a:prstDash val="solid"/>
-                      <a:round/>
-                      <a:headEnd type="none" w="med" len="med"/>
-                      <a:tailEnd type="none" w="med" len="med"/>
-                    </a:lnL>
-                    <a:lnR w="2540" cap="flat" cmpd="sng" algn="ctr">
-                      <a:solidFill>
-                        <a:srgbClr val="EEEEEE"/>
-                      </a:solidFill>
-                      <a:prstDash val="solid"/>
-                      <a:round/>
-                      <a:headEnd type="none" w="med" len="med"/>
-                      <a:tailEnd type="none" w="med" len="med"/>
-                    </a:lnR>
-                    <a:lnT w="2540" cap="flat" cmpd="sng" algn="ctr">
-                      <a:solidFill>
-                        <a:srgbClr val="EEEEEE"/>
-                      </a:solidFill>
-                      <a:prstDash val="solid"/>
-                      <a:round/>
-                      <a:headEnd type="none" w="med" len="med"/>
-                      <a:tailEnd type="none" w="med" len="med"/>
-                    </a:lnT>
-                    <a:lnB w="2540" cap="flat" cmpd="sng" algn="ctr">
-                      <a:solidFill>
-                        <a:srgbClr val="EEEEEE"/>
-                      </a:solidFill>
-                      <a:prstDash val="solid"/>
-                      <a:round/>
-                      <a:headEnd type="none" w="med" len="med"/>
-                      <a:tailEnd type="none" w="med" len="med"/>
-                    </a:lnB>
-                  </a:tcPr>
-                </a:tc>
-                <a:tc>
-                  <a:txBody>
-                    <a:bodyPr/>
-                    <a:lstStyle/>
-                    <a:p>
-                      <a:pPr algn="ctr" indent="0" marL="0">
-                        <a:buNone/>
-                      </a:pPr>
-                      <a:r>
-                        <a:rPr lang="en-US" sz="500" dirty="0">
-                          <a:solidFill>
-                            <a:srgbClr val="777777"/>
-                          </a:solidFill>
-                          <a:latin typeface="Calibri" pitchFamily="34" charset="0"/>
-                          <a:ea typeface="Calibri" pitchFamily="34" charset="-122"/>
-                          <a:cs typeface="Calibri" pitchFamily="34" charset="-120"/>
-                        </a:rPr>
-                        <a:t>0.40%</a:t>
-                      </a:r>
-                      <a:endParaRPr lang="en-US" sz="500" dirty="0">
-                        <a:latin typeface="Calibri" charset="0"/>
-                        <a:ea typeface="Calibri" charset="0"/>
-                        <a:cs typeface="Calibri" charset="0"/>
-                      </a:endParaRPr>
-                    </a:p>
-                  </a:txBody>
-                  <a:tcPr marL="91440" marR="91440" marT="45720" marB="45720">
-                    <a:lnL w="2540" cap="flat" cmpd="sng" algn="ctr">
-                      <a:solidFill>
-                        <a:srgbClr val="EEEEEE"/>
-                      </a:solidFill>
-                      <a:prstDash val="solid"/>
-                      <a:round/>
-                      <a:headEnd type="none" w="med" len="med"/>
-                      <a:tailEnd type="none" w="med" len="med"/>
-                    </a:lnL>
-                    <a:lnR w="2540" cap="flat" cmpd="sng" algn="ctr">
-                      <a:solidFill>
-                        <a:srgbClr val="EEEEEE"/>
-                      </a:solidFill>
-                      <a:prstDash val="solid"/>
-                      <a:round/>
-                      <a:headEnd type="none" w="med" len="med"/>
-                      <a:tailEnd type="none" w="med" len="med"/>
-                    </a:lnR>
-                    <a:lnT w="2540" cap="flat" cmpd="sng" algn="ctr">
-                      <a:solidFill>
-                        <a:srgbClr val="EEEEEE"/>
-                      </a:solidFill>
-                      <a:prstDash val="solid"/>
-                      <a:round/>
-                      <a:headEnd type="none" w="med" len="med"/>
-                      <a:tailEnd type="none" w="med" len="med"/>
-                    </a:lnT>
-                    <a:lnB w="2540" cap="flat" cmpd="sng" algn="ctr">
-                      <a:solidFill>
-                        <a:srgbClr val="EEEEEE"/>
-                      </a:solidFill>
-                      <a:prstDash val="solid"/>
-                      <a:round/>
-                      <a:headEnd type="none" w="med" len="med"/>
-                      <a:tailEnd type="none" w="med" len="med"/>
-                    </a:lnB>
-                  </a:tcPr>
-                </a:tc>
-                <a:tc>
-                  <a:txBody>
-                    <a:bodyPr/>
-                    <a:lstStyle/>
-                    <a:p>
-                      <a:pPr algn="ctr" indent="0" marL="0">
-                        <a:buNone/>
-                      </a:pPr>
-                      <a:r>
-                        <a:rPr lang="en-US" sz="500" dirty="0">
-                          <a:solidFill>
-                            <a:srgbClr val="777777"/>
-                          </a:solidFill>
-                          <a:latin typeface="Calibri" pitchFamily="34" charset="0"/>
-                          <a:ea typeface="Calibri" pitchFamily="34" charset="-122"/>
-                          <a:cs typeface="Calibri" pitchFamily="34" charset="-120"/>
-                        </a:rPr>
-                        <a:t>0.40%</a:t>
-                      </a:r>
-                      <a:endParaRPr lang="en-US" sz="500" dirty="0">
-                        <a:latin typeface="Calibri" charset="0"/>
-                        <a:ea typeface="Calibri" charset="0"/>
-                        <a:cs typeface="Calibri" charset="0"/>
-                      </a:endParaRPr>
-                    </a:p>
-                  </a:txBody>
-                  <a:tcPr marL="91440" marR="91440" marT="45720" marB="45720">
-                    <a:lnL w="2540" cap="flat" cmpd="sng" algn="ctr">
-                      <a:solidFill>
-                        <a:srgbClr val="EEEEEE"/>
-                      </a:solidFill>
-                      <a:prstDash val="solid"/>
-                      <a:round/>
-                      <a:headEnd type="none" w="med" len="med"/>
-                      <a:tailEnd type="none" w="med" len="med"/>
-                    </a:lnL>
-                    <a:lnR w="2540" cap="flat" cmpd="sng" algn="ctr">
-                      <a:solidFill>
-                        <a:srgbClr val="EEEEEE"/>
-                      </a:solidFill>
-                      <a:prstDash val="solid"/>
-                      <a:round/>
-                      <a:headEnd type="none" w="med" len="med"/>
-                      <a:tailEnd type="none" w="med" len="med"/>
-                    </a:lnR>
-                    <a:lnT w="2540" cap="flat" cmpd="sng" algn="ctr">
-                      <a:solidFill>
-                        <a:srgbClr val="EEEEEE"/>
-                      </a:solidFill>
-                      <a:prstDash val="solid"/>
-                      <a:round/>
-                      <a:headEnd type="none" w="med" len="med"/>
-                      <a:tailEnd type="none" w="med" len="med"/>
-                    </a:lnT>
-                    <a:lnB w="2540" cap="flat" cmpd="sng" algn="ctr">
-                      <a:solidFill>
-                        <a:srgbClr val="EEEEEE"/>
-                      </a:solidFill>
-                      <a:prstDash val="solid"/>
-                      <a:round/>
-                      <a:headEnd type="none" w="med" len="med"/>
-                      <a:tailEnd type="none" w="med" len="med"/>
-                    </a:lnB>
-                  </a:tcPr>
-                </a:tc>
-                <a:tc>
-                  <a:txBody>
-                    <a:bodyPr/>
-                    <a:lstStyle/>
-                    <a:p>
-                      <a:pPr algn="ctr" indent="0" marL="0">
-                        <a:buNone/>
-                      </a:pPr>
-                      <a:r>
-                        <a:rPr lang="en-US" sz="500" dirty="0">
-                          <a:solidFill>
-                            <a:srgbClr val="777777"/>
-                          </a:solidFill>
-                          <a:latin typeface="Calibri" pitchFamily="34" charset="0"/>
-                          <a:ea typeface="Calibri" pitchFamily="34" charset="-122"/>
-                          <a:cs typeface="Calibri" pitchFamily="34" charset="-120"/>
-                        </a:rPr>
-                        <a:t>0.40%</a:t>
-                      </a:r>
-                      <a:endParaRPr lang="en-US" sz="500" dirty="0">
-                        <a:latin typeface="Calibri" charset="0"/>
-                        <a:ea typeface="Calibri" charset="0"/>
-                        <a:cs typeface="Calibri" charset="0"/>
-                      </a:endParaRPr>
-                    </a:p>
-                  </a:txBody>
-                  <a:tcPr marL="91440" marR="91440" marT="45720" marB="45720">
-                    <a:lnL w="2540" cap="flat" cmpd="sng" algn="ctr">
-                      <a:solidFill>
-                        <a:srgbClr val="EEEEEE"/>
-                      </a:solidFill>
-                      <a:prstDash val="solid"/>
-                      <a:round/>
-                      <a:headEnd type="none" w="med" len="med"/>
-                      <a:tailEnd type="none" w="med" len="med"/>
-                    </a:lnL>
-                    <a:lnR w="2540" cap="flat" cmpd="sng" algn="ctr">
-                      <a:solidFill>
-                        <a:srgbClr val="EEEEEE"/>
-                      </a:solidFill>
-                      <a:prstDash val="solid"/>
-                      <a:round/>
-                      <a:headEnd type="none" w="med" len="med"/>
-                      <a:tailEnd type="none" w="med" len="med"/>
-                    </a:lnR>
-                    <a:lnT w="2540" cap="flat" cmpd="sng" algn="ctr">
-                      <a:solidFill>
-                        <a:srgbClr val="EEEEEE"/>
-                      </a:solidFill>
-                      <a:prstDash val="solid"/>
-                      <a:round/>
-                      <a:headEnd type="none" w="med" len="med"/>
-                      <a:tailEnd type="none" w="med" len="med"/>
-                    </a:lnT>
-                    <a:lnB w="2540" cap="flat" cmpd="sng" algn="ctr">
-                      <a:solidFill>
-                        <a:srgbClr val="EEEEEE"/>
-                      </a:solidFill>
-                      <a:prstDash val="solid"/>
-                      <a:round/>
-                      <a:headEnd type="none" w="med" len="med"/>
-                      <a:tailEnd type="none" w="med" len="med"/>
-                    </a:lnB>
-                  </a:tcPr>
-                </a:tc>
-                <a:tc>
-                  <a:txBody>
-                    <a:bodyPr/>
-                    <a:lstStyle/>
-                    <a:p>
-                      <a:pPr algn="ctr" indent="0" marL="0">
-                        <a:buNone/>
-                      </a:pPr>
-                      <a:r>
-                        <a:rPr lang="en-US" sz="500" dirty="0">
-                          <a:solidFill>
-                            <a:srgbClr val="777777"/>
-                          </a:solidFill>
-                          <a:latin typeface="Calibri" pitchFamily="34" charset="0"/>
-                          <a:ea typeface="Calibri" pitchFamily="34" charset="-122"/>
-                          <a:cs typeface="Calibri" pitchFamily="34" charset="-120"/>
-                        </a:rPr>
-                        <a:t>0.39%</a:t>
-                      </a:r>
-                      <a:endParaRPr lang="en-US" sz="500" dirty="0">
-                        <a:latin typeface="Calibri" charset="0"/>
-                        <a:ea typeface="Calibri" charset="0"/>
-                        <a:cs typeface="Calibri" charset="0"/>
-                      </a:endParaRPr>
-                    </a:p>
-                  </a:txBody>
-                  <a:tcPr marL="91440" marR="91440" marT="45720" marB="45720">
-                    <a:lnL w="2540" cap="flat" cmpd="sng" algn="ctr">
-                      <a:solidFill>
-                        <a:srgbClr val="EEEEEE"/>
-                      </a:solidFill>
-                      <a:prstDash val="solid"/>
-                      <a:round/>
-                      <a:headEnd type="none" w="med" len="med"/>
-                      <a:tailEnd type="none" w="med" len="med"/>
-                    </a:lnL>
-                    <a:lnR w="2540" cap="flat" cmpd="sng" algn="ctr">
-                      <a:solidFill>
-                        <a:srgbClr val="EEEEEE"/>
-                      </a:solidFill>
-                      <a:prstDash val="solid"/>
-                      <a:round/>
-                      <a:headEnd type="none" w="med" len="med"/>
-                      <a:tailEnd type="none" w="med" len="med"/>
-                    </a:lnR>
-                    <a:lnT w="2540" cap="flat" cmpd="sng" algn="ctr">
-                      <a:solidFill>
-                        <a:srgbClr val="EEEEEE"/>
-                      </a:solidFill>
-                      <a:prstDash val="solid"/>
-                      <a:round/>
-                      <a:headEnd type="none" w="med" len="med"/>
-                      <a:tailEnd type="none" w="med" len="med"/>
-                    </a:lnT>
-                    <a:lnB w="2540" cap="flat" cmpd="sng" algn="ctr">
-                      <a:solidFill>
-                        <a:srgbClr val="EEEEEE"/>
-                      </a:solidFill>
-                      <a:prstDash val="solid"/>
-                      <a:round/>
-                      <a:headEnd type="none" w="med" len="med"/>
-                      <a:tailEnd type="none" w="med" len="med"/>
-                    </a:lnB>
-                  </a:tcPr>
-                </a:tc>
-                <a:tc>
-                  <a:txBody>
-                    <a:bodyPr/>
-                    <a:lstStyle/>
-                    <a:p>
-                      <a:pPr algn="ctr" indent="0" marL="0">
-                        <a:buNone/>
-                      </a:pPr>
-                      <a:r>
-                        <a:rPr lang="en-US" sz="500" b="1" dirty="0">
-                          <a:solidFill>
-                            <a:srgbClr val="777777"/>
-                          </a:solidFill>
-                          <a:latin typeface="Calibri" pitchFamily="34" charset="0"/>
-                          <a:ea typeface="Calibri" pitchFamily="34" charset="-122"/>
-                          <a:cs typeface="Calibri" pitchFamily="34" charset="-120"/>
-                        </a:rPr>
-                        <a:t>4.99%</a:t>
+                        <a:t>4.61%</a:t>
                       </a:r>
                       <a:endParaRPr lang="en-US" sz="500" dirty="0">
                         <a:latin typeface="Calibri" charset="0"/>
@@ -21612,7 +22692,7 @@
                           <a:ea typeface="Calibri" pitchFamily="34" charset="-122"/>
                           <a:cs typeface="Calibri" pitchFamily="34" charset="-120"/>
                         </a:rPr>
-                        <a:t>0.00%</a:t>
+                        <a:t>0.30%</a:t>
                       </a:r>
                       <a:endParaRPr lang="en-US" sz="500" dirty="0">
                         <a:latin typeface="Calibri" charset="0"/>
@@ -22067,7 +23147,7 @@
                           <a:ea typeface="Calibri" pitchFamily="34" charset="-122"/>
                           <a:cs typeface="Calibri" pitchFamily="34" charset="-120"/>
                         </a:rPr>
-                        <a:t>0.30%</a:t>
+                        <a:t>0.29%</a:t>
                       </a:r>
                       <a:endParaRPr lang="en-US" sz="500" dirty="0">
                         <a:latin typeface="Calibri" charset="0"/>
@@ -22327,7 +23407,7 @@
                           <a:ea typeface="Calibri" pitchFamily="34" charset="-122"/>
                           <a:cs typeface="Calibri" pitchFamily="34" charset="-120"/>
                         </a:rPr>
-                        <a:t>0.56%</a:t>
+                        <a:t>0.28%</a:t>
                       </a:r>
                       <a:endParaRPr lang="en-US" sz="500" dirty="0">
                         <a:latin typeface="Calibri" charset="0"/>
@@ -22392,7 +23472,7 @@
                           <a:ea typeface="Calibri" pitchFamily="34" charset="-122"/>
                           <a:cs typeface="Calibri" pitchFamily="34" charset="-120"/>
                         </a:rPr>
-                        <a:t>3.54%</a:t>
+                        <a:t>3.26%</a:t>
                       </a:r>
                       <a:endParaRPr lang="en-US" sz="500" dirty="0">
                         <a:latin typeface="Calibri" charset="0"/>
@@ -23098,7 +24178,7 @@
                           <a:ea typeface="Calibri" pitchFamily="34" charset="-122"/>
                           <a:cs typeface="Calibri" pitchFamily="34" charset="-120"/>
                         </a:rPr>
-                        <a:t>0.57%</a:t>
+                        <a:t>0.56%</a:t>
                       </a:r>
                       <a:endParaRPr lang="en-US" sz="500" dirty="0">
                         <a:latin typeface="Calibri" charset="0"/>
@@ -23163,7 +24243,7 @@
                           <a:ea typeface="Calibri" pitchFamily="34" charset="-122"/>
                           <a:cs typeface="Calibri" pitchFamily="34" charset="-120"/>
                         </a:rPr>
-                        <a:t>0.60%</a:t>
+                        <a:t>0.59%</a:t>
                       </a:r>
                       <a:endParaRPr lang="en-US" sz="500" dirty="0">
                         <a:latin typeface="Calibri" charset="0"/>
@@ -23293,7 +24373,7 @@
                           <a:ea typeface="Calibri" pitchFamily="34" charset="-122"/>
                           <a:cs typeface="Calibri" pitchFamily="34" charset="-120"/>
                         </a:rPr>
-                        <a:t>0.61%</a:t>
+                        <a:t>0.59%</a:t>
                       </a:r>
                       <a:endParaRPr lang="en-US" sz="500" dirty="0">
                         <a:latin typeface="Calibri" charset="0"/>
@@ -23358,7 +24438,7 @@
                           <a:ea typeface="Calibri" pitchFamily="34" charset="-122"/>
                           <a:cs typeface="Calibri" pitchFamily="34" charset="-120"/>
                         </a:rPr>
-                        <a:t>6.90%</a:t>
+                        <a:t>6.37%</a:t>
                       </a:r>
                       <a:endParaRPr lang="en-US" sz="500" dirty="0">
                         <a:latin typeface="Calibri" charset="0"/>
@@ -23555,7 +24635,7 @@
                           <a:ea typeface="Calibri" pitchFamily="34" charset="-122"/>
                           <a:cs typeface="Calibri" pitchFamily="34" charset="-120"/>
                         </a:rPr>
-                        <a:t>0.37%</a:t>
+                        <a:t>0.39%</a:t>
                       </a:r>
                       <a:endParaRPr lang="en-US" sz="500" dirty="0">
                         <a:latin typeface="Calibri" charset="0"/>
@@ -23620,7 +24700,7 @@
                           <a:ea typeface="Calibri" pitchFamily="34" charset="-122"/>
                           <a:cs typeface="Calibri" pitchFamily="34" charset="-120"/>
                         </a:rPr>
-                        <a:t>0.37%</a:t>
+                        <a:t>0.36%</a:t>
                       </a:r>
                       <a:endParaRPr lang="en-US" sz="500" dirty="0">
                         <a:latin typeface="Calibri" charset="0"/>
@@ -23685,7 +24765,7 @@
                           <a:ea typeface="Calibri" pitchFamily="34" charset="-122"/>
                           <a:cs typeface="Calibri" pitchFamily="34" charset="-120"/>
                         </a:rPr>
-                        <a:t>0.37%</a:t>
+                        <a:t>0.39%</a:t>
                       </a:r>
                       <a:endParaRPr lang="en-US" sz="500" dirty="0">
                         <a:latin typeface="Calibri" charset="0"/>
@@ -23750,7 +24830,7 @@
                           <a:ea typeface="Calibri" pitchFamily="34" charset="-122"/>
                           <a:cs typeface="Calibri" pitchFamily="34" charset="-120"/>
                         </a:rPr>
-                        <a:t>0.37%</a:t>
+                        <a:t>0.38%</a:t>
                       </a:r>
                       <a:endParaRPr lang="en-US" sz="500" dirty="0">
                         <a:latin typeface="Calibri" charset="0"/>
@@ -24433,7 +25513,7 @@
                           <a:ea typeface="Calibri" pitchFamily="34" charset="-122"/>
                           <a:cs typeface="Calibri" pitchFamily="34" charset="-120"/>
                         </a:rPr>
-                        <a:t>0.00%</a:t>
+                        <a:t>0.27%</a:t>
                       </a:r>
                       <a:endParaRPr lang="en-US" sz="500" dirty="0">
                         <a:latin typeface="Calibri" charset="0"/>
@@ -25311,6 +26391,136 @@
                           <a:ea typeface="Calibri" pitchFamily="34" charset="-122"/>
                           <a:cs typeface="Calibri" pitchFamily="34" charset="-120"/>
                         </a:rPr>
+                        <a:t>0.61%</a:t>
+                      </a:r>
+                      <a:endParaRPr lang="en-US" sz="500" dirty="0">
+                        <a:latin typeface="Calibri" charset="0"/>
+                        <a:ea typeface="Calibri" charset="0"/>
+                        <a:cs typeface="Calibri" charset="0"/>
+                      </a:endParaRPr>
+                    </a:p>
+                  </a:txBody>
+                  <a:tcPr marL="91440" marR="91440" marT="45720" marB="45720">
+                    <a:lnL w="2540" cap="flat" cmpd="sng" algn="ctr">
+                      <a:solidFill>
+                        <a:srgbClr val="EEEEEE"/>
+                      </a:solidFill>
+                      <a:prstDash val="solid"/>
+                      <a:round/>
+                      <a:headEnd type="none" w="med" len="med"/>
+                      <a:tailEnd type="none" w="med" len="med"/>
+                    </a:lnL>
+                    <a:lnR w="2540" cap="flat" cmpd="sng" algn="ctr">
+                      <a:solidFill>
+                        <a:srgbClr val="EEEEEE"/>
+                      </a:solidFill>
+                      <a:prstDash val="solid"/>
+                      <a:round/>
+                      <a:headEnd type="none" w="med" len="med"/>
+                      <a:tailEnd type="none" w="med" len="med"/>
+                    </a:lnR>
+                    <a:lnT w="2540" cap="flat" cmpd="sng" algn="ctr">
+                      <a:solidFill>
+                        <a:srgbClr val="EEEEEE"/>
+                      </a:solidFill>
+                      <a:prstDash val="solid"/>
+                      <a:round/>
+                      <a:headEnd type="none" w="med" len="med"/>
+                      <a:tailEnd type="none" w="med" len="med"/>
+                    </a:lnT>
+                    <a:lnB w="2540" cap="flat" cmpd="sng" algn="ctr">
+                      <a:solidFill>
+                        <a:srgbClr val="EEEEEE"/>
+                      </a:solidFill>
+                      <a:prstDash val="solid"/>
+                      <a:round/>
+                      <a:headEnd type="none" w="med" len="med"/>
+                      <a:tailEnd type="none" w="med" len="med"/>
+                    </a:lnB>
+                  </a:tcPr>
+                </a:tc>
+                <a:tc>
+                  <a:txBody>
+                    <a:bodyPr/>
+                    <a:lstStyle/>
+                    <a:p>
+                      <a:pPr algn="ctr" indent="0" marL="0">
+                        <a:buNone/>
+                      </a:pPr>
+                      <a:r>
+                        <a:rPr lang="en-US" sz="500" dirty="0">
+                          <a:solidFill>
+                            <a:srgbClr val="000000"/>
+                          </a:solidFill>
+                          <a:latin typeface="Calibri" pitchFamily="34" charset="0"/>
+                          <a:ea typeface="Calibri" pitchFamily="34" charset="-122"/>
+                          <a:cs typeface="Calibri" pitchFamily="34" charset="-120"/>
+                        </a:rPr>
+                        <a:t>0.58%</a:t>
+                      </a:r>
+                      <a:endParaRPr lang="en-US" sz="500" dirty="0">
+                        <a:latin typeface="Calibri" charset="0"/>
+                        <a:ea typeface="Calibri" charset="0"/>
+                        <a:cs typeface="Calibri" charset="0"/>
+                      </a:endParaRPr>
+                    </a:p>
+                  </a:txBody>
+                  <a:tcPr marL="91440" marR="91440" marT="45720" marB="45720">
+                    <a:lnL w="2540" cap="flat" cmpd="sng" algn="ctr">
+                      <a:solidFill>
+                        <a:srgbClr val="EEEEEE"/>
+                      </a:solidFill>
+                      <a:prstDash val="solid"/>
+                      <a:round/>
+                      <a:headEnd type="none" w="med" len="med"/>
+                      <a:tailEnd type="none" w="med" len="med"/>
+                    </a:lnL>
+                    <a:lnR w="2540" cap="flat" cmpd="sng" algn="ctr">
+                      <a:solidFill>
+                        <a:srgbClr val="EEEEEE"/>
+                      </a:solidFill>
+                      <a:prstDash val="solid"/>
+                      <a:round/>
+                      <a:headEnd type="none" w="med" len="med"/>
+                      <a:tailEnd type="none" w="med" len="med"/>
+                    </a:lnR>
+                    <a:lnT w="2540" cap="flat" cmpd="sng" algn="ctr">
+                      <a:solidFill>
+                        <a:srgbClr val="EEEEEE"/>
+                      </a:solidFill>
+                      <a:prstDash val="solid"/>
+                      <a:round/>
+                      <a:headEnd type="none" w="med" len="med"/>
+                      <a:tailEnd type="none" w="med" len="med"/>
+                    </a:lnT>
+                    <a:lnB w="2540" cap="flat" cmpd="sng" algn="ctr">
+                      <a:solidFill>
+                        <a:srgbClr val="EEEEEE"/>
+                      </a:solidFill>
+                      <a:prstDash val="solid"/>
+                      <a:round/>
+                      <a:headEnd type="none" w="med" len="med"/>
+                      <a:tailEnd type="none" w="med" len="med"/>
+                    </a:lnB>
+                  </a:tcPr>
+                </a:tc>
+                <a:tc>
+                  <a:txBody>
+                    <a:bodyPr/>
+                    <a:lstStyle/>
+                    <a:p>
+                      <a:pPr algn="ctr" indent="0" marL="0">
+                        <a:buNone/>
+                      </a:pPr>
+                      <a:r>
+                        <a:rPr lang="en-US" sz="500" dirty="0">
+                          <a:solidFill>
+                            <a:srgbClr val="000000"/>
+                          </a:solidFill>
+                          <a:latin typeface="Calibri" pitchFamily="34" charset="0"/>
+                          <a:ea typeface="Calibri" pitchFamily="34" charset="-122"/>
+                          <a:cs typeface="Calibri" pitchFamily="34" charset="-120"/>
+                        </a:rPr>
                         <a:t>0.60%</a:t>
                       </a:r>
                       <a:endParaRPr lang="en-US" sz="500" dirty="0">
@@ -25376,137 +26586,7 @@
                           <a:ea typeface="Calibri" pitchFamily="34" charset="-122"/>
                           <a:cs typeface="Calibri" pitchFamily="34" charset="-120"/>
                         </a:rPr>
-                        <a:t>0.58%</a:t>
-                      </a:r>
-                      <a:endParaRPr lang="en-US" sz="500" dirty="0">
-                        <a:latin typeface="Calibri" charset="0"/>
-                        <a:ea typeface="Calibri" charset="0"/>
-                        <a:cs typeface="Calibri" charset="0"/>
-                      </a:endParaRPr>
-                    </a:p>
-                  </a:txBody>
-                  <a:tcPr marL="91440" marR="91440" marT="45720" marB="45720">
-                    <a:lnL w="2540" cap="flat" cmpd="sng" algn="ctr">
-                      <a:solidFill>
-                        <a:srgbClr val="EEEEEE"/>
-                      </a:solidFill>
-                      <a:prstDash val="solid"/>
-                      <a:round/>
-                      <a:headEnd type="none" w="med" len="med"/>
-                      <a:tailEnd type="none" w="med" len="med"/>
-                    </a:lnL>
-                    <a:lnR w="2540" cap="flat" cmpd="sng" algn="ctr">
-                      <a:solidFill>
-                        <a:srgbClr val="EEEEEE"/>
-                      </a:solidFill>
-                      <a:prstDash val="solid"/>
-                      <a:round/>
-                      <a:headEnd type="none" w="med" len="med"/>
-                      <a:tailEnd type="none" w="med" len="med"/>
-                    </a:lnR>
-                    <a:lnT w="2540" cap="flat" cmpd="sng" algn="ctr">
-                      <a:solidFill>
-                        <a:srgbClr val="EEEEEE"/>
-                      </a:solidFill>
-                      <a:prstDash val="solid"/>
-                      <a:round/>
-                      <a:headEnd type="none" w="med" len="med"/>
-                      <a:tailEnd type="none" w="med" len="med"/>
-                    </a:lnT>
-                    <a:lnB w="2540" cap="flat" cmpd="sng" algn="ctr">
-                      <a:solidFill>
-                        <a:srgbClr val="EEEEEE"/>
-                      </a:solidFill>
-                      <a:prstDash val="solid"/>
-                      <a:round/>
-                      <a:headEnd type="none" w="med" len="med"/>
-                      <a:tailEnd type="none" w="med" len="med"/>
-                    </a:lnB>
-                  </a:tcPr>
-                </a:tc>
-                <a:tc>
-                  <a:txBody>
-                    <a:bodyPr/>
-                    <a:lstStyle/>
-                    <a:p>
-                      <a:pPr algn="ctr" indent="0" marL="0">
-                        <a:buNone/>
-                      </a:pPr>
-                      <a:r>
-                        <a:rPr lang="en-US" sz="500" dirty="0">
-                          <a:solidFill>
-                            <a:srgbClr val="000000"/>
-                          </a:solidFill>
-                          <a:latin typeface="Calibri" pitchFamily="34" charset="0"/>
-                          <a:ea typeface="Calibri" pitchFamily="34" charset="-122"/>
-                          <a:cs typeface="Calibri" pitchFamily="34" charset="-120"/>
-                        </a:rPr>
-                        <a:t>0.61%</a:t>
-                      </a:r>
-                      <a:endParaRPr lang="en-US" sz="500" dirty="0">
-                        <a:latin typeface="Calibri" charset="0"/>
-                        <a:ea typeface="Calibri" charset="0"/>
-                        <a:cs typeface="Calibri" charset="0"/>
-                      </a:endParaRPr>
-                    </a:p>
-                  </a:txBody>
-                  <a:tcPr marL="91440" marR="91440" marT="45720" marB="45720">
-                    <a:lnL w="2540" cap="flat" cmpd="sng" algn="ctr">
-                      <a:solidFill>
-                        <a:srgbClr val="EEEEEE"/>
-                      </a:solidFill>
-                      <a:prstDash val="solid"/>
-                      <a:round/>
-                      <a:headEnd type="none" w="med" len="med"/>
-                      <a:tailEnd type="none" w="med" len="med"/>
-                    </a:lnL>
-                    <a:lnR w="2540" cap="flat" cmpd="sng" algn="ctr">
-                      <a:solidFill>
-                        <a:srgbClr val="EEEEEE"/>
-                      </a:solidFill>
-                      <a:prstDash val="solid"/>
-                      <a:round/>
-                      <a:headEnd type="none" w="med" len="med"/>
-                      <a:tailEnd type="none" w="med" len="med"/>
-                    </a:lnR>
-                    <a:lnT w="2540" cap="flat" cmpd="sng" algn="ctr">
-                      <a:solidFill>
-                        <a:srgbClr val="EEEEEE"/>
-                      </a:solidFill>
-                      <a:prstDash val="solid"/>
-                      <a:round/>
-                      <a:headEnd type="none" w="med" len="med"/>
-                      <a:tailEnd type="none" w="med" len="med"/>
-                    </a:lnT>
-                    <a:lnB w="2540" cap="flat" cmpd="sng" algn="ctr">
-                      <a:solidFill>
-                        <a:srgbClr val="EEEEEE"/>
-                      </a:solidFill>
-                      <a:prstDash val="solid"/>
-                      <a:round/>
-                      <a:headEnd type="none" w="med" len="med"/>
-                      <a:tailEnd type="none" w="med" len="med"/>
-                    </a:lnB>
-                  </a:tcPr>
-                </a:tc>
-                <a:tc>
-                  <a:txBody>
-                    <a:bodyPr/>
-                    <a:lstStyle/>
-                    <a:p>
-                      <a:pPr algn="ctr" indent="0" marL="0">
-                        <a:buNone/>
-                      </a:pPr>
-                      <a:r>
-                        <a:rPr lang="en-US" sz="500" dirty="0">
-                          <a:solidFill>
-                            <a:srgbClr val="000000"/>
-                          </a:solidFill>
-                          <a:latin typeface="Calibri" pitchFamily="34" charset="0"/>
-                          <a:ea typeface="Calibri" pitchFamily="34" charset="-122"/>
-                          <a:cs typeface="Calibri" pitchFamily="34" charset="-120"/>
-                        </a:rPr>
-                        <a:t>0.61%</a:t>
+                        <a:t>0.60%</a:t>
                       </a:r>
                       <a:endParaRPr lang="en-US" sz="500" dirty="0">
                         <a:latin typeface="Calibri" charset="0"/>

--- a/folletos/2026-04/pptx/FIP_VANTRUST_LIQUIDEZ_ALTO_APORTE.pptx
+++ b/folletos/2026-04/pptx/FIP_VANTRUST_LIQUIDEZ_ALTO_APORTE.pptx
@@ -4193,7 +4193,7 @@
                 <a:ea typeface="Calibri" pitchFamily="34" charset="-122"/>
                 <a:cs typeface="Calibri" pitchFamily="34" charset="-120"/>
               </a:rPr>
-              <a:t>prueba CLP</a:t>
+              <a:t>prueba 13 CLP</a:t>
             </a:r>
             <a:endParaRPr lang="en-US" sz="800" dirty="0"/>
           </a:p>

--- a/folletos/2026-04/pptx/FIP_VANTRUST_LIQUIDEZ_ALTO_APORTE.pptx
+++ b/folletos/2026-04/pptx/FIP_VANTRUST_LIQUIDEZ_ALTO_APORTE.pptx
@@ -4193,7 +4193,7 @@
                 <a:ea typeface="Calibri" pitchFamily="34" charset="-122"/>
                 <a:cs typeface="Calibri" pitchFamily="34" charset="-120"/>
               </a:rPr>
-              <a:t>prueba CLP</a:t>
+              <a:t>prueba 14 CLP</a:t>
             </a:r>
             <a:endParaRPr lang="en-US" sz="800" dirty="0"/>
           </a:p>
